--- a/forcodex/手艺人蒸馏器-xs-internal-pre-3min.pptx
+++ b/forcodex/手艺人蒸馏器-xs-internal-pre-3min.pptx
@@ -2,16 +2,16 @@
 <file path=ppt/presentation.xml><?xml version="1.0" encoding="utf-8"?>
 <p:presentation xmlns:p="http://schemas.openxmlformats.org/presentationml/2006/main">
   <p:sldMasterIdLst>
-    <p:sldMasterId xmlns:r="http://schemas.openxmlformats.org/officeDocument/2006/relationships" id="2147483648" r:id="R75656dfe1fc94c6a"/>
+    <p:sldMasterId xmlns:r="http://schemas.openxmlformats.org/officeDocument/2006/relationships" id="2147483648" r:id="R80d48a4205174c4d"/>
   </p:sldMasterIdLst>
   <p:notesMasterIdLst>
-    <p:notesMasterId xmlns:r="http://schemas.openxmlformats.org/officeDocument/2006/relationships" r:id="Rd8742ebbd2da4c6e"/>
+    <p:notesMasterId xmlns:r="http://schemas.openxmlformats.org/officeDocument/2006/relationships" r:id="R81181b0076dd4eba"/>
   </p:notesMasterIdLst>
   <p:sldIdLst>
-    <p:sldId xmlns:r="http://schemas.openxmlformats.org/officeDocument/2006/relationships" id="256" r:id="R9db54996c82640ca"/>
-    <p:sldId xmlns:r="http://schemas.openxmlformats.org/officeDocument/2006/relationships" id="257" r:id="Re7f93fab91394be0"/>
-    <p:sldId xmlns:r="http://schemas.openxmlformats.org/officeDocument/2006/relationships" id="258" r:id="Rb09744bcea4a4f85"/>
-    <p:sldId xmlns:r="http://schemas.openxmlformats.org/officeDocument/2006/relationships" id="259" r:id="R591edb6c666b4fb0"/>
+    <p:sldId xmlns:r="http://schemas.openxmlformats.org/officeDocument/2006/relationships" id="256" r:id="R3f2e77587e14487f"/>
+    <p:sldId xmlns:r="http://schemas.openxmlformats.org/officeDocument/2006/relationships" id="257" r:id="R21033e19626a48be"/>
+    <p:sldId xmlns:r="http://schemas.openxmlformats.org/officeDocument/2006/relationships" id="258" r:id="R03418fdeaadb4626"/>
+    <p:sldId xmlns:r="http://schemas.openxmlformats.org/officeDocument/2006/relationships" id="259" r:id="R6f4d7d4ab6c0418f"/>
   </p:sldIdLst>
   <p:sldSz cx="12192000" cy="6858000"/>
   <p:notesSz cx="6858000" cy="9144000"/>
@@ -802,7 +802,7 @@
   </p:cSld>
   <p:clrMap bg1="lt1" tx1="dk1" bg2="lt2" tx2="dk2" accent1="accent1" accent2="accent2" accent3="accent3" accent4="accent4" accent5="accent5" accent6="accent6" hlink="hlink" folHlink="folHlink"/>
   <p:sldLayoutIdLst>
-    <p:sldLayoutId xmlns:r="http://schemas.openxmlformats.org/officeDocument/2006/relationships" id="2147483649" r:id="Ra5dc3ba4375042ab"/>
+    <p:sldLayoutId xmlns:r="http://schemas.openxmlformats.org/officeDocument/2006/relationships" id="2147483649" r:id="R964a115f2d914f6f"/>
   </p:sldLayoutIdLst>
   <p:txStyles>
     <p:titleStyle>
@@ -1514,7 +1514,7 @@
           <p:cNvPr id="1" name="">
             <a:extLst xmlns:a="http://schemas.openxmlformats.org/drawingml/2006/main">
               <a:ext uri="{FF2B5EF4-FFF2-40B4-BE49-F238E27FC236}">
-                <a16:creationId xmlns:a16="http://schemas.microsoft.com/office/drawing/2014/main" id="{A03A62EF-732E-4D8E-8E6B-02DAB087C3A6}"/>
+                <a16:creationId xmlns:a16="http://schemas.microsoft.com/office/drawing/2014/main" id="{6A61BDC2-ABC6-47AB-9822-98608A3A06BD}"/>
               </a:ext>
             </a:extLst>
           </p:cNvPr>
@@ -1547,7 +1547,7 @@
           <p:cNvPr id="2" name="">
             <a:extLst xmlns:a="http://schemas.openxmlformats.org/drawingml/2006/main">
               <a:ext uri="{FF2B5EF4-FFF2-40B4-BE49-F238E27FC236}">
-                <a16:creationId xmlns:a16="http://schemas.microsoft.com/office/drawing/2014/main" id="{262A5626-6548-43FE-8455-1D41C6C58C72}"/>
+                <a16:creationId xmlns:a16="http://schemas.microsoft.com/office/drawing/2014/main" id="{58576E1A-2317-4DF7-8BE0-85A4CC5A8E78}"/>
               </a:ext>
             </a:extLst>
           </p:cNvPr>
@@ -1580,7 +1580,7 @@
           <p:cNvPr id="3" name="">
             <a:extLst xmlns:a="http://schemas.openxmlformats.org/drawingml/2006/main">
               <a:ext uri="{FF2B5EF4-FFF2-40B4-BE49-F238E27FC236}">
-                <a16:creationId xmlns:a16="http://schemas.microsoft.com/office/drawing/2014/main" id="{7E85F642-8A96-4934-B835-A092CD677725}"/>
+                <a16:creationId xmlns:a16="http://schemas.microsoft.com/office/drawing/2014/main" id="{24040237-4C17-4D9D-B7EE-A094DA25F1BF}"/>
               </a:ext>
             </a:extLst>
           </p:cNvPr>
@@ -1613,7 +1613,7 @@
           <p:cNvPr id="4" name="">
             <a:extLst xmlns:a="http://schemas.openxmlformats.org/drawingml/2006/main">
               <a:ext uri="{FF2B5EF4-FFF2-40B4-BE49-F238E27FC236}">
-                <a16:creationId xmlns:a16="http://schemas.microsoft.com/office/drawing/2014/main" id="{FD9E24A2-BACB-4829-B97D-916E74B0DEAD}"/>
+                <a16:creationId xmlns:a16="http://schemas.microsoft.com/office/drawing/2014/main" id="{BBD50AE6-73A4-4BBD-8CEC-243BA3A1073E}"/>
               </a:ext>
             </a:extLst>
           </p:cNvPr>
@@ -1663,7 +1663,7 @@
           <p:cNvPr id="5" name="">
             <a:extLst xmlns:a="http://schemas.openxmlformats.org/drawingml/2006/main">
               <a:ext uri="{FF2B5EF4-FFF2-40B4-BE49-F238E27FC236}">
-                <a16:creationId xmlns:a16="http://schemas.microsoft.com/office/drawing/2014/main" id="{2EB02ECD-965C-4D62-BE58-417A15A33960}"/>
+                <a16:creationId xmlns:a16="http://schemas.microsoft.com/office/drawing/2014/main" id="{E5831420-5F4E-48B4-BC92-69AF840AAD50}"/>
               </a:ext>
             </a:extLst>
           </p:cNvPr>
@@ -1713,7 +1713,7 @@
           <p:cNvPr id="6" name="">
             <a:extLst xmlns:a="http://schemas.openxmlformats.org/drawingml/2006/main">
               <a:ext uri="{FF2B5EF4-FFF2-40B4-BE49-F238E27FC236}">
-                <a16:creationId xmlns:a16="http://schemas.microsoft.com/office/drawing/2014/main" id="{24F348DA-727B-4D25-A089-BDD400A7BA7A}"/>
+                <a16:creationId xmlns:a16="http://schemas.microsoft.com/office/drawing/2014/main" id="{207CFDD0-07E4-4885-AB33-359A04F85E58}"/>
               </a:ext>
             </a:extLst>
           </p:cNvPr>
@@ -1748,7 +1748,7 @@
           <p:cNvPr id="7" name="">
             <a:extLst xmlns:a="http://schemas.openxmlformats.org/drawingml/2006/main">
               <a:ext uri="{FF2B5EF4-FFF2-40B4-BE49-F238E27FC236}">
-                <a16:creationId xmlns:a16="http://schemas.microsoft.com/office/drawing/2014/main" id="{58E47A03-210B-4B02-9939-FAB8B55F14E1}"/>
+                <a16:creationId xmlns:a16="http://schemas.microsoft.com/office/drawing/2014/main" id="{8FFE219C-CA7F-4891-A889-23D54666D9E4}"/>
               </a:ext>
             </a:extLst>
           </p:cNvPr>
@@ -1798,7 +1798,7 @@
           <p:cNvPr id="8" name="">
             <a:extLst xmlns:a="http://schemas.openxmlformats.org/drawingml/2006/main">
               <a:ext uri="{FF2B5EF4-FFF2-40B4-BE49-F238E27FC236}">
-                <a16:creationId xmlns:a16="http://schemas.microsoft.com/office/drawing/2014/main" id="{C76A72E1-FA39-48FE-8C7A-28A3CF2D8DAB}"/>
+                <a16:creationId xmlns:a16="http://schemas.microsoft.com/office/drawing/2014/main" id="{D93EDEB8-F236-466D-B707-EEE2B53992F0}"/>
               </a:ext>
             </a:extLst>
           </p:cNvPr>
@@ -1848,7 +1848,7 @@
           <p:cNvPr id="9" name="">
             <a:extLst xmlns:a="http://schemas.openxmlformats.org/drawingml/2006/main">
               <a:ext uri="{FF2B5EF4-FFF2-40B4-BE49-F238E27FC236}">
-                <a16:creationId xmlns:a16="http://schemas.microsoft.com/office/drawing/2014/main" id="{9ECDD6F8-052F-44EC-9E38-A32E0B7A7A7A}"/>
+                <a16:creationId xmlns:a16="http://schemas.microsoft.com/office/drawing/2014/main" id="{634E0023-F62E-4482-A03D-0C256D9A4591}"/>
               </a:ext>
             </a:extLst>
           </p:cNvPr>
@@ -1898,7 +1898,7 @@
           <p:cNvPr id="10" name="">
             <a:extLst xmlns:a="http://schemas.openxmlformats.org/drawingml/2006/main">
               <a:ext uri="{FF2B5EF4-FFF2-40B4-BE49-F238E27FC236}">
-                <a16:creationId xmlns:a16="http://schemas.microsoft.com/office/drawing/2014/main" id="{A677E77E-0198-4515-9C60-DCA8B95E7D6D}"/>
+                <a16:creationId xmlns:a16="http://schemas.microsoft.com/office/drawing/2014/main" id="{0AC0CA5D-3AEA-49C0-AA73-9C427CF22636}"/>
               </a:ext>
             </a:extLst>
           </p:cNvPr>
@@ -1948,7 +1948,7 @@
           <p:cNvPr id="11" name="">
             <a:extLst xmlns:a="http://schemas.openxmlformats.org/drawingml/2006/main">
               <a:ext uri="{FF2B5EF4-FFF2-40B4-BE49-F238E27FC236}">
-                <a16:creationId xmlns:a16="http://schemas.microsoft.com/office/drawing/2014/main" id="{267C0697-0116-411C-BCD1-97C4184E72B7}"/>
+                <a16:creationId xmlns:a16="http://schemas.microsoft.com/office/drawing/2014/main" id="{381A3DC2-1D7C-436A-8E24-E719910895A4}"/>
               </a:ext>
             </a:extLst>
           </p:cNvPr>
@@ -1989,7 +1989,7 @@
           <p:cNvPr id="12" name="">
             <a:extLst xmlns:a="http://schemas.openxmlformats.org/drawingml/2006/main">
               <a:ext uri="{FF2B5EF4-FFF2-40B4-BE49-F238E27FC236}">
-                <a16:creationId xmlns:a16="http://schemas.microsoft.com/office/drawing/2014/main" id="{DEBD6EEB-E575-4176-92E9-C0BA04F0982C}"/>
+                <a16:creationId xmlns:a16="http://schemas.microsoft.com/office/drawing/2014/main" id="{264FE436-C9B7-45CF-A7D7-E9D0F196831E}"/>
               </a:ext>
             </a:extLst>
           </p:cNvPr>
@@ -2039,7 +2039,7 @@
           <p:cNvPr id="13" name="">
             <a:extLst xmlns:a="http://schemas.openxmlformats.org/drawingml/2006/main">
               <a:ext uri="{FF2B5EF4-FFF2-40B4-BE49-F238E27FC236}">
-                <a16:creationId xmlns:a16="http://schemas.microsoft.com/office/drawing/2014/main" id="{FC04D110-A407-405C-885D-C4151669C977}"/>
+                <a16:creationId xmlns:a16="http://schemas.microsoft.com/office/drawing/2014/main" id="{1E6099A6-A156-45F3-9409-F90EC1D24939}"/>
               </a:ext>
             </a:extLst>
           </p:cNvPr>
@@ -2089,7 +2089,7 @@
           <p:cNvPr id="14" name="">
             <a:extLst xmlns:a="http://schemas.openxmlformats.org/drawingml/2006/main">
               <a:ext uri="{FF2B5EF4-FFF2-40B4-BE49-F238E27FC236}">
-                <a16:creationId xmlns:a16="http://schemas.microsoft.com/office/drawing/2014/main" id="{AD7E6E37-90AA-45CE-A193-C99F1B2D9DE4}"/>
+                <a16:creationId xmlns:a16="http://schemas.microsoft.com/office/drawing/2014/main" id="{B6779157-97A7-4908-B2B7-BB319662F5F7}"/>
               </a:ext>
             </a:extLst>
           </p:cNvPr>
@@ -2139,7 +2139,7 @@
           <p:cNvPr id="15" name="">
             <a:extLst xmlns:a="http://schemas.openxmlformats.org/drawingml/2006/main">
               <a:ext uri="{FF2B5EF4-FFF2-40B4-BE49-F238E27FC236}">
-                <a16:creationId xmlns:a16="http://schemas.microsoft.com/office/drawing/2014/main" id="{6A1E2706-FF4B-4A8D-82C9-D743AC5F4527}"/>
+                <a16:creationId xmlns:a16="http://schemas.microsoft.com/office/drawing/2014/main" id="{2CA1EC55-345E-490C-8393-E25069675DC1}"/>
               </a:ext>
             </a:extLst>
           </p:cNvPr>
@@ -2189,7 +2189,7 @@
           <p:cNvPr id="16" name="">
             <a:extLst xmlns:a="http://schemas.openxmlformats.org/drawingml/2006/main">
               <a:ext uri="{FF2B5EF4-FFF2-40B4-BE49-F238E27FC236}">
-                <a16:creationId xmlns:a16="http://schemas.microsoft.com/office/drawing/2014/main" id="{9F09E467-4205-4937-8059-ABD13EACC3E9}"/>
+                <a16:creationId xmlns:a16="http://schemas.microsoft.com/office/drawing/2014/main" id="{318EDD5B-3F2D-42A9-9809-FE9F70EEA078}"/>
               </a:ext>
             </a:extLst>
           </p:cNvPr>
@@ -2239,7 +2239,7 @@
           <p:cNvPr id="17" name="">
             <a:extLst xmlns:a="http://schemas.openxmlformats.org/drawingml/2006/main">
               <a:ext uri="{FF2B5EF4-FFF2-40B4-BE49-F238E27FC236}">
-                <a16:creationId xmlns:a16="http://schemas.microsoft.com/office/drawing/2014/main" id="{ED56B082-2B8A-4A86-A22A-86EBC1F0B822}"/>
+                <a16:creationId xmlns:a16="http://schemas.microsoft.com/office/drawing/2014/main" id="{86B5027B-578F-49A7-A7CD-6BEF1DD7448F}"/>
               </a:ext>
             </a:extLst>
           </p:cNvPr>
@@ -2289,7 +2289,7 @@
           <p:cNvPr id="18" name="">
             <a:extLst xmlns:a="http://schemas.openxmlformats.org/drawingml/2006/main">
               <a:ext uri="{FF2B5EF4-FFF2-40B4-BE49-F238E27FC236}">
-                <a16:creationId xmlns:a16="http://schemas.microsoft.com/office/drawing/2014/main" id="{F5F2398A-D316-4C7E-97B2-A75F5C9234CC}"/>
+                <a16:creationId xmlns:a16="http://schemas.microsoft.com/office/drawing/2014/main" id="{326E1868-2CB5-435B-85C0-502F5CDEF26C}"/>
               </a:ext>
             </a:extLst>
           </p:cNvPr>
@@ -2337,7 +2337,7 @@
     </p:spTree>
     <p:extLst>
       <p:ext uri="{BB962C8B-B14F-4D97-AF65-F5344CB8AC3E}">
-        <p14:creationId xmlns:p14="http://schemas.microsoft.com/office/powerpoint/2010/main" val="668631556"/>
+        <p14:creationId xmlns:p14="http://schemas.microsoft.com/office/powerpoint/2010/main" val="106050563"/>
       </p:ext>
     </p:extLst>
   </p:cSld>
@@ -2368,7 +2368,7 @@
           <p:cNvPr id="1" name="">
             <a:extLst xmlns:a="http://schemas.openxmlformats.org/drawingml/2006/main">
               <a:ext uri="{FF2B5EF4-FFF2-40B4-BE49-F238E27FC236}">
-                <a16:creationId xmlns:a16="http://schemas.microsoft.com/office/drawing/2014/main" id="{18957E8A-3BF8-4143-B7CF-B1BE65648207}"/>
+                <a16:creationId xmlns:a16="http://schemas.microsoft.com/office/drawing/2014/main" id="{9A2E2293-0F3E-478C-9EF3-EADD8A55F97C}"/>
               </a:ext>
             </a:extLst>
           </p:cNvPr>
@@ -2401,7 +2401,7 @@
           <p:cNvPr id="2" name="">
             <a:extLst xmlns:a="http://schemas.openxmlformats.org/drawingml/2006/main">
               <a:ext uri="{FF2B5EF4-FFF2-40B4-BE49-F238E27FC236}">
-                <a16:creationId xmlns:a16="http://schemas.microsoft.com/office/drawing/2014/main" id="{D0BC3331-0A7A-4D88-8DE1-2EC851455C2F}"/>
+                <a16:creationId xmlns:a16="http://schemas.microsoft.com/office/drawing/2014/main" id="{922ABB31-A5EF-4389-A556-FFA2E9083855}"/>
               </a:ext>
             </a:extLst>
           </p:cNvPr>
@@ -2434,7 +2434,7 @@
           <p:cNvPr id="3" name="">
             <a:extLst xmlns:a="http://schemas.openxmlformats.org/drawingml/2006/main">
               <a:ext uri="{FF2B5EF4-FFF2-40B4-BE49-F238E27FC236}">
-                <a16:creationId xmlns:a16="http://schemas.microsoft.com/office/drawing/2014/main" id="{26DED36F-4C2F-4D93-98C2-6A68E5DDC918}"/>
+                <a16:creationId xmlns:a16="http://schemas.microsoft.com/office/drawing/2014/main" id="{9699CDEC-25FD-4887-B6ED-6D78A94F36BB}"/>
               </a:ext>
             </a:extLst>
           </p:cNvPr>
@@ -2467,7 +2467,7 @@
           <p:cNvPr id="4" name="">
             <a:extLst xmlns:a="http://schemas.openxmlformats.org/drawingml/2006/main">
               <a:ext uri="{FF2B5EF4-FFF2-40B4-BE49-F238E27FC236}">
-                <a16:creationId xmlns:a16="http://schemas.microsoft.com/office/drawing/2014/main" id="{13B66D45-8B0D-4992-A97C-6DF54DB4DA03}"/>
+                <a16:creationId xmlns:a16="http://schemas.microsoft.com/office/drawing/2014/main" id="{29F5F4FD-86B8-4976-BAB5-23E6710F1FA8}"/>
               </a:ext>
             </a:extLst>
           </p:cNvPr>
@@ -2517,7 +2517,7 @@
           <p:cNvPr id="5" name="">
             <a:extLst xmlns:a="http://schemas.openxmlformats.org/drawingml/2006/main">
               <a:ext uri="{FF2B5EF4-FFF2-40B4-BE49-F238E27FC236}">
-                <a16:creationId xmlns:a16="http://schemas.microsoft.com/office/drawing/2014/main" id="{9D37303C-92AC-4B54-B00B-7EFB795356E3}"/>
+                <a16:creationId xmlns:a16="http://schemas.microsoft.com/office/drawing/2014/main" id="{4DAC53FC-7FD5-4689-84F9-4457C6EC3232}"/>
               </a:ext>
             </a:extLst>
           </p:cNvPr>
@@ -2567,7 +2567,7 @@
           <p:cNvPr id="6" name="">
             <a:extLst xmlns:a="http://schemas.openxmlformats.org/drawingml/2006/main">
               <a:ext uri="{FF2B5EF4-FFF2-40B4-BE49-F238E27FC236}">
-                <a16:creationId xmlns:a16="http://schemas.microsoft.com/office/drawing/2014/main" id="{1472E7FE-E99C-4A38-882B-A2A4754D70FE}"/>
+                <a16:creationId xmlns:a16="http://schemas.microsoft.com/office/drawing/2014/main" id="{341C68DB-8B78-4C1F-88B7-07A9FECED6C2}"/>
               </a:ext>
             </a:extLst>
           </p:cNvPr>
@@ -2607,7 +2607,7 @@
                   <a:srgbClr val="171717"/>
                 </a:solidFill>
               </a:rPr>
-              <a:t>先看一个大家都懂的杂活</a:t>
+              <a:t>终局：共享核心能力，前台按人显形</a:t>
             </a:r>
           </a:p>
         </p:txBody>
@@ -2617,7 +2617,7 @@
           <p:cNvPr id="7" name="">
             <a:extLst xmlns:a="http://schemas.openxmlformats.org/drawingml/2006/main">
               <a:ext uri="{FF2B5EF4-FFF2-40B4-BE49-F238E27FC236}">
-                <a16:creationId xmlns:a16="http://schemas.microsoft.com/office/drawing/2014/main" id="{876DE451-1A07-4057-85B5-46D5ADC04B4E}"/>
+                <a16:creationId xmlns:a16="http://schemas.microsoft.com/office/drawing/2014/main" id="{524A60EA-01E7-474A-9E08-BCB0211E6271}"/>
               </a:ext>
             </a:extLst>
           </p:cNvPr>
@@ -2657,7 +2657,7 @@
                   <a:srgbClr val="57534E"/>
                 </a:solidFill>
               </a:rPr>
-              <a:t>把一堆文档整理成能喂给 LLM 的 Markdown。</a:t>
+              <a:t>不是每个人共用一个通用 app，而是把别人已经踩出来的做法，直接推成对方会用的工具。</a:t>
             </a:r>
           </a:p>
         </p:txBody>
@@ -2667,7 +2667,7 @@
           <p:cNvPr id="8" name="">
             <a:extLst xmlns:a="http://schemas.openxmlformats.org/drawingml/2006/main">
               <a:ext uri="{FF2B5EF4-FFF2-40B4-BE49-F238E27FC236}">
-                <a16:creationId xmlns:a16="http://schemas.microsoft.com/office/drawing/2014/main" id="{7BDF4C0F-C283-44E5-A172-6BF014EBE565}"/>
+                <a16:creationId xmlns:a16="http://schemas.microsoft.com/office/drawing/2014/main" id="{6E2EB9B9-3F6B-4EA5-9685-8EBA03B7E61D}"/>
               </a:ext>
             </a:extLst>
           </p:cNvPr>
@@ -2679,11 +2679,11 @@
         <p:spPr>
           <a:xfrm xmlns:a="http://schemas.openxmlformats.org/drawingml/2006/main">
             <a:off x="685800" y="1790700"/>
-            <a:ext cx="3124200" cy="3181350"/>
+            <a:ext cx="3200400" cy="2495550"/>
           </a:xfrm>
           <a:prstGeom xmlns:a="http://schemas.openxmlformats.org/drawingml/2006/main" prst="roundRect">
             <a:avLst>
-              <a:gd name="adj" fmla="val 7317"/>
+              <a:gd name="adj" fmla="val 9160"/>
             </a:avLst>
           </a:prstGeom>
           <a:solidFill xmlns:a="http://schemas.openxmlformats.org/drawingml/2006/main">
@@ -2708,7 +2708,7 @@
           <p:cNvPr id="9" name="">
             <a:extLst xmlns:a="http://schemas.openxmlformats.org/drawingml/2006/main">
               <a:ext uri="{FF2B5EF4-FFF2-40B4-BE49-F238E27FC236}">
-                <a16:creationId xmlns:a16="http://schemas.microsoft.com/office/drawing/2014/main" id="{4511EE81-9F98-463B-95FD-8FBD2658BA00}"/>
+                <a16:creationId xmlns:a16="http://schemas.microsoft.com/office/drawing/2014/main" id="{3C1F7698-6647-490A-93E2-FF5620FAC18E}"/>
               </a:ext>
             </a:extLst>
           </p:cNvPr>
@@ -2720,7 +2720,7 @@
         <p:spPr>
           <a:xfrm xmlns:a="http://schemas.openxmlformats.org/drawingml/2006/main">
             <a:off x="914400" y="2019300"/>
-            <a:ext cx="781050" cy="323850"/>
+            <a:ext cx="800100" cy="323850"/>
           </a:xfrm>
           <a:prstGeom xmlns:a="http://schemas.openxmlformats.org/drawingml/2006/main" prst="roundRect">
             <a:avLst>
@@ -2743,7 +2743,7 @@
           <p:cNvPr id="10" name="">
             <a:extLst xmlns:a="http://schemas.openxmlformats.org/drawingml/2006/main">
               <a:ext uri="{FF2B5EF4-FFF2-40B4-BE49-F238E27FC236}">
-                <a16:creationId xmlns:a16="http://schemas.microsoft.com/office/drawing/2014/main" id="{AABB3887-514F-432D-BD4A-6FC97ACEE3DA}"/>
+                <a16:creationId xmlns:a16="http://schemas.microsoft.com/office/drawing/2014/main" id="{CD246797-D2F8-4B1A-AFE9-D082E9AC3FEA}"/>
               </a:ext>
             </a:extLst>
           </p:cNvPr>
@@ -2755,7 +2755,7 @@
         <p:spPr>
           <a:xfrm xmlns:a="http://schemas.openxmlformats.org/drawingml/2006/main">
             <a:off x="1047750" y="2095500"/>
-            <a:ext cx="514350" cy="171450"/>
+            <a:ext cx="533400" cy="171450"/>
           </a:xfrm>
           <a:prstGeom xmlns:a="http://schemas.openxmlformats.org/drawingml/2006/main" prst="rect">
             <a:avLst/>
@@ -2783,7 +2783,7 @@
                   <a:srgbClr val="0F766E"/>
                 </a:solidFill>
               </a:rPr>
-              <a:t>任务开场</a:t>
+              <a:t>1 今天</a:t>
             </a:r>
           </a:p>
         </p:txBody>
@@ -2793,7 +2793,7 @@
           <p:cNvPr id="11" name="">
             <a:extLst xmlns:a="http://schemas.openxmlformats.org/drawingml/2006/main">
               <a:ext uri="{FF2B5EF4-FFF2-40B4-BE49-F238E27FC236}">
-                <a16:creationId xmlns:a16="http://schemas.microsoft.com/office/drawing/2014/main" id="{D8CD0556-D0F1-4A7E-BE7C-B4E521E8321E}"/>
+                <a16:creationId xmlns:a16="http://schemas.microsoft.com/office/drawing/2014/main" id="{437DEB66-ED2F-400D-9B7B-705D82C61275}"/>
               </a:ext>
             </a:extLst>
           </p:cNvPr>
@@ -2805,35 +2805,35 @@
         <p:spPr>
           <a:xfrm xmlns:a="http://schemas.openxmlformats.org/drawingml/2006/main">
             <a:off x="914400" y="2457450"/>
-            <a:ext cx="2095500" cy="361950"/>
-          </a:xfrm>
-          <a:prstGeom xmlns:a="http://schemas.openxmlformats.org/drawingml/2006/main" prst="rect">
-            <a:avLst/>
-          </a:prstGeom>
-          <a:noFill xmlns:a="http://schemas.openxmlformats.org/drawingml/2006/main"/>
-          <a:ln xmlns:a="http://schemas.openxmlformats.org/drawingml/2006/main" w="0">
-            <a:noFill/>
-            <a:prstDash val="solid"/>
-          </a:ln>
-        </p:spPr>
-        <p:txBody>
-          <a:bodyPr xmlns:a="http://schemas.openxmlformats.org/drawingml/2006/main"/>
-          <a:lstStyle xmlns:a="http://schemas.openxmlformats.org/drawingml/2006/main"/>
-          <a:p xmlns:a="http://schemas.openxmlformats.org/drawingml/2006/main">
-            <a:pPr algn="l">
-              <a:defRPr sz="2100" b="1">
-                <a:solidFill>
-                  <a:srgbClr val="171717"/>
-                </a:solidFill>
-              </a:defRPr>
-            </a:pPr>
-            <a:r>
-              <a:rPr sz="2100" b="1">
-                <a:solidFill>
-                  <a:srgbClr val="171717"/>
-                </a:solidFill>
-              </a:rPr>
-              <a:t>新人接手资料包</a:t>
+            <a:ext cx="2381250" cy="361950"/>
+          </a:xfrm>
+          <a:prstGeom xmlns:a="http://schemas.openxmlformats.org/drawingml/2006/main" prst="rect">
+            <a:avLst/>
+          </a:prstGeom>
+          <a:noFill xmlns:a="http://schemas.openxmlformats.org/drawingml/2006/main"/>
+          <a:ln xmlns:a="http://schemas.openxmlformats.org/drawingml/2006/main" w="0">
+            <a:noFill/>
+            <a:prstDash val="solid"/>
+          </a:ln>
+        </p:spPr>
+        <p:txBody>
+          <a:bodyPr xmlns:a="http://schemas.openxmlformats.org/drawingml/2006/main"/>
+          <a:lstStyle xmlns:a="http://schemas.openxmlformats.org/drawingml/2006/main"/>
+          <a:p xmlns:a="http://schemas.openxmlformats.org/drawingml/2006/main">
+            <a:pPr algn="l">
+              <a:defRPr sz="1950" b="1">
+                <a:solidFill>
+                  <a:srgbClr val="171717"/>
+                </a:solidFill>
+              </a:defRPr>
+            </a:pPr>
+            <a:r>
+              <a:rPr sz="1950" b="1">
+                <a:solidFill>
+                  <a:srgbClr val="171717"/>
+                </a:solidFill>
+              </a:rPr>
+              <a:t>每个人都在调自己的 app</a:t>
             </a:r>
           </a:p>
         </p:txBody>
@@ -2843,18 +2843,18 @@
           <p:cNvPr id="12" name="">
             <a:extLst xmlns:a="http://schemas.openxmlformats.org/drawingml/2006/main">
               <a:ext uri="{FF2B5EF4-FFF2-40B4-BE49-F238E27FC236}">
-                <a16:creationId xmlns:a16="http://schemas.microsoft.com/office/drawing/2014/main" id="{6542109E-6A51-40F2-8569-D731F9B4F6C9}"/>
-              </a:ext>
-            </a:extLst>
-          </p:cNvPr>
-          <p:cNvSpPr>
-            <a:spLocks xmlns:a="http://schemas.openxmlformats.org/drawingml/2006/main" noGrp="1"/>
-          </p:cNvSpPr>
-          <p:nvPr/>
-        </p:nvSpPr>
-        <p:spPr>
-          <a:xfrm xmlns:a="http://schemas.openxmlformats.org/drawingml/2006/main">
-            <a:off x="914400" y="3124200"/>
+                <a16:creationId xmlns:a16="http://schemas.microsoft.com/office/drawing/2014/main" id="{85898D0B-5C5C-431D-B46C-6804B064D3FC}"/>
+              </a:ext>
+            </a:extLst>
+          </p:cNvPr>
+          <p:cNvSpPr>
+            <a:spLocks xmlns:a="http://schemas.openxmlformats.org/drawingml/2006/main" noGrp="1"/>
+          </p:cNvSpPr>
+          <p:nvPr/>
+        </p:nvSpPr>
+        <p:spPr>
+          <a:xfrm xmlns:a="http://schemas.openxmlformats.org/drawingml/2006/main">
+            <a:off x="914400" y="3067050"/>
             <a:ext cx="190500" cy="190500"/>
           </a:xfrm>
           <a:prstGeom xmlns:a="http://schemas.openxmlformats.org/drawingml/2006/main" prst="rect">
@@ -2871,14 +2871,14 @@
           <a:lstStyle xmlns:a="http://schemas.openxmlformats.org/drawingml/2006/main"/>
           <a:p xmlns:a="http://schemas.openxmlformats.org/drawingml/2006/main">
             <a:pPr algn="l">
-              <a:defRPr sz="1350" b="1">
-                <a:solidFill>
-                  <a:srgbClr val="171717"/>
-                </a:solidFill>
-              </a:defRPr>
-            </a:pPr>
-            <a:r>
-              <a:rPr sz="1350" b="1">
+              <a:defRPr sz="1200" b="1">
+                <a:solidFill>
+                  <a:srgbClr val="171717"/>
+                </a:solidFill>
+              </a:defRPr>
+            </a:pPr>
+            <a:r>
+              <a:rPr sz="1200" b="1">
                 <a:solidFill>
                   <a:srgbClr val="171717"/>
                 </a:solidFill>
@@ -2893,47 +2893,47 @@
           <p:cNvPr id="13" name="">
             <a:extLst xmlns:a="http://schemas.openxmlformats.org/drawingml/2006/main">
               <a:ext uri="{FF2B5EF4-FFF2-40B4-BE49-F238E27FC236}">
-                <a16:creationId xmlns:a16="http://schemas.microsoft.com/office/drawing/2014/main" id="{6FFA7A2A-1006-42BC-8535-9C5DDE3DE88E}"/>
-              </a:ext>
-            </a:extLst>
-          </p:cNvPr>
-          <p:cNvSpPr>
-            <a:spLocks xmlns:a="http://schemas.openxmlformats.org/drawingml/2006/main" noGrp="1"/>
-          </p:cNvSpPr>
-          <p:nvPr/>
-        </p:nvSpPr>
-        <p:spPr>
-          <a:xfrm xmlns:a="http://schemas.openxmlformats.org/drawingml/2006/main">
-            <a:off x="1123950" y="3124200"/>
-            <a:ext cx="2076450" cy="552450"/>
-          </a:xfrm>
-          <a:prstGeom xmlns:a="http://schemas.openxmlformats.org/drawingml/2006/main" prst="rect">
-            <a:avLst/>
-          </a:prstGeom>
-          <a:noFill xmlns:a="http://schemas.openxmlformats.org/drawingml/2006/main"/>
-          <a:ln xmlns:a="http://schemas.openxmlformats.org/drawingml/2006/main" w="0">
-            <a:noFill/>
-            <a:prstDash val="solid"/>
-          </a:ln>
-        </p:spPr>
-        <p:txBody>
-          <a:bodyPr xmlns:a="http://schemas.openxmlformats.org/drawingml/2006/main"/>
-          <a:lstStyle xmlns:a="http://schemas.openxmlformats.org/drawingml/2006/main"/>
-          <a:p xmlns:a="http://schemas.openxmlformats.org/drawingml/2006/main">
-            <a:pPr algn="l">
-              <a:defRPr sz="1350" b="0">
-                <a:solidFill>
-                  <a:srgbClr val="171717"/>
-                </a:solidFill>
-              </a:defRPr>
-            </a:pPr>
-            <a:r>
-              <a:rPr sz="1350" b="0">
-                <a:solidFill>
-                  <a:srgbClr val="171717"/>
-                </a:solidFill>
-              </a:rPr>
-              <a:t>pdf、docx、xlsx 混在一起</a:t>
+                <a16:creationId xmlns:a16="http://schemas.microsoft.com/office/drawing/2014/main" id="{2737EC91-9EB1-4AFF-AB1C-E6F81E47609F}"/>
+              </a:ext>
+            </a:extLst>
+          </p:cNvPr>
+          <p:cNvSpPr>
+            <a:spLocks xmlns:a="http://schemas.openxmlformats.org/drawingml/2006/main" noGrp="1"/>
+          </p:cNvSpPr>
+          <p:nvPr/>
+        </p:nvSpPr>
+        <p:spPr>
+          <a:xfrm xmlns:a="http://schemas.openxmlformats.org/drawingml/2006/main">
+            <a:off x="1123950" y="3067050"/>
+            <a:ext cx="2266950" cy="457200"/>
+          </a:xfrm>
+          <a:prstGeom xmlns:a="http://schemas.openxmlformats.org/drawingml/2006/main" prst="rect">
+            <a:avLst/>
+          </a:prstGeom>
+          <a:noFill xmlns:a="http://schemas.openxmlformats.org/drawingml/2006/main"/>
+          <a:ln xmlns:a="http://schemas.openxmlformats.org/drawingml/2006/main" w="0">
+            <a:noFill/>
+            <a:prstDash val="solid"/>
+          </a:ln>
+        </p:spPr>
+        <p:txBody>
+          <a:bodyPr xmlns:a="http://schemas.openxmlformats.org/drawingml/2006/main"/>
+          <a:lstStyle xmlns:a="http://schemas.openxmlformats.org/drawingml/2006/main"/>
+          <a:p xmlns:a="http://schemas.openxmlformats.org/drawingml/2006/main">
+            <a:pPr algn="l">
+              <a:defRPr sz="1200" b="0">
+                <a:solidFill>
+                  <a:srgbClr val="171717"/>
+                </a:solidFill>
+              </a:defRPr>
+            </a:pPr>
+            <a:r>
+              <a:rPr sz="1200" b="0">
+                <a:solidFill>
+                  <a:srgbClr val="171717"/>
+                </a:solidFill>
+              </a:rPr>
+              <a:t>有人爱高密度，有人只要安静清单</a:t>
             </a:r>
           </a:p>
         </p:txBody>
@@ -2943,18 +2943,18 @@
           <p:cNvPr id="14" name="">
             <a:extLst xmlns:a="http://schemas.openxmlformats.org/drawingml/2006/main">
               <a:ext uri="{FF2B5EF4-FFF2-40B4-BE49-F238E27FC236}">
-                <a16:creationId xmlns:a16="http://schemas.microsoft.com/office/drawing/2014/main" id="{7AFE7CEF-3B5B-4141-8718-96878E3CE4F6}"/>
-              </a:ext>
-            </a:extLst>
-          </p:cNvPr>
-          <p:cNvSpPr>
-            <a:spLocks xmlns:a="http://schemas.openxmlformats.org/drawingml/2006/main" noGrp="1"/>
-          </p:cNvSpPr>
-          <p:nvPr/>
-        </p:nvSpPr>
-        <p:spPr>
-          <a:xfrm xmlns:a="http://schemas.openxmlformats.org/drawingml/2006/main">
-            <a:off x="914400" y="3676650"/>
+                <a16:creationId xmlns:a16="http://schemas.microsoft.com/office/drawing/2014/main" id="{A177B73B-851E-42A6-8E85-D254C8FFBF39}"/>
+              </a:ext>
+            </a:extLst>
+          </p:cNvPr>
+          <p:cNvSpPr>
+            <a:spLocks xmlns:a="http://schemas.openxmlformats.org/drawingml/2006/main" noGrp="1"/>
+          </p:cNvSpPr>
+          <p:nvPr/>
+        </p:nvSpPr>
+        <p:spPr>
+          <a:xfrm xmlns:a="http://schemas.openxmlformats.org/drawingml/2006/main">
+            <a:off x="914400" y="3524250"/>
             <a:ext cx="190500" cy="190500"/>
           </a:xfrm>
           <a:prstGeom xmlns:a="http://schemas.openxmlformats.org/drawingml/2006/main" prst="rect">
@@ -2971,14 +2971,14 @@
           <a:lstStyle xmlns:a="http://schemas.openxmlformats.org/drawingml/2006/main"/>
           <a:p xmlns:a="http://schemas.openxmlformats.org/drawingml/2006/main">
             <a:pPr algn="l">
-              <a:defRPr sz="1350" b="1">
-                <a:solidFill>
-                  <a:srgbClr val="171717"/>
-                </a:solidFill>
-              </a:defRPr>
-            </a:pPr>
-            <a:r>
-              <a:rPr sz="1350" b="1">
+              <a:defRPr sz="1200" b="1">
+                <a:solidFill>
+                  <a:srgbClr val="171717"/>
+                </a:solidFill>
+              </a:defRPr>
+            </a:pPr>
+            <a:r>
+              <a:rPr sz="1200" b="1">
                 <a:solidFill>
                   <a:srgbClr val="171717"/>
                 </a:solidFill>
@@ -2993,47 +2993,47 @@
           <p:cNvPr id="15" name="">
             <a:extLst xmlns:a="http://schemas.openxmlformats.org/drawingml/2006/main">
               <a:ext uri="{FF2B5EF4-FFF2-40B4-BE49-F238E27FC236}">
-                <a16:creationId xmlns:a16="http://schemas.microsoft.com/office/drawing/2014/main" id="{D0B7C478-3CF0-4379-BCA2-2463481C8C0F}"/>
-              </a:ext>
-            </a:extLst>
-          </p:cNvPr>
-          <p:cNvSpPr>
-            <a:spLocks xmlns:a="http://schemas.openxmlformats.org/drawingml/2006/main" noGrp="1"/>
-          </p:cNvSpPr>
-          <p:nvPr/>
-        </p:nvSpPr>
-        <p:spPr>
-          <a:xfrm xmlns:a="http://schemas.openxmlformats.org/drawingml/2006/main">
-            <a:off x="1123950" y="3676650"/>
-            <a:ext cx="2076450" cy="552450"/>
-          </a:xfrm>
-          <a:prstGeom xmlns:a="http://schemas.openxmlformats.org/drawingml/2006/main" prst="rect">
-            <a:avLst/>
-          </a:prstGeom>
-          <a:noFill xmlns:a="http://schemas.openxmlformats.org/drawingml/2006/main"/>
-          <a:ln xmlns:a="http://schemas.openxmlformats.org/drawingml/2006/main" w="0">
-            <a:noFill/>
-            <a:prstDash val="solid"/>
-          </a:ln>
-        </p:spPr>
-        <p:txBody>
-          <a:bodyPr xmlns:a="http://schemas.openxmlformats.org/drawingml/2006/main"/>
-          <a:lstStyle xmlns:a="http://schemas.openxmlformats.org/drawingml/2006/main"/>
-          <a:p xmlns:a="http://schemas.openxmlformats.org/drawingml/2006/main">
-            <a:pPr algn="l">
-              <a:defRPr sz="1350" b="0">
-                <a:solidFill>
-                  <a:srgbClr val="171717"/>
-                </a:solidFill>
-              </a:defRPr>
-            </a:pPr>
-            <a:r>
-              <a:rPr sz="1350" b="0">
-                <a:solidFill>
-                  <a:srgbClr val="171717"/>
-                </a:solidFill>
-              </a:rPr>
-              <a:t>图片散在子目录里</a:t>
+                <a16:creationId xmlns:a16="http://schemas.microsoft.com/office/drawing/2014/main" id="{B387C522-63BE-4D5B-B2F3-11619411CEEA}"/>
+              </a:ext>
+            </a:extLst>
+          </p:cNvPr>
+          <p:cNvSpPr>
+            <a:spLocks xmlns:a="http://schemas.openxmlformats.org/drawingml/2006/main" noGrp="1"/>
+          </p:cNvSpPr>
+          <p:nvPr/>
+        </p:nvSpPr>
+        <p:spPr>
+          <a:xfrm xmlns:a="http://schemas.openxmlformats.org/drawingml/2006/main">
+            <a:off x="1123950" y="3524250"/>
+            <a:ext cx="2266950" cy="457200"/>
+          </a:xfrm>
+          <a:prstGeom xmlns:a="http://schemas.openxmlformats.org/drawingml/2006/main" prst="rect">
+            <a:avLst/>
+          </a:prstGeom>
+          <a:noFill xmlns:a="http://schemas.openxmlformats.org/drawingml/2006/main"/>
+          <a:ln xmlns:a="http://schemas.openxmlformats.org/drawingml/2006/main" w="0">
+            <a:noFill/>
+            <a:prstDash val="solid"/>
+          </a:ln>
+        </p:spPr>
+        <p:txBody>
+          <a:bodyPr xmlns:a="http://schemas.openxmlformats.org/drawingml/2006/main"/>
+          <a:lstStyle xmlns:a="http://schemas.openxmlformats.org/drawingml/2006/main"/>
+          <a:p xmlns:a="http://schemas.openxmlformats.org/drawingml/2006/main">
+            <a:pPr algn="l">
+              <a:defRPr sz="1200" b="0">
+                <a:solidFill>
+                  <a:srgbClr val="171717"/>
+                </a:solidFill>
+              </a:defRPr>
+            </a:pPr>
+            <a:r>
+              <a:rPr sz="1200" b="0">
+                <a:solidFill>
+                  <a:srgbClr val="171717"/>
+                </a:solidFill>
+              </a:rPr>
+              <a:t>很多怪问题，别人其实已经踩过</a:t>
             </a:r>
           </a:p>
         </p:txBody>
@@ -3043,18 +3043,18 @@
           <p:cNvPr id="16" name="">
             <a:extLst xmlns:a="http://schemas.openxmlformats.org/drawingml/2006/main">
               <a:ext uri="{FF2B5EF4-FFF2-40B4-BE49-F238E27FC236}">
-                <a16:creationId xmlns:a16="http://schemas.microsoft.com/office/drawing/2014/main" id="{DBEDC555-BDDD-4CE3-9884-098F9F71505E}"/>
-              </a:ext>
-            </a:extLst>
-          </p:cNvPr>
-          <p:cNvSpPr>
-            <a:spLocks xmlns:a="http://schemas.openxmlformats.org/drawingml/2006/main" noGrp="1"/>
-          </p:cNvSpPr>
-          <p:nvPr/>
-        </p:nvSpPr>
-        <p:spPr>
-          <a:xfrm xmlns:a="http://schemas.openxmlformats.org/drawingml/2006/main">
-            <a:off x="914400" y="4229100"/>
+                <a16:creationId xmlns:a16="http://schemas.microsoft.com/office/drawing/2014/main" id="{461969A9-57BD-46D2-9815-24EFFAC7B6ED}"/>
+              </a:ext>
+            </a:extLst>
+          </p:cNvPr>
+          <p:cNvSpPr>
+            <a:spLocks xmlns:a="http://schemas.openxmlformats.org/drawingml/2006/main" noGrp="1"/>
+          </p:cNvSpPr>
+          <p:nvPr/>
+        </p:nvSpPr>
+        <p:spPr>
+          <a:xfrm xmlns:a="http://schemas.openxmlformats.org/drawingml/2006/main">
+            <a:off x="914400" y="3981450"/>
             <a:ext cx="190500" cy="190500"/>
           </a:xfrm>
           <a:prstGeom xmlns:a="http://schemas.openxmlformats.org/drawingml/2006/main" prst="rect">
@@ -3071,14 +3071,14 @@
           <a:lstStyle xmlns:a="http://schemas.openxmlformats.org/drawingml/2006/main"/>
           <a:p xmlns:a="http://schemas.openxmlformats.org/drawingml/2006/main">
             <a:pPr algn="l">
-              <a:defRPr sz="1350" b="1">
-                <a:solidFill>
-                  <a:srgbClr val="171717"/>
-                </a:solidFill>
-              </a:defRPr>
-            </a:pPr>
-            <a:r>
-              <a:rPr sz="1350" b="1">
+              <a:defRPr sz="1200" b="1">
+                <a:solidFill>
+                  <a:srgbClr val="171717"/>
+                </a:solidFill>
+              </a:defRPr>
+            </a:pPr>
+            <a:r>
+              <a:rPr sz="1200" b="1">
                 <a:solidFill>
                   <a:srgbClr val="171717"/>
                 </a:solidFill>
@@ -3093,47 +3093,47 @@
           <p:cNvPr id="17" name="">
             <a:extLst xmlns:a="http://schemas.openxmlformats.org/drawingml/2006/main">
               <a:ext uri="{FF2B5EF4-FFF2-40B4-BE49-F238E27FC236}">
-                <a16:creationId xmlns:a16="http://schemas.microsoft.com/office/drawing/2014/main" id="{0889F237-E011-4916-B065-D707F63AC556}"/>
-              </a:ext>
-            </a:extLst>
-          </p:cNvPr>
-          <p:cNvSpPr>
-            <a:spLocks xmlns:a="http://schemas.openxmlformats.org/drawingml/2006/main" noGrp="1"/>
-          </p:cNvSpPr>
-          <p:nvPr/>
-        </p:nvSpPr>
-        <p:spPr>
-          <a:xfrm xmlns:a="http://schemas.openxmlformats.org/drawingml/2006/main">
-            <a:off x="1123950" y="4229100"/>
-            <a:ext cx="2076450" cy="552450"/>
-          </a:xfrm>
-          <a:prstGeom xmlns:a="http://schemas.openxmlformats.org/drawingml/2006/main" prst="rect">
-            <a:avLst/>
-          </a:prstGeom>
-          <a:noFill xmlns:a="http://schemas.openxmlformats.org/drawingml/2006/main"/>
-          <a:ln xmlns:a="http://schemas.openxmlformats.org/drawingml/2006/main" w="0">
-            <a:noFill/>
-            <a:prstDash val="solid"/>
-          </a:ln>
-        </p:spPr>
-        <p:txBody>
-          <a:bodyPr xmlns:a="http://schemas.openxmlformats.org/drawingml/2006/main"/>
-          <a:lstStyle xmlns:a="http://schemas.openxmlformats.org/drawingml/2006/main"/>
-          <a:p xmlns:a="http://schemas.openxmlformats.org/drawingml/2006/main">
-            <a:pPr algn="l">
-              <a:defRPr sz="1350" b="0">
-                <a:solidFill>
-                  <a:srgbClr val="171717"/>
-                </a:solidFill>
-              </a:defRPr>
-            </a:pPr>
-            <a:r>
-              <a:rPr sz="1350" b="0">
-                <a:solidFill>
-                  <a:srgbClr val="171717"/>
-                </a:solidFill>
-              </a:rPr>
-              <a:t>今晚前要给 agent 一份可用 md 语料</a:t>
+                <a16:creationId xmlns:a16="http://schemas.microsoft.com/office/drawing/2014/main" id="{F9D69C73-8AA3-4AF4-B625-8A6F046FF1A8}"/>
+              </a:ext>
+            </a:extLst>
+          </p:cNvPr>
+          <p:cNvSpPr>
+            <a:spLocks xmlns:a="http://schemas.openxmlformats.org/drawingml/2006/main" noGrp="1"/>
+          </p:cNvSpPr>
+          <p:nvPr/>
+        </p:nvSpPr>
+        <p:spPr>
+          <a:xfrm xmlns:a="http://schemas.openxmlformats.org/drawingml/2006/main">
+            <a:off x="1123950" y="3981450"/>
+            <a:ext cx="2266950" cy="457200"/>
+          </a:xfrm>
+          <a:prstGeom xmlns:a="http://schemas.openxmlformats.org/drawingml/2006/main" prst="rect">
+            <a:avLst/>
+          </a:prstGeom>
+          <a:noFill xmlns:a="http://schemas.openxmlformats.org/drawingml/2006/main"/>
+          <a:ln xmlns:a="http://schemas.openxmlformats.org/drawingml/2006/main" w="0">
+            <a:noFill/>
+            <a:prstDash val="solid"/>
+          </a:ln>
+        </p:spPr>
+        <p:txBody>
+          <a:bodyPr xmlns:a="http://schemas.openxmlformats.org/drawingml/2006/main"/>
+          <a:lstStyle xmlns:a="http://schemas.openxmlformats.org/drawingml/2006/main"/>
+          <a:p xmlns:a="http://schemas.openxmlformats.org/drawingml/2006/main">
+            <a:pPr algn="l">
+              <a:defRPr sz="1200" b="0">
+                <a:solidFill>
+                  <a:srgbClr val="171717"/>
+                </a:solidFill>
+              </a:defRPr>
+            </a:pPr>
+            <a:r>
+              <a:rPr sz="1200" b="0">
+                <a:solidFill>
+                  <a:srgbClr val="171717"/>
+                </a:solidFill>
+              </a:rPr>
+              <a:t>但修法、prompt、结构都烂在个人库</a:t>
             </a:r>
           </a:p>
         </p:txBody>
@@ -3143,73 +3143,23 @@
           <p:cNvPr id="18" name="">
             <a:extLst xmlns:a="http://schemas.openxmlformats.org/drawingml/2006/main">
               <a:ext uri="{FF2B5EF4-FFF2-40B4-BE49-F238E27FC236}">
-                <a16:creationId xmlns:a16="http://schemas.microsoft.com/office/drawing/2014/main" id="{482D223C-5CB8-4D0B-827A-D5BC3A698C8C}"/>
-              </a:ext>
-            </a:extLst>
-          </p:cNvPr>
-          <p:cNvSpPr>
-            <a:spLocks xmlns:a="http://schemas.openxmlformats.org/drawingml/2006/main" noGrp="1"/>
-          </p:cNvSpPr>
-          <p:nvPr/>
-        </p:nvSpPr>
-        <p:spPr>
-          <a:xfrm xmlns:a="http://schemas.openxmlformats.org/drawingml/2006/main">
-            <a:off x="3981450" y="3200400"/>
-            <a:ext cx="400050" cy="228600"/>
-          </a:xfrm>
-          <a:prstGeom xmlns:a="http://schemas.openxmlformats.org/drawingml/2006/main" prst="rect">
-            <a:avLst/>
-          </a:prstGeom>
-          <a:noFill xmlns:a="http://schemas.openxmlformats.org/drawingml/2006/main"/>
-          <a:ln xmlns:a="http://schemas.openxmlformats.org/drawingml/2006/main" w="0">
-            <a:noFill/>
-            <a:prstDash val="solid"/>
-          </a:ln>
-        </p:spPr>
-        <p:txBody>
-          <a:bodyPr xmlns:a="http://schemas.openxmlformats.org/drawingml/2006/main"/>
-          <a:lstStyle xmlns:a="http://schemas.openxmlformats.org/drawingml/2006/main"/>
-          <a:p xmlns:a="http://schemas.openxmlformats.org/drawingml/2006/main">
-            <a:pPr algn="ctr">
-              <a:defRPr sz="2550" b="1">
-                <a:solidFill>
-                  <a:srgbClr val="C96A1B"/>
-                </a:solidFill>
-              </a:defRPr>
-            </a:pPr>
-            <a:r>
-              <a:rPr sz="2550" b="1">
-                <a:solidFill>
-                  <a:srgbClr val="C96A1B"/>
-                </a:solidFill>
-              </a:rPr>
-              <a:t>→</a:t>
-            </a:r>
-          </a:p>
-        </p:txBody>
-      </p:sp>
-      <p:sp>
-        <p:nvSpPr>
-          <p:cNvPr id="19" name="">
-            <a:extLst xmlns:a="http://schemas.openxmlformats.org/drawingml/2006/main">
-              <a:ext uri="{FF2B5EF4-FFF2-40B4-BE49-F238E27FC236}">
-                <a16:creationId xmlns:a16="http://schemas.microsoft.com/office/drawing/2014/main" id="{56FAEF3D-07B4-4F9B-BB5A-D600A33D61FB}"/>
-              </a:ext>
-            </a:extLst>
-          </p:cNvPr>
-          <p:cNvSpPr>
-            <a:spLocks xmlns:a="http://schemas.openxmlformats.org/drawingml/2006/main" noGrp="1"/>
-          </p:cNvSpPr>
-          <p:nvPr/>
-        </p:nvSpPr>
-        <p:spPr>
-          <a:xfrm xmlns:a="http://schemas.openxmlformats.org/drawingml/2006/main">
-            <a:off x="4648200" y="1790700"/>
-            <a:ext cx="2971800" cy="3181350"/>
+                <a16:creationId xmlns:a16="http://schemas.microsoft.com/office/drawing/2014/main" id="{118AAE87-FDF3-4558-8F94-145DD775BF4B}"/>
+              </a:ext>
+            </a:extLst>
+          </p:cNvPr>
+          <p:cNvSpPr>
+            <a:spLocks xmlns:a="http://schemas.openxmlformats.org/drawingml/2006/main" noGrp="1"/>
+          </p:cNvSpPr>
+          <p:nvPr/>
+        </p:nvSpPr>
+        <p:spPr>
+          <a:xfrm xmlns:a="http://schemas.openxmlformats.org/drawingml/2006/main">
+            <a:off x="4114800" y="1790700"/>
+            <a:ext cx="3200400" cy="2495550"/>
           </a:xfrm>
           <a:prstGeom xmlns:a="http://schemas.openxmlformats.org/drawingml/2006/main" prst="roundRect">
             <a:avLst>
-              <a:gd name="adj" fmla="val 7692"/>
+              <a:gd name="adj" fmla="val 9160"/>
             </a:avLst>
           </a:prstGeom>
           <a:solidFill xmlns:a="http://schemas.openxmlformats.org/drawingml/2006/main">
@@ -3231,22 +3181,22 @@
       </p:sp>
       <p:sp>
         <p:nvSpPr>
-          <p:cNvPr id="20" name="">
-            <a:extLst xmlns:a="http://schemas.openxmlformats.org/drawingml/2006/main">
-              <a:ext uri="{FF2B5EF4-FFF2-40B4-BE49-F238E27FC236}">
-                <a16:creationId xmlns:a16="http://schemas.microsoft.com/office/drawing/2014/main" id="{AB5B7313-8DC2-45BC-BBD7-C3B5F8A039D9}"/>
-              </a:ext>
-            </a:extLst>
-          </p:cNvPr>
-          <p:cNvSpPr>
-            <a:spLocks xmlns:a="http://schemas.openxmlformats.org/drawingml/2006/main" noGrp="1"/>
-          </p:cNvSpPr>
-          <p:nvPr/>
-        </p:nvSpPr>
-        <p:spPr>
-          <a:xfrm xmlns:a="http://schemas.openxmlformats.org/drawingml/2006/main">
-            <a:off x="4876800" y="2019300"/>
-            <a:ext cx="1085850" cy="323850"/>
+          <p:cNvPr id="19" name="">
+            <a:extLst xmlns:a="http://schemas.openxmlformats.org/drawingml/2006/main">
+              <a:ext uri="{FF2B5EF4-FFF2-40B4-BE49-F238E27FC236}">
+                <a16:creationId xmlns:a16="http://schemas.microsoft.com/office/drawing/2014/main" id="{D0FCDFA9-F2C5-48DF-81A1-287E65CC9F66}"/>
+              </a:ext>
+            </a:extLst>
+          </p:cNvPr>
+          <p:cNvSpPr>
+            <a:spLocks xmlns:a="http://schemas.openxmlformats.org/drawingml/2006/main" noGrp="1"/>
+          </p:cNvSpPr>
+          <p:nvPr/>
+        </p:nvSpPr>
+        <p:spPr>
+          <a:xfrm xmlns:a="http://schemas.openxmlformats.org/drawingml/2006/main">
+            <a:off x="4343400" y="2019300"/>
+            <a:ext cx="1104900" cy="323850"/>
           </a:xfrm>
           <a:prstGeom xmlns:a="http://schemas.openxmlformats.org/drawingml/2006/main" prst="roundRect">
             <a:avLst>
@@ -3266,50 +3216,100 @@
       </p:sp>
       <p:sp>
         <p:nvSpPr>
+          <p:cNvPr id="20" name="">
+            <a:extLst xmlns:a="http://schemas.openxmlformats.org/drawingml/2006/main">
+              <a:ext uri="{FF2B5EF4-FFF2-40B4-BE49-F238E27FC236}">
+                <a16:creationId xmlns:a16="http://schemas.microsoft.com/office/drawing/2014/main" id="{65F1260C-210A-41BB-A4A1-A34F0474EB76}"/>
+              </a:ext>
+            </a:extLst>
+          </p:cNvPr>
+          <p:cNvSpPr>
+            <a:spLocks xmlns:a="http://schemas.openxmlformats.org/drawingml/2006/main" noGrp="1"/>
+          </p:cNvSpPr>
+          <p:nvPr/>
+        </p:nvSpPr>
+        <p:spPr>
+          <a:xfrm xmlns:a="http://schemas.openxmlformats.org/drawingml/2006/main">
+            <a:off x="4476750" y="2095500"/>
+            <a:ext cx="838200" cy="171450"/>
+          </a:xfrm>
+          <a:prstGeom xmlns:a="http://schemas.openxmlformats.org/drawingml/2006/main" prst="rect">
+            <a:avLst/>
+          </a:prstGeom>
+          <a:noFill xmlns:a="http://schemas.openxmlformats.org/drawingml/2006/main"/>
+          <a:ln xmlns:a="http://schemas.openxmlformats.org/drawingml/2006/main" w="0">
+            <a:noFill/>
+            <a:prstDash val="solid"/>
+          </a:ln>
+        </p:spPr>
+        <p:txBody>
+          <a:bodyPr xmlns:a="http://schemas.openxmlformats.org/drawingml/2006/main"/>
+          <a:lstStyle xmlns:a="http://schemas.openxmlformats.org/drawingml/2006/main"/>
+          <a:p xmlns:a="http://schemas.openxmlformats.org/drawingml/2006/main">
+            <a:pPr algn="l">
+              <a:defRPr sz="900" b="1">
+                <a:solidFill>
+                  <a:srgbClr val="0F766E"/>
+                </a:solidFill>
+              </a:defRPr>
+            </a:pPr>
+            <a:r>
+              <a:rPr sz="900" b="1">
+                <a:solidFill>
+                  <a:srgbClr val="0F766E"/>
+                </a:solidFill>
+              </a:rPr>
+              <a:t>2 如果能推</a:t>
+            </a:r>
+          </a:p>
+        </p:txBody>
+      </p:sp>
+      <p:sp>
+        <p:nvSpPr>
           <p:cNvPr id="21" name="">
             <a:extLst xmlns:a="http://schemas.openxmlformats.org/drawingml/2006/main">
               <a:ext uri="{FF2B5EF4-FFF2-40B4-BE49-F238E27FC236}">
-                <a16:creationId xmlns:a16="http://schemas.microsoft.com/office/drawing/2014/main" id="{1F83EA02-E731-4C48-9EE6-0E1C3A17CCF0}"/>
-              </a:ext>
-            </a:extLst>
-          </p:cNvPr>
-          <p:cNvSpPr>
-            <a:spLocks xmlns:a="http://schemas.openxmlformats.org/drawingml/2006/main" noGrp="1"/>
-          </p:cNvSpPr>
-          <p:nvPr/>
-        </p:nvSpPr>
-        <p:spPr>
-          <a:xfrm xmlns:a="http://schemas.openxmlformats.org/drawingml/2006/main">
-            <a:off x="5010150" y="2095500"/>
-            <a:ext cx="819150" cy="171450"/>
-          </a:xfrm>
-          <a:prstGeom xmlns:a="http://schemas.openxmlformats.org/drawingml/2006/main" prst="rect">
-            <a:avLst/>
-          </a:prstGeom>
-          <a:noFill xmlns:a="http://schemas.openxmlformats.org/drawingml/2006/main"/>
-          <a:ln xmlns:a="http://schemas.openxmlformats.org/drawingml/2006/main" w="0">
-            <a:noFill/>
-            <a:prstDash val="solid"/>
-          </a:ln>
-        </p:spPr>
-        <p:txBody>
-          <a:bodyPr xmlns:a="http://schemas.openxmlformats.org/drawingml/2006/main"/>
-          <a:lstStyle xmlns:a="http://schemas.openxmlformats.org/drawingml/2006/main"/>
-          <a:p xmlns:a="http://schemas.openxmlformats.org/drawingml/2006/main">
-            <a:pPr algn="l">
-              <a:defRPr sz="900" b="1">
-                <a:solidFill>
-                  <a:srgbClr val="0F766E"/>
-                </a:solidFill>
-              </a:defRPr>
-            </a:pPr>
-            <a:r>
-              <a:rPr sz="900" b="1">
-                <a:solidFill>
-                  <a:srgbClr val="0F766E"/>
-                </a:solidFill>
-              </a:rPr>
-              <a:t>于是开始手搓</a:t>
+                <a16:creationId xmlns:a16="http://schemas.microsoft.com/office/drawing/2014/main" id="{A6E38B3F-9559-413F-A5A1-E5848C13F037}"/>
+              </a:ext>
+            </a:extLst>
+          </p:cNvPr>
+          <p:cNvSpPr>
+            <a:spLocks xmlns:a="http://schemas.openxmlformats.org/drawingml/2006/main" noGrp="1"/>
+          </p:cNvSpPr>
+          <p:nvPr/>
+        </p:nvSpPr>
+        <p:spPr>
+          <a:xfrm xmlns:a="http://schemas.openxmlformats.org/drawingml/2006/main">
+            <a:off x="4343400" y="2724150"/>
+            <a:ext cx="190500" cy="190500"/>
+          </a:xfrm>
+          <a:prstGeom xmlns:a="http://schemas.openxmlformats.org/drawingml/2006/main" prst="rect">
+            <a:avLst/>
+          </a:prstGeom>
+          <a:noFill xmlns:a="http://schemas.openxmlformats.org/drawingml/2006/main"/>
+          <a:ln xmlns:a="http://schemas.openxmlformats.org/drawingml/2006/main" w="0">
+            <a:noFill/>
+            <a:prstDash val="solid"/>
+          </a:ln>
+        </p:spPr>
+        <p:txBody>
+          <a:bodyPr xmlns:a="http://schemas.openxmlformats.org/drawingml/2006/main"/>
+          <a:lstStyle xmlns:a="http://schemas.openxmlformats.org/drawingml/2006/main"/>
+          <a:p xmlns:a="http://schemas.openxmlformats.org/drawingml/2006/main">
+            <a:pPr algn="l">
+              <a:defRPr sz="1275" b="1">
+                <a:solidFill>
+                  <a:srgbClr val="171717"/>
+                </a:solidFill>
+              </a:defRPr>
+            </a:pPr>
+            <a:r>
+              <a:rPr sz="1275" b="1">
+                <a:solidFill>
+                  <a:srgbClr val="171717"/>
+                </a:solidFill>
+              </a:rPr>
+              <a:t>•</a:t>
             </a:r>
           </a:p>
         </p:txBody>
@@ -3319,18 +3319,68 @@
           <p:cNvPr id="22" name="">
             <a:extLst xmlns:a="http://schemas.openxmlformats.org/drawingml/2006/main">
               <a:ext uri="{FF2B5EF4-FFF2-40B4-BE49-F238E27FC236}">
-                <a16:creationId xmlns:a16="http://schemas.microsoft.com/office/drawing/2014/main" id="{6F1A5DDC-DA75-4EA0-BC54-7797C6512CB6}"/>
-              </a:ext>
-            </a:extLst>
-          </p:cNvPr>
-          <p:cNvSpPr>
-            <a:spLocks xmlns:a="http://schemas.openxmlformats.org/drawingml/2006/main" noGrp="1"/>
-          </p:cNvSpPr>
-          <p:nvPr/>
-        </p:nvSpPr>
-        <p:spPr>
-          <a:xfrm xmlns:a="http://schemas.openxmlformats.org/drawingml/2006/main">
-            <a:off x="4876800" y="2724150"/>
+                <a16:creationId xmlns:a16="http://schemas.microsoft.com/office/drawing/2014/main" id="{401D1E33-1BC0-4F2C-8AEC-2D18F31FC4E4}"/>
+              </a:ext>
+            </a:extLst>
+          </p:cNvPr>
+          <p:cNvSpPr>
+            <a:spLocks xmlns:a="http://schemas.openxmlformats.org/drawingml/2006/main" noGrp="1"/>
+          </p:cNvSpPr>
+          <p:nvPr/>
+        </p:nvSpPr>
+        <p:spPr>
+          <a:xfrm xmlns:a="http://schemas.openxmlformats.org/drawingml/2006/main">
+            <a:off x="4552950" y="2724150"/>
+            <a:ext cx="2228850" cy="514350"/>
+          </a:xfrm>
+          <a:prstGeom xmlns:a="http://schemas.openxmlformats.org/drawingml/2006/main" prst="rect">
+            <a:avLst/>
+          </a:prstGeom>
+          <a:noFill xmlns:a="http://schemas.openxmlformats.org/drawingml/2006/main"/>
+          <a:ln xmlns:a="http://schemas.openxmlformats.org/drawingml/2006/main" w="0">
+            <a:noFill/>
+            <a:prstDash val="solid"/>
+          </a:ln>
+        </p:spPr>
+        <p:txBody>
+          <a:bodyPr xmlns:a="http://schemas.openxmlformats.org/drawingml/2006/main"/>
+          <a:lstStyle xmlns:a="http://schemas.openxmlformats.org/drawingml/2006/main"/>
+          <a:p xmlns:a="http://schemas.openxmlformats.org/drawingml/2006/main">
+            <a:pPr algn="l">
+              <a:defRPr sz="1275" b="0">
+                <a:solidFill>
+                  <a:srgbClr val="171717"/>
+                </a:solidFill>
+              </a:defRPr>
+            </a:pPr>
+            <a:r>
+              <a:rPr sz="1275" b="0">
+                <a:solidFill>
+                  <a:srgbClr val="171717"/>
+                </a:solidFill>
+              </a:rPr>
+              <a:t>把 repair / prompt / flow 蒸成一个 core</a:t>
+            </a:r>
+          </a:p>
+        </p:txBody>
+      </p:sp>
+      <p:sp>
+        <p:nvSpPr>
+          <p:cNvPr id="23" name="">
+            <a:extLst xmlns:a="http://schemas.openxmlformats.org/drawingml/2006/main">
+              <a:ext uri="{FF2B5EF4-FFF2-40B4-BE49-F238E27FC236}">
+                <a16:creationId xmlns:a16="http://schemas.microsoft.com/office/drawing/2014/main" id="{24BD3AF0-0645-4902-B7B9-8D520E7775BF}"/>
+              </a:ext>
+            </a:extLst>
+          </p:cNvPr>
+          <p:cNvSpPr>
+            <a:spLocks xmlns:a="http://schemas.openxmlformats.org/drawingml/2006/main" noGrp="1"/>
+          </p:cNvSpPr>
+          <p:nvPr/>
+        </p:nvSpPr>
+        <p:spPr>
+          <a:xfrm xmlns:a="http://schemas.openxmlformats.org/drawingml/2006/main">
+            <a:off x="4343400" y="3238500"/>
             <a:ext cx="190500" cy="190500"/>
           </a:xfrm>
           <a:prstGeom xmlns:a="http://schemas.openxmlformats.org/drawingml/2006/main" prst="rect">
@@ -3347,14 +3397,14 @@
           <a:lstStyle xmlns:a="http://schemas.openxmlformats.org/drawingml/2006/main"/>
           <a:p xmlns:a="http://schemas.openxmlformats.org/drawingml/2006/main">
             <a:pPr algn="l">
-              <a:defRPr sz="1350" b="1">
-                <a:solidFill>
-                  <a:srgbClr val="171717"/>
-                </a:solidFill>
-              </a:defRPr>
-            </a:pPr>
-            <a:r>
-              <a:rPr sz="1350" b="1">
+              <a:defRPr sz="1275" b="1">
+                <a:solidFill>
+                  <a:srgbClr val="171717"/>
+                </a:solidFill>
+              </a:defRPr>
+            </a:pPr>
+            <a:r>
+              <a:rPr sz="1275" b="1">
                 <a:solidFill>
                   <a:srgbClr val="171717"/>
                 </a:solidFill>
@@ -3366,71 +3416,71 @@
       </p:sp>
       <p:sp>
         <p:nvSpPr>
-          <p:cNvPr id="23" name="">
-            <a:extLst xmlns:a="http://schemas.openxmlformats.org/drawingml/2006/main">
-              <a:ext uri="{FF2B5EF4-FFF2-40B4-BE49-F238E27FC236}">
-                <a16:creationId xmlns:a16="http://schemas.microsoft.com/office/drawing/2014/main" id="{52884B01-EC1B-47F5-9ABC-063BCD553552}"/>
-              </a:ext>
-            </a:extLst>
-          </p:cNvPr>
-          <p:cNvSpPr>
-            <a:spLocks xmlns:a="http://schemas.openxmlformats.org/drawingml/2006/main" noGrp="1"/>
-          </p:cNvSpPr>
-          <p:nvPr/>
-        </p:nvSpPr>
-        <p:spPr>
-          <a:xfrm xmlns:a="http://schemas.openxmlformats.org/drawingml/2006/main">
-            <a:off x="5086350" y="2724150"/>
-            <a:ext cx="2076450" cy="590550"/>
-          </a:xfrm>
-          <a:prstGeom xmlns:a="http://schemas.openxmlformats.org/drawingml/2006/main" prst="rect">
-            <a:avLst/>
-          </a:prstGeom>
-          <a:noFill xmlns:a="http://schemas.openxmlformats.org/drawingml/2006/main"/>
-          <a:ln xmlns:a="http://schemas.openxmlformats.org/drawingml/2006/main" w="0">
-            <a:noFill/>
-            <a:prstDash val="solid"/>
-          </a:ln>
-        </p:spPr>
-        <p:txBody>
-          <a:bodyPr xmlns:a="http://schemas.openxmlformats.org/drawingml/2006/main"/>
-          <a:lstStyle xmlns:a="http://schemas.openxmlformats.org/drawingml/2006/main"/>
-          <a:p xmlns:a="http://schemas.openxmlformats.org/drawingml/2006/main">
-            <a:pPr algn="l">
-              <a:defRPr sz="1350" b="0">
-                <a:solidFill>
-                  <a:srgbClr val="171717"/>
-                </a:solidFill>
-              </a:defRPr>
-            </a:pPr>
-            <a:r>
-              <a:rPr sz="1350" b="0">
-                <a:solidFill>
-                  <a:srgbClr val="171717"/>
-                </a:solidFill>
-              </a:rPr>
-              <a:t>先扫目录，再补 pdf / docx 分支</a:t>
-            </a:r>
-          </a:p>
-        </p:txBody>
-      </p:sp>
-      <p:sp>
-        <p:nvSpPr>
           <p:cNvPr id="24" name="">
             <a:extLst xmlns:a="http://schemas.openxmlformats.org/drawingml/2006/main">
               <a:ext uri="{FF2B5EF4-FFF2-40B4-BE49-F238E27FC236}">
-                <a16:creationId xmlns:a16="http://schemas.microsoft.com/office/drawing/2014/main" id="{11608E5B-126D-419E-9CA3-C816ED8B8CE9}"/>
-              </a:ext>
-            </a:extLst>
-          </p:cNvPr>
-          <p:cNvSpPr>
-            <a:spLocks xmlns:a="http://schemas.openxmlformats.org/drawingml/2006/main" noGrp="1"/>
-          </p:cNvSpPr>
-          <p:nvPr/>
-        </p:nvSpPr>
-        <p:spPr>
-          <a:xfrm xmlns:a="http://schemas.openxmlformats.org/drawingml/2006/main">
-            <a:off x="4876800" y="3314700"/>
+                <a16:creationId xmlns:a16="http://schemas.microsoft.com/office/drawing/2014/main" id="{A76C1E1B-EFBF-4187-909E-8935D40D04A3}"/>
+              </a:ext>
+            </a:extLst>
+          </p:cNvPr>
+          <p:cNvSpPr>
+            <a:spLocks xmlns:a="http://schemas.openxmlformats.org/drawingml/2006/main" noGrp="1"/>
+          </p:cNvSpPr>
+          <p:nvPr/>
+        </p:nvSpPr>
+        <p:spPr>
+          <a:xfrm xmlns:a="http://schemas.openxmlformats.org/drawingml/2006/main">
+            <a:off x="4552950" y="3238500"/>
+            <a:ext cx="2228850" cy="514350"/>
+          </a:xfrm>
+          <a:prstGeom xmlns:a="http://schemas.openxmlformats.org/drawingml/2006/main" prst="rect">
+            <a:avLst/>
+          </a:prstGeom>
+          <a:noFill xmlns:a="http://schemas.openxmlformats.org/drawingml/2006/main"/>
+          <a:ln xmlns:a="http://schemas.openxmlformats.org/drawingml/2006/main" w="0">
+            <a:noFill/>
+            <a:prstDash val="solid"/>
+          </a:ln>
+        </p:spPr>
+        <p:txBody>
+          <a:bodyPr xmlns:a="http://schemas.openxmlformats.org/drawingml/2006/main"/>
+          <a:lstStyle xmlns:a="http://schemas.openxmlformats.org/drawingml/2006/main"/>
+          <a:p xmlns:a="http://schemas.openxmlformats.org/drawingml/2006/main">
+            <a:pPr algn="l">
+              <a:defRPr sz="1275" b="0">
+                <a:solidFill>
+                  <a:srgbClr val="171717"/>
+                </a:solidFill>
+              </a:defRPr>
+            </a:pPr>
+            <a:r>
+              <a:rPr sz="1275" b="0">
+                <a:solidFill>
+                  <a:srgbClr val="171717"/>
+                </a:solidFill>
+              </a:rPr>
+              <a:t>发给另一个人的个人库或团队库</a:t>
+            </a:r>
+          </a:p>
+        </p:txBody>
+      </p:sp>
+      <p:sp>
+        <p:nvSpPr>
+          <p:cNvPr id="25" name="">
+            <a:extLst xmlns:a="http://schemas.openxmlformats.org/drawingml/2006/main">
+              <a:ext uri="{FF2B5EF4-FFF2-40B4-BE49-F238E27FC236}">
+                <a16:creationId xmlns:a16="http://schemas.microsoft.com/office/drawing/2014/main" id="{32D1926E-A2B4-429B-89AB-BDEA058A8409}"/>
+              </a:ext>
+            </a:extLst>
+          </p:cNvPr>
+          <p:cNvSpPr>
+            <a:spLocks xmlns:a="http://schemas.openxmlformats.org/drawingml/2006/main" noGrp="1"/>
+          </p:cNvSpPr>
+          <p:nvPr/>
+        </p:nvSpPr>
+        <p:spPr>
+          <a:xfrm xmlns:a="http://schemas.openxmlformats.org/drawingml/2006/main">
+            <a:off x="4343400" y="3752850"/>
             <a:ext cx="190500" cy="190500"/>
           </a:xfrm>
           <a:prstGeom xmlns:a="http://schemas.openxmlformats.org/drawingml/2006/main" prst="rect">
@@ -3447,14 +3497,14 @@
           <a:lstStyle xmlns:a="http://schemas.openxmlformats.org/drawingml/2006/main"/>
           <a:p xmlns:a="http://schemas.openxmlformats.org/drawingml/2006/main">
             <a:pPr algn="l">
-              <a:defRPr sz="1350" b="1">
-                <a:solidFill>
-                  <a:srgbClr val="171717"/>
-                </a:solidFill>
-              </a:defRPr>
-            </a:pPr>
-            <a:r>
-              <a:rPr sz="1350" b="1">
+              <a:defRPr sz="1275" b="1">
+                <a:solidFill>
+                  <a:srgbClr val="171717"/>
+                </a:solidFill>
+              </a:defRPr>
+            </a:pPr>
+            <a:r>
+              <a:rPr sz="1275" b="1">
                 <a:solidFill>
                   <a:srgbClr val="171717"/>
                 </a:solidFill>
@@ -3466,100 +3516,50 @@
       </p:sp>
       <p:sp>
         <p:nvSpPr>
-          <p:cNvPr id="25" name="">
-            <a:extLst xmlns:a="http://schemas.openxmlformats.org/drawingml/2006/main">
-              <a:ext uri="{FF2B5EF4-FFF2-40B4-BE49-F238E27FC236}">
-                <a16:creationId xmlns:a16="http://schemas.microsoft.com/office/drawing/2014/main" id="{F411F9CB-ED58-4986-81D1-EFFB6D750BD2}"/>
-              </a:ext>
-            </a:extLst>
-          </p:cNvPr>
-          <p:cNvSpPr>
-            <a:spLocks xmlns:a="http://schemas.openxmlformats.org/drawingml/2006/main" noGrp="1"/>
-          </p:cNvSpPr>
-          <p:nvPr/>
-        </p:nvSpPr>
-        <p:spPr>
-          <a:xfrm xmlns:a="http://schemas.openxmlformats.org/drawingml/2006/main">
-            <a:off x="5086350" y="3314700"/>
-            <a:ext cx="2076450" cy="590550"/>
-          </a:xfrm>
-          <a:prstGeom xmlns:a="http://schemas.openxmlformats.org/drawingml/2006/main" prst="rect">
-            <a:avLst/>
-          </a:prstGeom>
-          <a:noFill xmlns:a="http://schemas.openxmlformats.org/drawingml/2006/main"/>
-          <a:ln xmlns:a="http://schemas.openxmlformats.org/drawingml/2006/main" w="0">
-            <a:noFill/>
-            <a:prstDash val="solid"/>
-          </a:ln>
-        </p:spPr>
-        <p:txBody>
-          <a:bodyPr xmlns:a="http://schemas.openxmlformats.org/drawingml/2006/main"/>
-          <a:lstStyle xmlns:a="http://schemas.openxmlformats.org/drawingml/2006/main"/>
-          <a:p xmlns:a="http://schemas.openxmlformats.org/drawingml/2006/main">
-            <a:pPr algn="l">
-              <a:defRPr sz="1350" b="0">
-                <a:solidFill>
-                  <a:srgbClr val="171717"/>
-                </a:solidFill>
-              </a:defRPr>
-            </a:pPr>
-            <a:r>
-              <a:rPr sz="1350" b="0">
-                <a:solidFill>
-                  <a:srgbClr val="171717"/>
-                </a:solidFill>
-              </a:rPr>
-              <a:t>路径、图片、表格一坏就加 repair</a:t>
-            </a:r>
-          </a:p>
-        </p:txBody>
-      </p:sp>
-      <p:sp>
-        <p:nvSpPr>
           <p:cNvPr id="26" name="">
             <a:extLst xmlns:a="http://schemas.openxmlformats.org/drawingml/2006/main">
               <a:ext uri="{FF2B5EF4-FFF2-40B4-BE49-F238E27FC236}">
-                <a16:creationId xmlns:a16="http://schemas.microsoft.com/office/drawing/2014/main" id="{BB78DF9C-8F6C-4AA0-9741-AC1089495FC0}"/>
-              </a:ext>
-            </a:extLst>
-          </p:cNvPr>
-          <p:cNvSpPr>
-            <a:spLocks xmlns:a="http://schemas.openxmlformats.org/drawingml/2006/main" noGrp="1"/>
-          </p:cNvSpPr>
-          <p:nvPr/>
-        </p:nvSpPr>
-        <p:spPr>
-          <a:xfrm xmlns:a="http://schemas.openxmlformats.org/drawingml/2006/main">
-            <a:off x="4876800" y="3905250"/>
-            <a:ext cx="190500" cy="190500"/>
-          </a:xfrm>
-          <a:prstGeom xmlns:a="http://schemas.openxmlformats.org/drawingml/2006/main" prst="rect">
-            <a:avLst/>
-          </a:prstGeom>
-          <a:noFill xmlns:a="http://schemas.openxmlformats.org/drawingml/2006/main"/>
-          <a:ln xmlns:a="http://schemas.openxmlformats.org/drawingml/2006/main" w="0">
-            <a:noFill/>
-            <a:prstDash val="solid"/>
-          </a:ln>
-        </p:spPr>
-        <p:txBody>
-          <a:bodyPr xmlns:a="http://schemas.openxmlformats.org/drawingml/2006/main"/>
-          <a:lstStyle xmlns:a="http://schemas.openxmlformats.org/drawingml/2006/main"/>
-          <a:p xmlns:a="http://schemas.openxmlformats.org/drawingml/2006/main">
-            <a:pPr algn="l">
-              <a:defRPr sz="1350" b="1">
-                <a:solidFill>
-                  <a:srgbClr val="171717"/>
-                </a:solidFill>
-              </a:defRPr>
-            </a:pPr>
-            <a:r>
-              <a:rPr sz="1350" b="1">
-                <a:solidFill>
-                  <a:srgbClr val="171717"/>
-                </a:solidFill>
-              </a:rPr>
-              <a:t>•</a:t>
+                <a16:creationId xmlns:a16="http://schemas.microsoft.com/office/drawing/2014/main" id="{1EF6732B-306E-43BA-B565-7D0AAC952F35}"/>
+              </a:ext>
+            </a:extLst>
+          </p:cNvPr>
+          <p:cNvSpPr>
+            <a:spLocks xmlns:a="http://schemas.openxmlformats.org/drawingml/2006/main" noGrp="1"/>
+          </p:cNvSpPr>
+          <p:nvPr/>
+        </p:nvSpPr>
+        <p:spPr>
+          <a:xfrm xmlns:a="http://schemas.openxmlformats.org/drawingml/2006/main">
+            <a:off x="4552950" y="3752850"/>
+            <a:ext cx="2228850" cy="514350"/>
+          </a:xfrm>
+          <a:prstGeom xmlns:a="http://schemas.openxmlformats.org/drawingml/2006/main" prst="rect">
+            <a:avLst/>
+          </a:prstGeom>
+          <a:noFill xmlns:a="http://schemas.openxmlformats.org/drawingml/2006/main"/>
+          <a:ln xmlns:a="http://schemas.openxmlformats.org/drawingml/2006/main" w="0">
+            <a:noFill/>
+            <a:prstDash val="solid"/>
+          </a:ln>
+        </p:spPr>
+        <p:txBody>
+          <a:bodyPr xmlns:a="http://schemas.openxmlformats.org/drawingml/2006/main"/>
+          <a:lstStyle xmlns:a="http://schemas.openxmlformats.org/drawingml/2006/main"/>
+          <a:p xmlns:a="http://schemas.openxmlformats.org/drawingml/2006/main">
+            <a:pPr algn="l">
+              <a:defRPr sz="1275" b="0">
+                <a:solidFill>
+                  <a:srgbClr val="171717"/>
+                </a:solidFill>
+              </a:defRPr>
+            </a:pPr>
+            <a:r>
+              <a:rPr sz="1275" b="0">
+                <a:solidFill>
+                  <a:srgbClr val="171717"/>
+                </a:solidFill>
+              </a:rPr>
+              <a:t>到了对方那里，不必保持原样</a:t>
             </a:r>
           </a:p>
         </p:txBody>
@@ -3569,131 +3569,31 @@
           <p:cNvPr id="27" name="">
             <a:extLst xmlns:a="http://schemas.openxmlformats.org/drawingml/2006/main">
               <a:ext uri="{FF2B5EF4-FFF2-40B4-BE49-F238E27FC236}">
-                <a16:creationId xmlns:a16="http://schemas.microsoft.com/office/drawing/2014/main" id="{689D6F53-79D3-4CAE-9A3E-2F0B661EFF39}"/>
-              </a:ext>
-            </a:extLst>
-          </p:cNvPr>
-          <p:cNvSpPr>
-            <a:spLocks xmlns:a="http://schemas.openxmlformats.org/drawingml/2006/main" noGrp="1"/>
-          </p:cNvSpPr>
-          <p:nvPr/>
-        </p:nvSpPr>
-        <p:spPr>
-          <a:xfrm xmlns:a="http://schemas.openxmlformats.org/drawingml/2006/main">
-            <a:off x="5086350" y="3905250"/>
-            <a:ext cx="2076450" cy="590550"/>
-          </a:xfrm>
-          <a:prstGeom xmlns:a="http://schemas.openxmlformats.org/drawingml/2006/main" prst="rect">
-            <a:avLst/>
-          </a:prstGeom>
-          <a:noFill xmlns:a="http://schemas.openxmlformats.org/drawingml/2006/main"/>
-          <a:ln xmlns:a="http://schemas.openxmlformats.org/drawingml/2006/main" w="0">
-            <a:noFill/>
-            <a:prstDash val="solid"/>
-          </a:ln>
-        </p:spPr>
-        <p:txBody>
-          <a:bodyPr xmlns:a="http://schemas.openxmlformats.org/drawingml/2006/main"/>
-          <a:lstStyle xmlns:a="http://schemas.openxmlformats.org/drawingml/2006/main"/>
-          <a:p xmlns:a="http://schemas.openxmlformats.org/drawingml/2006/main">
-            <a:pPr algn="l">
-              <a:defRPr sz="1350" b="0">
-                <a:solidFill>
-                  <a:srgbClr val="171717"/>
-                </a:solidFill>
-              </a:defRPr>
-            </a:pPr>
-            <a:r>
-              <a:rPr sz="1350" b="0">
-                <a:solidFill>
-                  <a:srgbClr val="171717"/>
-                </a:solidFill>
-              </a:rPr>
-              <a:t>实在不行就 fallback 到通用库</a:t>
-            </a:r>
-          </a:p>
-        </p:txBody>
-      </p:sp>
-      <p:sp>
-        <p:nvSpPr>
-          <p:cNvPr id="28" name="">
-            <a:extLst xmlns:a="http://schemas.openxmlformats.org/drawingml/2006/main">
-              <a:ext uri="{FF2B5EF4-FFF2-40B4-BE49-F238E27FC236}">
-                <a16:creationId xmlns:a16="http://schemas.microsoft.com/office/drawing/2014/main" id="{FC9CBE71-D928-48F6-994B-8654B6D07838}"/>
-              </a:ext>
-            </a:extLst>
-          </p:cNvPr>
-          <p:cNvSpPr>
-            <a:spLocks xmlns:a="http://schemas.openxmlformats.org/drawingml/2006/main" noGrp="1"/>
-          </p:cNvSpPr>
-          <p:nvPr/>
-        </p:nvSpPr>
-        <p:spPr>
-          <a:xfrm xmlns:a="http://schemas.openxmlformats.org/drawingml/2006/main">
-            <a:off x="7810500" y="3200400"/>
-            <a:ext cx="400050" cy="228600"/>
-          </a:xfrm>
-          <a:prstGeom xmlns:a="http://schemas.openxmlformats.org/drawingml/2006/main" prst="rect">
-            <a:avLst/>
-          </a:prstGeom>
-          <a:noFill xmlns:a="http://schemas.openxmlformats.org/drawingml/2006/main"/>
-          <a:ln xmlns:a="http://schemas.openxmlformats.org/drawingml/2006/main" w="0">
-            <a:noFill/>
-            <a:prstDash val="solid"/>
-          </a:ln>
-        </p:spPr>
-        <p:txBody>
-          <a:bodyPr xmlns:a="http://schemas.openxmlformats.org/drawingml/2006/main"/>
-          <a:lstStyle xmlns:a="http://schemas.openxmlformats.org/drawingml/2006/main"/>
-          <a:p xmlns:a="http://schemas.openxmlformats.org/drawingml/2006/main">
-            <a:pPr algn="ctr">
-              <a:defRPr sz="2550" b="1">
-                <a:solidFill>
-                  <a:srgbClr val="C96A1B"/>
-                </a:solidFill>
-              </a:defRPr>
-            </a:pPr>
-            <a:r>
-              <a:rPr sz="2550" b="1">
-                <a:solidFill>
-                  <a:srgbClr val="C96A1B"/>
-                </a:solidFill>
-              </a:rPr>
-              <a:t>→</a:t>
-            </a:r>
-          </a:p>
-        </p:txBody>
-      </p:sp>
-      <p:sp>
-        <p:nvSpPr>
-          <p:cNvPr id="29" name="">
-            <a:extLst xmlns:a="http://schemas.openxmlformats.org/drawingml/2006/main">
-              <a:ext uri="{FF2B5EF4-FFF2-40B4-BE49-F238E27FC236}">
-                <a16:creationId xmlns:a16="http://schemas.microsoft.com/office/drawing/2014/main" id="{75C1F372-EC00-43FC-925D-B6179F6721BF}"/>
-              </a:ext>
-            </a:extLst>
-          </p:cNvPr>
-          <p:cNvSpPr>
-            <a:spLocks xmlns:a="http://schemas.openxmlformats.org/drawingml/2006/main" noGrp="1"/>
-          </p:cNvSpPr>
-          <p:nvPr/>
-        </p:nvSpPr>
-        <p:spPr>
-          <a:xfrm xmlns:a="http://schemas.openxmlformats.org/drawingml/2006/main">
-            <a:off x="8496300" y="1790700"/>
-            <a:ext cx="2743200" cy="3181350"/>
+                <a16:creationId xmlns:a16="http://schemas.microsoft.com/office/drawing/2014/main" id="{F874AE52-6042-4B9D-8772-5BE6AA06EF48}"/>
+              </a:ext>
+            </a:extLst>
+          </p:cNvPr>
+          <p:cNvSpPr>
+            <a:spLocks xmlns:a="http://schemas.openxmlformats.org/drawingml/2006/main" noGrp="1"/>
+          </p:cNvSpPr>
+          <p:nvPr/>
+        </p:nvSpPr>
+        <p:spPr>
+          <a:xfrm xmlns:a="http://schemas.openxmlformats.org/drawingml/2006/main">
+            <a:off x="7543800" y="1790700"/>
+            <a:ext cx="3695700" cy="2495550"/>
           </a:xfrm>
           <a:prstGeom xmlns:a="http://schemas.openxmlformats.org/drawingml/2006/main" prst="roundRect">
             <a:avLst>
-              <a:gd name="adj" fmla="val 8333"/>
+              <a:gd name="adj" fmla="val 9160"/>
             </a:avLst>
           </a:prstGeom>
           <a:solidFill xmlns:a="http://schemas.openxmlformats.org/drawingml/2006/main">
-            <a:srgbClr val="F2DDC9"/>
+            <a:srgbClr val="FFFDF8"/>
           </a:solidFill>
-          <a:ln xmlns:a="http://schemas.openxmlformats.org/drawingml/2006/main" w="0">
+          <a:ln xmlns:a="http://schemas.openxmlformats.org/drawingml/2006/main" w="9525">
             <a:solidFill>
-              <a:srgbClr val="F2DDC9"/>
+              <a:srgbClr val="D8CDBE"/>
             </a:solidFill>
             <a:prstDash val="solid"/>
           </a:ln>
@@ -3707,22 +3607,22 @@
       </p:sp>
       <p:sp>
         <p:nvSpPr>
-          <p:cNvPr id="30" name="">
-            <a:extLst xmlns:a="http://schemas.openxmlformats.org/drawingml/2006/main">
-              <a:ext uri="{FF2B5EF4-FFF2-40B4-BE49-F238E27FC236}">
-                <a16:creationId xmlns:a16="http://schemas.microsoft.com/office/drawing/2014/main" id="{6796B39F-EA5D-4AB1-9328-B6B362CEBB92}"/>
-              </a:ext>
-            </a:extLst>
-          </p:cNvPr>
-          <p:cNvSpPr>
-            <a:spLocks xmlns:a="http://schemas.openxmlformats.org/drawingml/2006/main" noGrp="1"/>
-          </p:cNvSpPr>
-          <p:nvPr/>
-        </p:nvSpPr>
-        <p:spPr>
-          <a:xfrm xmlns:a="http://schemas.openxmlformats.org/drawingml/2006/main">
-            <a:off x="8724900" y="2019300"/>
-            <a:ext cx="704850" cy="323850"/>
+          <p:cNvPr id="28" name="">
+            <a:extLst xmlns:a="http://schemas.openxmlformats.org/drawingml/2006/main">
+              <a:ext uri="{FF2B5EF4-FFF2-40B4-BE49-F238E27FC236}">
+                <a16:creationId xmlns:a16="http://schemas.microsoft.com/office/drawing/2014/main" id="{55C25606-7EB9-4A99-86C6-1416E743745F}"/>
+              </a:ext>
+            </a:extLst>
+          </p:cNvPr>
+          <p:cNvSpPr>
+            <a:spLocks xmlns:a="http://schemas.openxmlformats.org/drawingml/2006/main" noGrp="1"/>
+          </p:cNvSpPr>
+          <p:nvPr/>
+        </p:nvSpPr>
+        <p:spPr>
+          <a:xfrm xmlns:a="http://schemas.openxmlformats.org/drawingml/2006/main">
+            <a:off x="7772400" y="2019300"/>
+            <a:ext cx="800100" cy="323850"/>
           </a:xfrm>
           <a:prstGeom xmlns:a="http://schemas.openxmlformats.org/drawingml/2006/main" prst="roundRect">
             <a:avLst>
@@ -3730,412 +3630,885 @@
             </a:avLst>
           </a:prstGeom>
           <a:solidFill xmlns:a="http://schemas.openxmlformats.org/drawingml/2006/main">
+            <a:srgbClr val="F2DDC9"/>
+          </a:solidFill>
+          <a:ln xmlns:a="http://schemas.openxmlformats.org/drawingml/2006/main" w="0">
+            <a:solidFill>
+              <a:srgbClr val="F2DDC9"/>
+            </a:solidFill>
+            <a:prstDash val="solid"/>
+          </a:ln>
+        </p:spPr>
+      </p:sp>
+      <p:sp>
+        <p:nvSpPr>
+          <p:cNvPr id="29" name="">
+            <a:extLst xmlns:a="http://schemas.openxmlformats.org/drawingml/2006/main">
+              <a:ext uri="{FF2B5EF4-FFF2-40B4-BE49-F238E27FC236}">
+                <a16:creationId xmlns:a16="http://schemas.microsoft.com/office/drawing/2014/main" id="{95EE3A3D-D51D-4501-B932-FCCF00304B1D}"/>
+              </a:ext>
+            </a:extLst>
+          </p:cNvPr>
+          <p:cNvSpPr>
+            <a:spLocks xmlns:a="http://schemas.openxmlformats.org/drawingml/2006/main" noGrp="1"/>
+          </p:cNvSpPr>
+          <p:nvPr/>
+        </p:nvSpPr>
+        <p:spPr>
+          <a:xfrm xmlns:a="http://schemas.openxmlformats.org/drawingml/2006/main">
+            <a:off x="7905750" y="2095500"/>
+            <a:ext cx="533400" cy="171450"/>
+          </a:xfrm>
+          <a:prstGeom xmlns:a="http://schemas.openxmlformats.org/drawingml/2006/main" prst="rect">
+            <a:avLst/>
+          </a:prstGeom>
+          <a:noFill xmlns:a="http://schemas.openxmlformats.org/drawingml/2006/main"/>
+          <a:ln xmlns:a="http://schemas.openxmlformats.org/drawingml/2006/main" w="0">
+            <a:noFill/>
+            <a:prstDash val="solid"/>
+          </a:ln>
+        </p:spPr>
+        <p:txBody>
+          <a:bodyPr xmlns:a="http://schemas.openxmlformats.org/drawingml/2006/main"/>
+          <a:lstStyle xmlns:a="http://schemas.openxmlformats.org/drawingml/2006/main"/>
+          <a:p xmlns:a="http://schemas.openxmlformats.org/drawingml/2006/main">
+            <a:pPr algn="l">
+              <a:defRPr sz="900" b="1">
+                <a:solidFill>
+                  <a:srgbClr val="C96A1B"/>
+                </a:solidFill>
+              </a:defRPr>
+            </a:pPr>
+            <a:r>
+              <a:rPr sz="900" b="1">
+                <a:solidFill>
+                  <a:srgbClr val="C96A1B"/>
+                </a:solidFill>
+              </a:rPr>
+              <a:t>终局感</a:t>
+            </a:r>
+          </a:p>
+        </p:txBody>
+      </p:sp>
+      <p:sp>
+        <p:nvSpPr>
+          <p:cNvPr id="30" name="">
+            <a:extLst xmlns:a="http://schemas.openxmlformats.org/drawingml/2006/main">
+              <a:ext uri="{FF2B5EF4-FFF2-40B4-BE49-F238E27FC236}">
+                <a16:creationId xmlns:a16="http://schemas.microsoft.com/office/drawing/2014/main" id="{CE5BE9AD-D088-480F-936C-50C559460E47}"/>
+              </a:ext>
+            </a:extLst>
+          </p:cNvPr>
+          <p:cNvSpPr>
+            <a:spLocks xmlns:a="http://schemas.openxmlformats.org/drawingml/2006/main" noGrp="1"/>
+          </p:cNvSpPr>
+          <p:nvPr/>
+        </p:nvSpPr>
+        <p:spPr>
+          <a:xfrm xmlns:a="http://schemas.openxmlformats.org/drawingml/2006/main">
+            <a:off x="7772400" y="2724150"/>
+            <a:ext cx="190500" cy="190500"/>
+          </a:xfrm>
+          <a:prstGeom xmlns:a="http://schemas.openxmlformats.org/drawingml/2006/main" prst="rect">
+            <a:avLst/>
+          </a:prstGeom>
+          <a:noFill xmlns:a="http://schemas.openxmlformats.org/drawingml/2006/main"/>
+          <a:ln xmlns:a="http://schemas.openxmlformats.org/drawingml/2006/main" w="0">
+            <a:noFill/>
+            <a:prstDash val="solid"/>
+          </a:ln>
+        </p:spPr>
+        <p:txBody>
+          <a:bodyPr xmlns:a="http://schemas.openxmlformats.org/drawingml/2006/main"/>
+          <a:lstStyle xmlns:a="http://schemas.openxmlformats.org/drawingml/2006/main"/>
+          <a:p xmlns:a="http://schemas.openxmlformats.org/drawingml/2006/main">
+            <a:pPr algn="l">
+              <a:defRPr sz="1275" b="1">
+                <a:solidFill>
+                  <a:srgbClr val="171717"/>
+                </a:solidFill>
+              </a:defRPr>
+            </a:pPr>
+            <a:r>
+              <a:rPr sz="1275" b="1">
+                <a:solidFill>
+                  <a:srgbClr val="171717"/>
+                </a:solidFill>
+              </a:rPr>
+              <a:t>•</a:t>
+            </a:r>
+          </a:p>
+        </p:txBody>
+      </p:sp>
+      <p:sp>
+        <p:nvSpPr>
+          <p:cNvPr id="31" name="">
+            <a:extLst xmlns:a="http://schemas.openxmlformats.org/drawingml/2006/main">
+              <a:ext uri="{FF2B5EF4-FFF2-40B4-BE49-F238E27FC236}">
+                <a16:creationId xmlns:a16="http://schemas.microsoft.com/office/drawing/2014/main" id="{86A17753-0AF4-4980-B658-CF3CA7BD96B1}"/>
+              </a:ext>
+            </a:extLst>
+          </p:cNvPr>
+          <p:cNvSpPr>
+            <a:spLocks xmlns:a="http://schemas.openxmlformats.org/drawingml/2006/main" noGrp="1"/>
+          </p:cNvSpPr>
+          <p:nvPr/>
+        </p:nvSpPr>
+        <p:spPr>
+          <a:xfrm xmlns:a="http://schemas.openxmlformats.org/drawingml/2006/main">
+            <a:off x="7981950" y="2724150"/>
+            <a:ext cx="2514600" cy="514350"/>
+          </a:xfrm>
+          <a:prstGeom xmlns:a="http://schemas.openxmlformats.org/drawingml/2006/main" prst="rect">
+            <a:avLst/>
+          </a:prstGeom>
+          <a:noFill xmlns:a="http://schemas.openxmlformats.org/drawingml/2006/main"/>
+          <a:ln xmlns:a="http://schemas.openxmlformats.org/drawingml/2006/main" w="0">
+            <a:noFill/>
+            <a:prstDash val="solid"/>
+          </a:ln>
+        </p:spPr>
+        <p:txBody>
+          <a:bodyPr xmlns:a="http://schemas.openxmlformats.org/drawingml/2006/main"/>
+          <a:lstStyle xmlns:a="http://schemas.openxmlformats.org/drawingml/2006/main"/>
+          <a:p xmlns:a="http://schemas.openxmlformats.org/drawingml/2006/main">
+            <a:pPr algn="l">
+              <a:defRPr sz="1275" b="0">
+                <a:solidFill>
+                  <a:srgbClr val="171717"/>
+                </a:solidFill>
+              </a:defRPr>
+            </a:pPr>
+            <a:r>
+              <a:rPr sz="1275" b="0">
+                <a:solidFill>
+                  <a:srgbClr val="171717"/>
+                </a:solidFill>
+              </a:rPr>
+              <a:t>共享的是核心能力，不是同一套界面</a:t>
+            </a:r>
+          </a:p>
+        </p:txBody>
+      </p:sp>
+      <p:sp>
+        <p:nvSpPr>
+          <p:cNvPr id="32" name="">
+            <a:extLst xmlns:a="http://schemas.openxmlformats.org/drawingml/2006/main">
+              <a:ext uri="{FF2B5EF4-FFF2-40B4-BE49-F238E27FC236}">
+                <a16:creationId xmlns:a16="http://schemas.microsoft.com/office/drawing/2014/main" id="{0C27D02A-92A9-4186-AFAE-48809889F4DB}"/>
+              </a:ext>
+            </a:extLst>
+          </p:cNvPr>
+          <p:cNvSpPr>
+            <a:spLocks xmlns:a="http://schemas.openxmlformats.org/drawingml/2006/main" noGrp="1"/>
+          </p:cNvSpPr>
+          <p:nvPr/>
+        </p:nvSpPr>
+        <p:spPr>
+          <a:xfrm xmlns:a="http://schemas.openxmlformats.org/drawingml/2006/main">
+            <a:off x="7772400" y="3238500"/>
+            <a:ext cx="190500" cy="190500"/>
+          </a:xfrm>
+          <a:prstGeom xmlns:a="http://schemas.openxmlformats.org/drawingml/2006/main" prst="rect">
+            <a:avLst/>
+          </a:prstGeom>
+          <a:noFill xmlns:a="http://schemas.openxmlformats.org/drawingml/2006/main"/>
+          <a:ln xmlns:a="http://schemas.openxmlformats.org/drawingml/2006/main" w="0">
+            <a:noFill/>
+            <a:prstDash val="solid"/>
+          </a:ln>
+        </p:spPr>
+        <p:txBody>
+          <a:bodyPr xmlns:a="http://schemas.openxmlformats.org/drawingml/2006/main"/>
+          <a:lstStyle xmlns:a="http://schemas.openxmlformats.org/drawingml/2006/main"/>
+          <a:p xmlns:a="http://schemas.openxmlformats.org/drawingml/2006/main">
+            <a:pPr algn="l">
+              <a:defRPr sz="1275" b="1">
+                <a:solidFill>
+                  <a:srgbClr val="171717"/>
+                </a:solidFill>
+              </a:defRPr>
+            </a:pPr>
+            <a:r>
+              <a:rPr sz="1275" b="1">
+                <a:solidFill>
+                  <a:srgbClr val="171717"/>
+                </a:solidFill>
+              </a:rPr>
+              <a:t>•</a:t>
+            </a:r>
+          </a:p>
+        </p:txBody>
+      </p:sp>
+      <p:sp>
+        <p:nvSpPr>
+          <p:cNvPr id="33" name="">
+            <a:extLst xmlns:a="http://schemas.openxmlformats.org/drawingml/2006/main">
+              <a:ext uri="{FF2B5EF4-FFF2-40B4-BE49-F238E27FC236}">
+                <a16:creationId xmlns:a16="http://schemas.microsoft.com/office/drawing/2014/main" id="{12358E3C-975B-4E62-8C0A-07D84B68B41C}"/>
+              </a:ext>
+            </a:extLst>
+          </p:cNvPr>
+          <p:cNvSpPr>
+            <a:spLocks xmlns:a="http://schemas.openxmlformats.org/drawingml/2006/main" noGrp="1"/>
+          </p:cNvSpPr>
+          <p:nvPr/>
+        </p:nvSpPr>
+        <p:spPr>
+          <a:xfrm xmlns:a="http://schemas.openxmlformats.org/drawingml/2006/main">
+            <a:off x="7981950" y="3238500"/>
+            <a:ext cx="2514600" cy="514350"/>
+          </a:xfrm>
+          <a:prstGeom xmlns:a="http://schemas.openxmlformats.org/drawingml/2006/main" prst="rect">
+            <a:avLst/>
+          </a:prstGeom>
+          <a:noFill xmlns:a="http://schemas.openxmlformats.org/drawingml/2006/main"/>
+          <a:ln xmlns:a="http://schemas.openxmlformats.org/drawingml/2006/main" w="0">
+            <a:noFill/>
+            <a:prstDash val="solid"/>
+          </a:ln>
+        </p:spPr>
+        <p:txBody>
+          <a:bodyPr xmlns:a="http://schemas.openxmlformats.org/drawingml/2006/main"/>
+          <a:lstStyle xmlns:a="http://schemas.openxmlformats.org/drawingml/2006/main"/>
+          <a:p xmlns:a="http://schemas.openxmlformats.org/drawingml/2006/main">
+            <a:pPr algn="l">
+              <a:defRPr sz="1275" b="0">
+                <a:solidFill>
+                  <a:srgbClr val="171717"/>
+                </a:solidFill>
+              </a:defRPr>
+            </a:pPr>
+            <a:r>
+              <a:rPr sz="1275" b="0">
+                <a:solidFill>
+                  <a:srgbClr val="171717"/>
+                </a:solidFill>
+              </a:rPr>
+              <a:t>前台会按对方知识库、审美、权限重新长</a:t>
+            </a:r>
+          </a:p>
+        </p:txBody>
+      </p:sp>
+      <p:sp>
+        <p:nvSpPr>
+          <p:cNvPr id="34" name="">
+            <a:extLst xmlns:a="http://schemas.openxmlformats.org/drawingml/2006/main">
+              <a:ext uri="{FF2B5EF4-FFF2-40B4-BE49-F238E27FC236}">
+                <a16:creationId xmlns:a16="http://schemas.microsoft.com/office/drawing/2014/main" id="{99354226-25EC-4236-95A8-4690F7D31B4C}"/>
+              </a:ext>
+            </a:extLst>
+          </p:cNvPr>
+          <p:cNvSpPr>
+            <a:spLocks xmlns:a="http://schemas.openxmlformats.org/drawingml/2006/main" noGrp="1"/>
+          </p:cNvSpPr>
+          <p:nvPr/>
+        </p:nvSpPr>
+        <p:spPr>
+          <a:xfrm xmlns:a="http://schemas.openxmlformats.org/drawingml/2006/main">
+            <a:off x="7772400" y="3752850"/>
+            <a:ext cx="190500" cy="190500"/>
+          </a:xfrm>
+          <a:prstGeom xmlns:a="http://schemas.openxmlformats.org/drawingml/2006/main" prst="rect">
+            <a:avLst/>
+          </a:prstGeom>
+          <a:noFill xmlns:a="http://schemas.openxmlformats.org/drawingml/2006/main"/>
+          <a:ln xmlns:a="http://schemas.openxmlformats.org/drawingml/2006/main" w="0">
+            <a:noFill/>
+            <a:prstDash val="solid"/>
+          </a:ln>
+        </p:spPr>
+        <p:txBody>
+          <a:bodyPr xmlns:a="http://schemas.openxmlformats.org/drawingml/2006/main"/>
+          <a:lstStyle xmlns:a="http://schemas.openxmlformats.org/drawingml/2006/main"/>
+          <a:p xmlns:a="http://schemas.openxmlformats.org/drawingml/2006/main">
+            <a:pPr algn="l">
+              <a:defRPr sz="1275" b="1">
+                <a:solidFill>
+                  <a:srgbClr val="171717"/>
+                </a:solidFill>
+              </a:defRPr>
+            </a:pPr>
+            <a:r>
+              <a:rPr sz="1275" b="1">
+                <a:solidFill>
+                  <a:srgbClr val="171717"/>
+                </a:solidFill>
+              </a:rPr>
+              <a:t>•</a:t>
+            </a:r>
+          </a:p>
+        </p:txBody>
+      </p:sp>
+      <p:sp>
+        <p:nvSpPr>
+          <p:cNvPr id="35" name="">
+            <a:extLst xmlns:a="http://schemas.openxmlformats.org/drawingml/2006/main">
+              <a:ext uri="{FF2B5EF4-FFF2-40B4-BE49-F238E27FC236}">
+                <a16:creationId xmlns:a16="http://schemas.microsoft.com/office/drawing/2014/main" id="{75211B66-56DF-4659-BA2A-DB7B62E80415}"/>
+              </a:ext>
+            </a:extLst>
+          </p:cNvPr>
+          <p:cNvSpPr>
+            <a:spLocks xmlns:a="http://schemas.openxmlformats.org/drawingml/2006/main" noGrp="1"/>
+          </p:cNvSpPr>
+          <p:nvPr/>
+        </p:nvSpPr>
+        <p:spPr>
+          <a:xfrm xmlns:a="http://schemas.openxmlformats.org/drawingml/2006/main">
+            <a:off x="7981950" y="3752850"/>
+            <a:ext cx="2514600" cy="514350"/>
+          </a:xfrm>
+          <a:prstGeom xmlns:a="http://schemas.openxmlformats.org/drawingml/2006/main" prst="rect">
+            <a:avLst/>
+          </a:prstGeom>
+          <a:noFill xmlns:a="http://schemas.openxmlformats.org/drawingml/2006/main"/>
+          <a:ln xmlns:a="http://schemas.openxmlformats.org/drawingml/2006/main" w="0">
+            <a:noFill/>
+            <a:prstDash val="solid"/>
+          </a:ln>
+        </p:spPr>
+        <p:txBody>
+          <a:bodyPr xmlns:a="http://schemas.openxmlformats.org/drawingml/2006/main"/>
+          <a:lstStyle xmlns:a="http://schemas.openxmlformats.org/drawingml/2006/main"/>
+          <a:p xmlns:a="http://schemas.openxmlformats.org/drawingml/2006/main">
+            <a:pPr algn="l">
+              <a:defRPr sz="1275" b="0">
+                <a:solidFill>
+                  <a:srgbClr val="171717"/>
+                </a:solidFill>
+              </a:defRPr>
+            </a:pPr>
+            <a:r>
+              <a:rPr sz="1275" b="0">
+                <a:solidFill>
+                  <a:srgbClr val="171717"/>
+                </a:solidFill>
+              </a:rPr>
+              <a:t>最后真正通用的，只剩同步、审查、权限、血缘</a:t>
+            </a:r>
+          </a:p>
+        </p:txBody>
+      </p:sp>
+      <p:sp>
+        <p:nvSpPr>
+          <p:cNvPr id="36" name="">
+            <a:extLst xmlns:a="http://schemas.openxmlformats.org/drawingml/2006/main">
+              <a:ext uri="{FF2B5EF4-FFF2-40B4-BE49-F238E27FC236}">
+                <a16:creationId xmlns:a16="http://schemas.microsoft.com/office/drawing/2014/main" id="{86A73095-77FA-41A7-A6A8-9067C48CB3B6}"/>
+              </a:ext>
+            </a:extLst>
+          </p:cNvPr>
+          <p:cNvSpPr>
+            <a:spLocks xmlns:a="http://schemas.openxmlformats.org/drawingml/2006/main" noGrp="1"/>
+          </p:cNvSpPr>
+          <p:nvPr/>
+        </p:nvSpPr>
+        <p:spPr>
+          <a:xfrm xmlns:a="http://schemas.openxmlformats.org/drawingml/2006/main">
+            <a:off x="685800" y="4648200"/>
+            <a:ext cx="2724150" cy="1085850"/>
+          </a:xfrm>
+          <a:prstGeom xmlns:a="http://schemas.openxmlformats.org/drawingml/2006/main" prst="roundRect">
+            <a:avLst>
+              <a:gd name="adj" fmla="val 21053"/>
+            </a:avLst>
+          </a:prstGeom>
+          <a:solidFill xmlns:a="http://schemas.openxmlformats.org/drawingml/2006/main">
+            <a:srgbClr val="24211D"/>
+          </a:solidFill>
+          <a:ln xmlns:a="http://schemas.openxmlformats.org/drawingml/2006/main" w="0">
+            <a:solidFill>
+              <a:srgbClr val="24211D"/>
+            </a:solidFill>
+            <a:prstDash val="solid"/>
+          </a:ln>
+        </p:spPr>
+        <p:style>
+          <a:lnRef xmlns:a="http://schemas.openxmlformats.org/drawingml/2006/main" idx="0"/>
+          <a:fillRef xmlns:a="http://schemas.openxmlformats.org/drawingml/2006/main" idx="0"/>
+          <a:effectRef xmlns:a="http://schemas.openxmlformats.org/drawingml/2006/main" idx="6"/>
+          <a:fontRef xmlns:a="http://schemas.openxmlformats.org/drawingml/2006/main" idx="major"/>
+        </p:style>
+      </p:sp>
+      <p:sp>
+        <p:nvSpPr>
+          <p:cNvPr id="37" name="">
+            <a:extLst xmlns:a="http://schemas.openxmlformats.org/drawingml/2006/main">
+              <a:ext uri="{FF2B5EF4-FFF2-40B4-BE49-F238E27FC236}">
+                <a16:creationId xmlns:a16="http://schemas.microsoft.com/office/drawing/2014/main" id="{3BB8341B-04B9-4E91-9D14-B0C409E2E844}"/>
+              </a:ext>
+            </a:extLst>
+          </p:cNvPr>
+          <p:cNvSpPr>
+            <a:spLocks xmlns:a="http://schemas.openxmlformats.org/drawingml/2006/main" noGrp="1"/>
+          </p:cNvSpPr>
+          <p:nvPr/>
+        </p:nvSpPr>
+        <p:spPr>
+          <a:xfrm xmlns:a="http://schemas.openxmlformats.org/drawingml/2006/main">
+            <a:off x="914400" y="4876800"/>
+            <a:ext cx="2019300" cy="228600"/>
+          </a:xfrm>
+          <a:prstGeom xmlns:a="http://schemas.openxmlformats.org/drawingml/2006/main" prst="rect">
+            <a:avLst/>
+          </a:prstGeom>
+          <a:noFill xmlns:a="http://schemas.openxmlformats.org/drawingml/2006/main"/>
+          <a:ln xmlns:a="http://schemas.openxmlformats.org/drawingml/2006/main" w="0">
+            <a:noFill/>
+            <a:prstDash val="solid"/>
+          </a:ln>
+        </p:spPr>
+        <p:txBody>
+          <a:bodyPr xmlns:a="http://schemas.openxmlformats.org/drawingml/2006/main"/>
+          <a:lstStyle xmlns:a="http://schemas.openxmlformats.org/drawingml/2006/main"/>
+          <a:p xmlns:a="http://schemas.openxmlformats.org/drawingml/2006/main">
+            <a:pPr algn="l">
+              <a:defRPr sz="1500" b="1">
+                <a:solidFill>
+                  <a:srgbClr val="FFFFFF"/>
+                </a:solidFill>
+              </a:defRPr>
+            </a:pPr>
+            <a:r>
+              <a:rPr sz="1500" b="1">
+                <a:solidFill>
+                  <a:srgbClr val="FFFFFF"/>
+                </a:solidFill>
+              </a:rPr>
+              <a:t>甲：偏高密度控制台</a:t>
+            </a:r>
+          </a:p>
+        </p:txBody>
+      </p:sp>
+      <p:sp>
+        <p:nvSpPr>
+          <p:cNvPr id="38" name="">
+            <a:extLst xmlns:a="http://schemas.openxmlformats.org/drawingml/2006/main">
+              <a:ext uri="{FF2B5EF4-FFF2-40B4-BE49-F238E27FC236}">
+                <a16:creationId xmlns:a16="http://schemas.microsoft.com/office/drawing/2014/main" id="{DC412BE0-228C-4A49-966F-3204EB9C9D03}"/>
+              </a:ext>
+            </a:extLst>
+          </p:cNvPr>
+          <p:cNvSpPr>
+            <a:spLocks xmlns:a="http://schemas.openxmlformats.org/drawingml/2006/main" noGrp="1"/>
+          </p:cNvSpPr>
+          <p:nvPr/>
+        </p:nvSpPr>
+        <p:spPr>
+          <a:xfrm xmlns:a="http://schemas.openxmlformats.org/drawingml/2006/main">
+            <a:off x="914400" y="5219700"/>
+            <a:ext cx="2114550" cy="323850"/>
+          </a:xfrm>
+          <a:prstGeom xmlns:a="http://schemas.openxmlformats.org/drawingml/2006/main" prst="rect">
+            <a:avLst/>
+          </a:prstGeom>
+          <a:noFill xmlns:a="http://schemas.openxmlformats.org/drawingml/2006/main"/>
+          <a:ln xmlns:a="http://schemas.openxmlformats.org/drawingml/2006/main" w="0">
+            <a:noFill/>
+            <a:prstDash val="solid"/>
+          </a:ln>
+        </p:spPr>
+        <p:txBody>
+          <a:bodyPr xmlns:a="http://schemas.openxmlformats.org/drawingml/2006/main"/>
+          <a:lstStyle xmlns:a="http://schemas.openxmlformats.org/drawingml/2006/main"/>
+          <a:p xmlns:a="http://schemas.openxmlformats.org/drawingml/2006/main">
+            <a:pPr algn="l">
+              <a:defRPr sz="1200" b="0">
+                <a:solidFill>
+                  <a:srgbClr val="E7E5E4"/>
+                </a:solidFill>
+              </a:defRPr>
+            </a:pPr>
+            <a:r>
+              <a:rPr sz="1200" b="0">
+                <a:solidFill>
+                  <a:srgbClr val="E7E5E4"/>
+                </a:solidFill>
+              </a:rPr>
+              <a:t>把 repair、fallback、review 都堆在一屏。</a:t>
+            </a:r>
+          </a:p>
+        </p:txBody>
+      </p:sp>
+      <p:sp>
+        <p:nvSpPr>
+          <p:cNvPr id="39" name="">
+            <a:extLst xmlns:a="http://schemas.openxmlformats.org/drawingml/2006/main">
+              <a:ext uri="{FF2B5EF4-FFF2-40B4-BE49-F238E27FC236}">
+                <a16:creationId xmlns:a16="http://schemas.microsoft.com/office/drawing/2014/main" id="{29B40107-14A3-4E2F-A2E9-18CC37138346}"/>
+              </a:ext>
+            </a:extLst>
+          </p:cNvPr>
+          <p:cNvSpPr>
+            <a:spLocks xmlns:a="http://schemas.openxmlformats.org/drawingml/2006/main" noGrp="1"/>
+          </p:cNvSpPr>
+          <p:nvPr/>
+        </p:nvSpPr>
+        <p:spPr>
+          <a:xfrm xmlns:a="http://schemas.openxmlformats.org/drawingml/2006/main">
+            <a:off x="3562350" y="5067300"/>
+            <a:ext cx="419100" cy="228600"/>
+          </a:xfrm>
+          <a:prstGeom xmlns:a="http://schemas.openxmlformats.org/drawingml/2006/main" prst="rect">
+            <a:avLst/>
+          </a:prstGeom>
+          <a:noFill xmlns:a="http://schemas.openxmlformats.org/drawingml/2006/main"/>
+          <a:ln xmlns:a="http://schemas.openxmlformats.org/drawingml/2006/main" w="0">
+            <a:noFill/>
+            <a:prstDash val="solid"/>
+          </a:ln>
+        </p:spPr>
+        <p:txBody>
+          <a:bodyPr xmlns:a="http://schemas.openxmlformats.org/drawingml/2006/main"/>
+          <a:lstStyle xmlns:a="http://schemas.openxmlformats.org/drawingml/2006/main"/>
+          <a:p xmlns:a="http://schemas.openxmlformats.org/drawingml/2006/main">
+            <a:pPr algn="ctr">
+              <a:defRPr sz="2550" b="1">
+                <a:solidFill>
+                  <a:srgbClr val="C96A1B"/>
+                </a:solidFill>
+              </a:defRPr>
+            </a:pPr>
+            <a:r>
+              <a:rPr sz="2550" b="1">
+                <a:solidFill>
+                  <a:srgbClr val="C96A1B"/>
+                </a:solidFill>
+              </a:rPr>
+              <a:t>→</a:t>
+            </a:r>
+          </a:p>
+        </p:txBody>
+      </p:sp>
+      <p:sp>
+        <p:nvSpPr>
+          <p:cNvPr id="40" name="">
+            <a:extLst xmlns:a="http://schemas.openxmlformats.org/drawingml/2006/main">
+              <a:ext uri="{FF2B5EF4-FFF2-40B4-BE49-F238E27FC236}">
+                <a16:creationId xmlns:a16="http://schemas.microsoft.com/office/drawing/2014/main" id="{6C2ABE0E-3647-477F-BF03-C601D7B2CEA4}"/>
+              </a:ext>
+            </a:extLst>
+          </p:cNvPr>
+          <p:cNvSpPr>
+            <a:spLocks xmlns:a="http://schemas.openxmlformats.org/drawingml/2006/main" noGrp="1"/>
+          </p:cNvSpPr>
+          <p:nvPr/>
+        </p:nvSpPr>
+        <p:spPr>
+          <a:xfrm xmlns:a="http://schemas.openxmlformats.org/drawingml/2006/main">
+            <a:off x="4114800" y="4648200"/>
+            <a:ext cx="2724150" cy="1085850"/>
+          </a:xfrm>
+          <a:prstGeom xmlns:a="http://schemas.openxmlformats.org/drawingml/2006/main" prst="roundRect">
+            <a:avLst>
+              <a:gd name="adj" fmla="val 21053"/>
+            </a:avLst>
+          </a:prstGeom>
+          <a:solidFill xmlns:a="http://schemas.openxmlformats.org/drawingml/2006/main">
+            <a:srgbClr val="F2DDC9"/>
+          </a:solidFill>
+          <a:ln xmlns:a="http://schemas.openxmlformats.org/drawingml/2006/main" w="0">
+            <a:solidFill>
+              <a:srgbClr val="F2DDC9"/>
+            </a:solidFill>
+            <a:prstDash val="solid"/>
+          </a:ln>
+        </p:spPr>
+        <p:style>
+          <a:lnRef xmlns:a="http://schemas.openxmlformats.org/drawingml/2006/main" idx="0"/>
+          <a:fillRef xmlns:a="http://schemas.openxmlformats.org/drawingml/2006/main" idx="0"/>
+          <a:effectRef xmlns:a="http://schemas.openxmlformats.org/drawingml/2006/main" idx="4"/>
+          <a:fontRef xmlns:a="http://schemas.openxmlformats.org/drawingml/2006/main" idx="major"/>
+        </p:style>
+      </p:sp>
+      <p:sp>
+        <p:nvSpPr>
+          <p:cNvPr id="41" name="">
+            <a:extLst xmlns:a="http://schemas.openxmlformats.org/drawingml/2006/main">
+              <a:ext uri="{FF2B5EF4-FFF2-40B4-BE49-F238E27FC236}">
+                <a16:creationId xmlns:a16="http://schemas.microsoft.com/office/drawing/2014/main" id="{F9CC689B-3E3C-4BD6-AFAB-929CDBA1D562}"/>
+              </a:ext>
+            </a:extLst>
+          </p:cNvPr>
+          <p:cNvSpPr>
+            <a:spLocks xmlns:a="http://schemas.openxmlformats.org/drawingml/2006/main" noGrp="1"/>
+          </p:cNvSpPr>
+          <p:nvPr/>
+        </p:nvSpPr>
+        <p:spPr>
+          <a:xfrm xmlns:a="http://schemas.openxmlformats.org/drawingml/2006/main">
+            <a:off x="4343400" y="4876800"/>
+            <a:ext cx="2000250" cy="228600"/>
+          </a:xfrm>
+          <a:prstGeom xmlns:a="http://schemas.openxmlformats.org/drawingml/2006/main" prst="rect">
+            <a:avLst/>
+          </a:prstGeom>
+          <a:noFill xmlns:a="http://schemas.openxmlformats.org/drawingml/2006/main"/>
+          <a:ln xmlns:a="http://schemas.openxmlformats.org/drawingml/2006/main" w="0">
+            <a:noFill/>
+            <a:prstDash val="solid"/>
+          </a:ln>
+        </p:spPr>
+        <p:txBody>
+          <a:bodyPr xmlns:a="http://schemas.openxmlformats.org/drawingml/2006/main"/>
+          <a:lstStyle xmlns:a="http://schemas.openxmlformats.org/drawingml/2006/main"/>
+          <a:p xmlns:a="http://schemas.openxmlformats.org/drawingml/2006/main">
+            <a:pPr algn="l">
+              <a:defRPr sz="1500" b="1">
+                <a:solidFill>
+                  <a:srgbClr val="171717"/>
+                </a:solidFill>
+              </a:defRPr>
+            </a:pPr>
+            <a:r>
+              <a:rPr sz="1500" b="1">
+                <a:solidFill>
+                  <a:srgbClr val="171717"/>
+                </a:solidFill>
+              </a:rPr>
+              <a:t>中间推送的不是界面</a:t>
+            </a:r>
+          </a:p>
+        </p:txBody>
+      </p:sp>
+      <p:sp>
+        <p:nvSpPr>
+          <p:cNvPr id="42" name="">
+            <a:extLst xmlns:a="http://schemas.openxmlformats.org/drawingml/2006/main">
+              <a:ext uri="{FF2B5EF4-FFF2-40B4-BE49-F238E27FC236}">
+                <a16:creationId xmlns:a16="http://schemas.microsoft.com/office/drawing/2014/main" id="{8DA3527C-4FA2-4F34-A2EA-14CEEAFE6C83}"/>
+              </a:ext>
+            </a:extLst>
+          </p:cNvPr>
+          <p:cNvSpPr>
+            <a:spLocks xmlns:a="http://schemas.openxmlformats.org/drawingml/2006/main" noGrp="1"/>
+          </p:cNvSpPr>
+          <p:nvPr/>
+        </p:nvSpPr>
+        <p:spPr>
+          <a:xfrm xmlns:a="http://schemas.openxmlformats.org/drawingml/2006/main">
+            <a:off x="4343400" y="5219700"/>
+            <a:ext cx="2095500" cy="323850"/>
+          </a:xfrm>
+          <a:prstGeom xmlns:a="http://schemas.openxmlformats.org/drawingml/2006/main" prst="rect">
+            <a:avLst/>
+          </a:prstGeom>
+          <a:noFill xmlns:a="http://schemas.openxmlformats.org/drawingml/2006/main"/>
+          <a:ln xmlns:a="http://schemas.openxmlformats.org/drawingml/2006/main" w="0">
+            <a:noFill/>
+            <a:prstDash val="solid"/>
+          </a:ln>
+        </p:spPr>
+        <p:txBody>
+          <a:bodyPr xmlns:a="http://schemas.openxmlformats.org/drawingml/2006/main"/>
+          <a:lstStyle xmlns:a="http://schemas.openxmlformats.org/drawingml/2006/main"/>
+          <a:p xmlns:a="http://schemas.openxmlformats.org/drawingml/2006/main">
+            <a:pPr algn="l">
+              <a:defRPr sz="1200" b="0">
+                <a:solidFill>
+                  <a:srgbClr val="57534E"/>
+                </a:solidFill>
+              </a:defRPr>
+            </a:pPr>
+            <a:r>
+              <a:rPr sz="1200" b="0">
+                <a:solidFill>
+                  <a:srgbClr val="57534E"/>
+                </a:solidFill>
+              </a:rPr>
+              <a:t>而是蒸馏后的做法、repair 和 flow。</a:t>
+            </a:r>
+          </a:p>
+        </p:txBody>
+      </p:sp>
+      <p:sp>
+        <p:nvSpPr>
+          <p:cNvPr id="43" name="">
+            <a:extLst xmlns:a="http://schemas.openxmlformats.org/drawingml/2006/main">
+              <a:ext uri="{FF2B5EF4-FFF2-40B4-BE49-F238E27FC236}">
+                <a16:creationId xmlns:a16="http://schemas.microsoft.com/office/drawing/2014/main" id="{BB3A2C78-8DAA-4E39-922E-AD6415FA7F26}"/>
+              </a:ext>
+            </a:extLst>
+          </p:cNvPr>
+          <p:cNvSpPr>
+            <a:spLocks xmlns:a="http://schemas.openxmlformats.org/drawingml/2006/main" noGrp="1"/>
+          </p:cNvSpPr>
+          <p:nvPr/>
+        </p:nvSpPr>
+        <p:spPr>
+          <a:xfrm xmlns:a="http://schemas.openxmlformats.org/drawingml/2006/main">
+            <a:off x="6991350" y="5067300"/>
+            <a:ext cx="419100" cy="228600"/>
+          </a:xfrm>
+          <a:prstGeom xmlns:a="http://schemas.openxmlformats.org/drawingml/2006/main" prst="rect">
+            <a:avLst/>
+          </a:prstGeom>
+          <a:noFill xmlns:a="http://schemas.openxmlformats.org/drawingml/2006/main"/>
+          <a:ln xmlns:a="http://schemas.openxmlformats.org/drawingml/2006/main" w="0">
+            <a:noFill/>
+            <a:prstDash val="solid"/>
+          </a:ln>
+        </p:spPr>
+        <p:txBody>
+          <a:bodyPr xmlns:a="http://schemas.openxmlformats.org/drawingml/2006/main"/>
+          <a:lstStyle xmlns:a="http://schemas.openxmlformats.org/drawingml/2006/main"/>
+          <a:p xmlns:a="http://schemas.openxmlformats.org/drawingml/2006/main">
+            <a:pPr algn="ctr">
+              <a:defRPr sz="2550" b="1">
+                <a:solidFill>
+                  <a:srgbClr val="C96A1B"/>
+                </a:solidFill>
+              </a:defRPr>
+            </a:pPr>
+            <a:r>
+              <a:rPr sz="2550" b="1">
+                <a:solidFill>
+                  <a:srgbClr val="C96A1B"/>
+                </a:solidFill>
+              </a:rPr>
+              <a:t>→</a:t>
+            </a:r>
+          </a:p>
+        </p:txBody>
+      </p:sp>
+      <p:sp>
+        <p:nvSpPr>
+          <p:cNvPr id="44" name="">
+            <a:extLst xmlns:a="http://schemas.openxmlformats.org/drawingml/2006/main">
+              <a:ext uri="{FF2B5EF4-FFF2-40B4-BE49-F238E27FC236}">
+                <a16:creationId xmlns:a16="http://schemas.microsoft.com/office/drawing/2014/main" id="{87117CA5-22FA-49A0-B1FD-BF061D62161A}"/>
+              </a:ext>
+            </a:extLst>
+          </p:cNvPr>
+          <p:cNvSpPr>
+            <a:spLocks xmlns:a="http://schemas.openxmlformats.org/drawingml/2006/main" noGrp="1"/>
+          </p:cNvSpPr>
+          <p:nvPr/>
+        </p:nvSpPr>
+        <p:spPr>
+          <a:xfrm xmlns:a="http://schemas.openxmlformats.org/drawingml/2006/main">
+            <a:off x="7543800" y="4648200"/>
+            <a:ext cx="3695700" cy="1085850"/>
+          </a:xfrm>
+          <a:prstGeom xmlns:a="http://schemas.openxmlformats.org/drawingml/2006/main" prst="roundRect">
+            <a:avLst>
+              <a:gd name="adj" fmla="val 21053"/>
+            </a:avLst>
+          </a:prstGeom>
+          <a:solidFill xmlns:a="http://schemas.openxmlformats.org/drawingml/2006/main">
             <a:srgbClr val="FFFDF8"/>
           </a:solidFill>
-          <a:ln xmlns:a="http://schemas.openxmlformats.org/drawingml/2006/main" w="0">
+          <a:ln xmlns:a="http://schemas.openxmlformats.org/drawingml/2006/main" w="9525">
             <a:solidFill>
-              <a:srgbClr val="FFFDF8"/>
+              <a:srgbClr val="D8CDBE"/>
             </a:solidFill>
             <a:prstDash val="solid"/>
           </a:ln>
         </p:spPr>
-      </p:sp>
-      <p:sp>
-        <p:nvSpPr>
-          <p:cNvPr id="31" name="">
-            <a:extLst xmlns:a="http://schemas.openxmlformats.org/drawingml/2006/main">
-              <a:ext uri="{FF2B5EF4-FFF2-40B4-BE49-F238E27FC236}">
-                <a16:creationId xmlns:a16="http://schemas.microsoft.com/office/drawing/2014/main" id="{EFA6C632-D9E0-4CFF-936D-0DC703A17B5D}"/>
-              </a:ext>
-            </a:extLst>
-          </p:cNvPr>
-          <p:cNvSpPr>
-            <a:spLocks xmlns:a="http://schemas.openxmlformats.org/drawingml/2006/main" noGrp="1"/>
-          </p:cNvSpPr>
-          <p:nvPr/>
-        </p:nvSpPr>
-        <p:spPr>
-          <a:xfrm xmlns:a="http://schemas.openxmlformats.org/drawingml/2006/main">
-            <a:off x="8858250" y="2095500"/>
-            <a:ext cx="438150" cy="171450"/>
-          </a:xfrm>
-          <a:prstGeom xmlns:a="http://schemas.openxmlformats.org/drawingml/2006/main" prst="rect">
-            <a:avLst/>
-          </a:prstGeom>
-          <a:noFill xmlns:a="http://schemas.openxmlformats.org/drawingml/2006/main"/>
-          <a:ln xmlns:a="http://schemas.openxmlformats.org/drawingml/2006/main" w="0">
-            <a:noFill/>
-            <a:prstDash val="solid"/>
-          </a:ln>
-        </p:spPr>
-        <p:txBody>
-          <a:bodyPr xmlns:a="http://schemas.openxmlformats.org/drawingml/2006/main"/>
-          <a:lstStyle xmlns:a="http://schemas.openxmlformats.org/drawingml/2006/main"/>
-          <a:p xmlns:a="http://schemas.openxmlformats.org/drawingml/2006/main">
-            <a:pPr algn="l">
-              <a:defRPr sz="900" b="1">
-                <a:solidFill>
-                  <a:srgbClr val="C96A1B"/>
-                </a:solidFill>
-              </a:defRPr>
-            </a:pPr>
-            <a:r>
-              <a:rPr sz="900" b="1">
-                <a:solidFill>
-                  <a:srgbClr val="C96A1B"/>
-                </a:solidFill>
-              </a:rPr>
-              <a:t>一周后</a:t>
-            </a:r>
-          </a:p>
-        </p:txBody>
-      </p:sp>
-      <p:sp>
-        <p:nvSpPr>
-          <p:cNvPr id="32" name="">
-            <a:extLst xmlns:a="http://schemas.openxmlformats.org/drawingml/2006/main">
-              <a:ext uri="{FF2B5EF4-FFF2-40B4-BE49-F238E27FC236}">
-                <a16:creationId xmlns:a16="http://schemas.microsoft.com/office/drawing/2014/main" id="{81FE786C-7B85-4946-AD07-4F34F12D4F7D}"/>
-              </a:ext>
-            </a:extLst>
-          </p:cNvPr>
-          <p:cNvSpPr>
-            <a:spLocks xmlns:a="http://schemas.openxmlformats.org/drawingml/2006/main" noGrp="1"/>
-          </p:cNvSpPr>
-          <p:nvPr/>
-        </p:nvSpPr>
-        <p:spPr>
-          <a:xfrm xmlns:a="http://schemas.openxmlformats.org/drawingml/2006/main">
-            <a:off x="8724900" y="2724150"/>
-            <a:ext cx="190500" cy="190500"/>
-          </a:xfrm>
-          <a:prstGeom xmlns:a="http://schemas.openxmlformats.org/drawingml/2006/main" prst="rect">
-            <a:avLst/>
-          </a:prstGeom>
-          <a:noFill xmlns:a="http://schemas.openxmlformats.org/drawingml/2006/main"/>
-          <a:ln xmlns:a="http://schemas.openxmlformats.org/drawingml/2006/main" w="0">
-            <a:noFill/>
-            <a:prstDash val="solid"/>
-          </a:ln>
-        </p:spPr>
-        <p:txBody>
-          <a:bodyPr xmlns:a="http://schemas.openxmlformats.org/drawingml/2006/main"/>
-          <a:lstStyle xmlns:a="http://schemas.openxmlformats.org/drawingml/2006/main"/>
-          <a:p xmlns:a="http://schemas.openxmlformats.org/drawingml/2006/main">
-            <a:pPr algn="l">
-              <a:defRPr sz="1350" b="1">
-                <a:solidFill>
-                  <a:srgbClr val="171717"/>
-                </a:solidFill>
-              </a:defRPr>
-            </a:pPr>
-            <a:r>
-              <a:rPr sz="1350" b="1">
-                <a:solidFill>
-                  <a:srgbClr val="171717"/>
-                </a:solidFill>
-              </a:rPr>
-              <a:t>•</a:t>
-            </a:r>
-          </a:p>
-        </p:txBody>
-      </p:sp>
-      <p:sp>
-        <p:nvSpPr>
-          <p:cNvPr id="33" name="">
-            <a:extLst xmlns:a="http://schemas.openxmlformats.org/drawingml/2006/main">
-              <a:ext uri="{FF2B5EF4-FFF2-40B4-BE49-F238E27FC236}">
-                <a16:creationId xmlns:a16="http://schemas.microsoft.com/office/drawing/2014/main" id="{653BF2F6-B6A5-484F-BE57-64C3FA69A18B}"/>
-              </a:ext>
-            </a:extLst>
-          </p:cNvPr>
-          <p:cNvSpPr>
-            <a:spLocks xmlns:a="http://schemas.openxmlformats.org/drawingml/2006/main" noGrp="1"/>
-          </p:cNvSpPr>
-          <p:nvPr/>
-        </p:nvSpPr>
-        <p:spPr>
-          <a:xfrm xmlns:a="http://schemas.openxmlformats.org/drawingml/2006/main">
-            <a:off x="8934450" y="2724150"/>
-            <a:ext cx="1828800" cy="609600"/>
-          </a:xfrm>
-          <a:prstGeom xmlns:a="http://schemas.openxmlformats.org/drawingml/2006/main" prst="rect">
-            <a:avLst/>
-          </a:prstGeom>
-          <a:noFill xmlns:a="http://schemas.openxmlformats.org/drawingml/2006/main"/>
-          <a:ln xmlns:a="http://schemas.openxmlformats.org/drawingml/2006/main" w="0">
-            <a:noFill/>
-            <a:prstDash val="solid"/>
-          </a:ln>
-        </p:spPr>
-        <p:txBody>
-          <a:bodyPr xmlns:a="http://schemas.openxmlformats.org/drawingml/2006/main"/>
-          <a:lstStyle xmlns:a="http://schemas.openxmlformats.org/drawingml/2006/main"/>
-          <a:p xmlns:a="http://schemas.openxmlformats.org/drawingml/2006/main">
-            <a:pPr algn="l">
-              <a:defRPr sz="1350" b="0">
-                <a:solidFill>
-                  <a:srgbClr val="171717"/>
-                </a:solidFill>
-              </a:defRPr>
-            </a:pPr>
-            <a:r>
-              <a:rPr sz="1350" b="0">
-                <a:solidFill>
-                  <a:srgbClr val="171717"/>
-                </a:solidFill>
-              </a:rPr>
-              <a:t>脚本还在，但只有自己看得懂</a:t>
-            </a:r>
-          </a:p>
-        </p:txBody>
-      </p:sp>
-      <p:sp>
-        <p:nvSpPr>
-          <p:cNvPr id="34" name="">
-            <a:extLst xmlns:a="http://schemas.openxmlformats.org/drawingml/2006/main">
-              <a:ext uri="{FF2B5EF4-FFF2-40B4-BE49-F238E27FC236}">
-                <a16:creationId xmlns:a16="http://schemas.microsoft.com/office/drawing/2014/main" id="{E20B4A3B-2471-4ED0-A65A-E2623CDDB263}"/>
-              </a:ext>
-            </a:extLst>
-          </p:cNvPr>
-          <p:cNvSpPr>
-            <a:spLocks xmlns:a="http://schemas.openxmlformats.org/drawingml/2006/main" noGrp="1"/>
-          </p:cNvSpPr>
-          <p:nvPr/>
-        </p:nvSpPr>
-        <p:spPr>
-          <a:xfrm xmlns:a="http://schemas.openxmlformats.org/drawingml/2006/main">
-            <a:off x="8724900" y="3333750"/>
-            <a:ext cx="190500" cy="190500"/>
-          </a:xfrm>
-          <a:prstGeom xmlns:a="http://schemas.openxmlformats.org/drawingml/2006/main" prst="rect">
-            <a:avLst/>
-          </a:prstGeom>
-          <a:noFill xmlns:a="http://schemas.openxmlformats.org/drawingml/2006/main"/>
-          <a:ln xmlns:a="http://schemas.openxmlformats.org/drawingml/2006/main" w="0">
-            <a:noFill/>
-            <a:prstDash val="solid"/>
-          </a:ln>
-        </p:spPr>
-        <p:txBody>
-          <a:bodyPr xmlns:a="http://schemas.openxmlformats.org/drawingml/2006/main"/>
-          <a:lstStyle xmlns:a="http://schemas.openxmlformats.org/drawingml/2006/main"/>
-          <a:p xmlns:a="http://schemas.openxmlformats.org/drawingml/2006/main">
-            <a:pPr algn="l">
-              <a:defRPr sz="1350" b="1">
-                <a:solidFill>
-                  <a:srgbClr val="171717"/>
-                </a:solidFill>
-              </a:defRPr>
-            </a:pPr>
-            <a:r>
-              <a:rPr sz="1350" b="1">
-                <a:solidFill>
-                  <a:srgbClr val="171717"/>
-                </a:solidFill>
-              </a:rPr>
-              <a:t>•</a:t>
-            </a:r>
-          </a:p>
-        </p:txBody>
-      </p:sp>
-      <p:sp>
-        <p:nvSpPr>
-          <p:cNvPr id="35" name="">
-            <a:extLst xmlns:a="http://schemas.openxmlformats.org/drawingml/2006/main">
-              <a:ext uri="{FF2B5EF4-FFF2-40B4-BE49-F238E27FC236}">
-                <a16:creationId xmlns:a16="http://schemas.microsoft.com/office/drawing/2014/main" id="{13DC73A0-95B7-48E7-BBBD-4554D912FC71}"/>
-              </a:ext>
-            </a:extLst>
-          </p:cNvPr>
-          <p:cNvSpPr>
-            <a:spLocks xmlns:a="http://schemas.openxmlformats.org/drawingml/2006/main" noGrp="1"/>
-          </p:cNvSpPr>
-          <p:nvPr/>
-        </p:nvSpPr>
-        <p:spPr>
-          <a:xfrm xmlns:a="http://schemas.openxmlformats.org/drawingml/2006/main">
-            <a:off x="8934450" y="3333750"/>
-            <a:ext cx="1828800" cy="609600"/>
-          </a:xfrm>
-          <a:prstGeom xmlns:a="http://schemas.openxmlformats.org/drawingml/2006/main" prst="rect">
-            <a:avLst/>
-          </a:prstGeom>
-          <a:noFill xmlns:a="http://schemas.openxmlformats.org/drawingml/2006/main"/>
-          <a:ln xmlns:a="http://schemas.openxmlformats.org/drawingml/2006/main" w="0">
-            <a:noFill/>
-            <a:prstDash val="solid"/>
-          </a:ln>
-        </p:spPr>
-        <p:txBody>
-          <a:bodyPr xmlns:a="http://schemas.openxmlformats.org/drawingml/2006/main"/>
-          <a:lstStyle xmlns:a="http://schemas.openxmlformats.org/drawingml/2006/main"/>
-          <a:p xmlns:a="http://schemas.openxmlformats.org/drawingml/2006/main">
-            <a:pPr algn="l">
-              <a:defRPr sz="1350" b="0">
-                <a:solidFill>
-                  <a:srgbClr val="171717"/>
-                </a:solidFill>
-              </a:defRPr>
-            </a:pPr>
-            <a:r>
-              <a:rPr sz="1350" b="0">
-                <a:solidFill>
-                  <a:srgbClr val="171717"/>
-                </a:solidFill>
-              </a:rPr>
-              <a:t>别人接手还是会从头再搓一版</a:t>
-            </a:r>
-          </a:p>
-        </p:txBody>
-      </p:sp>
-      <p:sp>
-        <p:nvSpPr>
-          <p:cNvPr id="36" name="">
-            <a:extLst xmlns:a="http://schemas.openxmlformats.org/drawingml/2006/main">
-              <a:ext uri="{FF2B5EF4-FFF2-40B4-BE49-F238E27FC236}">
-                <a16:creationId xmlns:a16="http://schemas.microsoft.com/office/drawing/2014/main" id="{6B7D51FB-512A-4E55-97A9-2477305517CE}"/>
-              </a:ext>
-            </a:extLst>
-          </p:cNvPr>
-          <p:cNvSpPr>
-            <a:spLocks xmlns:a="http://schemas.openxmlformats.org/drawingml/2006/main" noGrp="1"/>
-          </p:cNvSpPr>
-          <p:nvPr/>
-        </p:nvSpPr>
-        <p:spPr>
-          <a:xfrm xmlns:a="http://schemas.openxmlformats.org/drawingml/2006/main">
-            <a:off x="8724900" y="3943350"/>
-            <a:ext cx="190500" cy="190500"/>
-          </a:xfrm>
-          <a:prstGeom xmlns:a="http://schemas.openxmlformats.org/drawingml/2006/main" prst="rect">
-            <a:avLst/>
-          </a:prstGeom>
-          <a:noFill xmlns:a="http://schemas.openxmlformats.org/drawingml/2006/main"/>
-          <a:ln xmlns:a="http://schemas.openxmlformats.org/drawingml/2006/main" w="0">
-            <a:noFill/>
-            <a:prstDash val="solid"/>
-          </a:ln>
-        </p:spPr>
-        <p:txBody>
-          <a:bodyPr xmlns:a="http://schemas.openxmlformats.org/drawingml/2006/main"/>
-          <a:lstStyle xmlns:a="http://schemas.openxmlformats.org/drawingml/2006/main"/>
-          <a:p xmlns:a="http://schemas.openxmlformats.org/drawingml/2006/main">
-            <a:pPr algn="l">
-              <a:defRPr sz="1350" b="1">
-                <a:solidFill>
-                  <a:srgbClr val="171717"/>
-                </a:solidFill>
-              </a:defRPr>
-            </a:pPr>
-            <a:r>
-              <a:rPr sz="1350" b="1">
-                <a:solidFill>
-                  <a:srgbClr val="171717"/>
-                </a:solidFill>
-              </a:rPr>
-              <a:t>•</a:t>
-            </a:r>
-          </a:p>
-        </p:txBody>
-      </p:sp>
-      <p:sp>
-        <p:nvSpPr>
-          <p:cNvPr id="37" name="">
-            <a:extLst xmlns:a="http://schemas.openxmlformats.org/drawingml/2006/main">
-              <a:ext uri="{FF2B5EF4-FFF2-40B4-BE49-F238E27FC236}">
-                <a16:creationId xmlns:a16="http://schemas.microsoft.com/office/drawing/2014/main" id="{C344B630-9595-4C2E-A49E-407452FB55D9}"/>
-              </a:ext>
-            </a:extLst>
-          </p:cNvPr>
-          <p:cNvSpPr>
-            <a:spLocks xmlns:a="http://schemas.openxmlformats.org/drawingml/2006/main" noGrp="1"/>
-          </p:cNvSpPr>
-          <p:nvPr/>
-        </p:nvSpPr>
-        <p:spPr>
-          <a:xfrm xmlns:a="http://schemas.openxmlformats.org/drawingml/2006/main">
-            <a:off x="8934450" y="3943350"/>
-            <a:ext cx="1828800" cy="609600"/>
-          </a:xfrm>
-          <a:prstGeom xmlns:a="http://schemas.openxmlformats.org/drawingml/2006/main" prst="rect">
-            <a:avLst/>
-          </a:prstGeom>
-          <a:noFill xmlns:a="http://schemas.openxmlformats.org/drawingml/2006/main"/>
-          <a:ln xmlns:a="http://schemas.openxmlformats.org/drawingml/2006/main" w="0">
-            <a:noFill/>
-            <a:prstDash val="solid"/>
-          </a:ln>
-        </p:spPr>
-        <p:txBody>
-          <a:bodyPr xmlns:a="http://schemas.openxmlformats.org/drawingml/2006/main"/>
-          <a:lstStyle xmlns:a="http://schemas.openxmlformats.org/drawingml/2006/main"/>
-          <a:p xmlns:a="http://schemas.openxmlformats.org/drawingml/2006/main">
-            <a:pPr algn="l">
-              <a:defRPr sz="1350" b="0">
-                <a:solidFill>
-                  <a:srgbClr val="171717"/>
-                </a:solidFill>
-              </a:defRPr>
-            </a:pPr>
-            <a:r>
-              <a:rPr sz="1350" b="0">
-                <a:solidFill>
-                  <a:srgbClr val="171717"/>
-                </a:solidFill>
-              </a:rPr>
-              <a:t>agent 下次遇到类似任务，也继续假装第一次见</a:t>
-            </a:r>
-          </a:p>
-        </p:txBody>
-      </p:sp>
-      <p:sp>
-        <p:nvSpPr>
-          <p:cNvPr id="38" name="">
-            <a:extLst xmlns:a="http://schemas.openxmlformats.org/drawingml/2006/main">
-              <a:ext uri="{FF2B5EF4-FFF2-40B4-BE49-F238E27FC236}">
-                <a16:creationId xmlns:a16="http://schemas.microsoft.com/office/drawing/2014/main" id="{229316D8-B495-4D65-919C-435D4D419D8A}"/>
-              </a:ext>
-            </a:extLst>
-          </p:cNvPr>
-          <p:cNvSpPr>
-            <a:spLocks xmlns:a="http://schemas.openxmlformats.org/drawingml/2006/main" noGrp="1"/>
-          </p:cNvSpPr>
-          <p:nvPr/>
-        </p:nvSpPr>
-        <p:spPr>
-          <a:xfrm xmlns:a="http://schemas.openxmlformats.org/drawingml/2006/main">
-            <a:off x="685800" y="5391150"/>
-            <a:ext cx="10001250" cy="266700"/>
-          </a:xfrm>
-          <a:prstGeom xmlns:a="http://schemas.openxmlformats.org/drawingml/2006/main" prst="rect">
-            <a:avLst/>
-          </a:prstGeom>
-          <a:noFill xmlns:a="http://schemas.openxmlformats.org/drawingml/2006/main"/>
-          <a:ln xmlns:a="http://schemas.openxmlformats.org/drawingml/2006/main" w="0">
-            <a:noFill/>
-            <a:prstDash val="solid"/>
-          </a:ln>
-        </p:spPr>
-        <p:txBody>
-          <a:bodyPr xmlns:a="http://schemas.openxmlformats.org/drawingml/2006/main"/>
-          <a:lstStyle xmlns:a="http://schemas.openxmlformats.org/drawingml/2006/main"/>
-          <a:p xmlns:a="http://schemas.openxmlformats.org/drawingml/2006/main">
-            <a:pPr algn="l">
-              <a:defRPr sz="1650" b="1">
-                <a:solidFill>
-                  <a:srgbClr val="C96A1B"/>
-                </a:solidFill>
-              </a:defRPr>
-            </a:pPr>
-            <a:r>
-              <a:rPr sz="1650" b="1">
-                <a:solidFill>
-                  <a:srgbClr val="C96A1B"/>
-                </a:solidFill>
-              </a:rPr>
-              <a:t>所以蒸馏器瞄准的不是“把文档转成 md”，而是“把这套做法留下来”。</a:t>
+        <p:style>
+          <a:lnRef xmlns:a="http://schemas.openxmlformats.org/drawingml/2006/main" idx="0"/>
+          <a:fillRef xmlns:a="http://schemas.openxmlformats.org/drawingml/2006/main" idx="0"/>
+          <a:effectRef xmlns:a="http://schemas.openxmlformats.org/drawingml/2006/main" idx="4"/>
+          <a:fontRef xmlns:a="http://schemas.openxmlformats.org/drawingml/2006/main" idx="major"/>
+        </p:style>
+      </p:sp>
+      <p:sp>
+        <p:nvSpPr>
+          <p:cNvPr id="45" name="">
+            <a:extLst xmlns:a="http://schemas.openxmlformats.org/drawingml/2006/main">
+              <a:ext uri="{FF2B5EF4-FFF2-40B4-BE49-F238E27FC236}">
+                <a16:creationId xmlns:a16="http://schemas.microsoft.com/office/drawing/2014/main" id="{5D82D4BA-8B45-4BA1-A3E3-F9A4EE2F5FC5}"/>
+              </a:ext>
+            </a:extLst>
+          </p:cNvPr>
+          <p:cNvSpPr>
+            <a:spLocks xmlns:a="http://schemas.openxmlformats.org/drawingml/2006/main" noGrp="1"/>
+          </p:cNvSpPr>
+          <p:nvPr/>
+        </p:nvSpPr>
+        <p:spPr>
+          <a:xfrm xmlns:a="http://schemas.openxmlformats.org/drawingml/2006/main">
+            <a:off x="7772400" y="4876800"/>
+            <a:ext cx="2381250" cy="228600"/>
+          </a:xfrm>
+          <a:prstGeom xmlns:a="http://schemas.openxmlformats.org/drawingml/2006/main" prst="rect">
+            <a:avLst/>
+          </a:prstGeom>
+          <a:noFill xmlns:a="http://schemas.openxmlformats.org/drawingml/2006/main"/>
+          <a:ln xmlns:a="http://schemas.openxmlformats.org/drawingml/2006/main" w="0">
+            <a:noFill/>
+            <a:prstDash val="solid"/>
+          </a:ln>
+        </p:spPr>
+        <p:txBody>
+          <a:bodyPr xmlns:a="http://schemas.openxmlformats.org/drawingml/2006/main"/>
+          <a:lstStyle xmlns:a="http://schemas.openxmlformats.org/drawingml/2006/main"/>
+          <a:p xmlns:a="http://schemas.openxmlformats.org/drawingml/2006/main">
+            <a:pPr algn="l">
+              <a:defRPr sz="1500" b="1">
+                <a:solidFill>
+                  <a:srgbClr val="171717"/>
+                </a:solidFill>
+              </a:defRPr>
+            </a:pPr>
+            <a:r>
+              <a:rPr sz="1500" b="1">
+                <a:solidFill>
+                  <a:srgbClr val="171717"/>
+                </a:solidFill>
+              </a:rPr>
+              <a:t>乙：偏极简</a:t>
+            </a:r>
+          </a:p>
+        </p:txBody>
+      </p:sp>
+      <p:sp>
+        <p:nvSpPr>
+          <p:cNvPr id="46" name="">
+            <a:extLst xmlns:a="http://schemas.openxmlformats.org/drawingml/2006/main">
+              <a:ext uri="{FF2B5EF4-FFF2-40B4-BE49-F238E27FC236}">
+                <a16:creationId xmlns:a16="http://schemas.microsoft.com/office/drawing/2014/main" id="{3F3B2060-8B74-4A1A-BBF7-E45CCC76DDBF}"/>
+              </a:ext>
+            </a:extLst>
+          </p:cNvPr>
+          <p:cNvSpPr>
+            <a:spLocks xmlns:a="http://schemas.openxmlformats.org/drawingml/2006/main" noGrp="1"/>
+          </p:cNvSpPr>
+          <p:nvPr/>
+        </p:nvSpPr>
+        <p:spPr>
+          <a:xfrm xmlns:a="http://schemas.openxmlformats.org/drawingml/2006/main">
+            <a:off x="7772400" y="5219700"/>
+            <a:ext cx="2857500" cy="323850"/>
+          </a:xfrm>
+          <a:prstGeom xmlns:a="http://schemas.openxmlformats.org/drawingml/2006/main" prst="rect">
+            <a:avLst/>
+          </a:prstGeom>
+          <a:noFill xmlns:a="http://schemas.openxmlformats.org/drawingml/2006/main"/>
+          <a:ln xmlns:a="http://schemas.openxmlformats.org/drawingml/2006/main" w="0">
+            <a:noFill/>
+            <a:prstDash val="solid"/>
+          </a:ln>
+        </p:spPr>
+        <p:txBody>
+          <a:bodyPr xmlns:a="http://schemas.openxmlformats.org/drawingml/2006/main"/>
+          <a:lstStyle xmlns:a="http://schemas.openxmlformats.org/drawingml/2006/main"/>
+          <a:p xmlns:a="http://schemas.openxmlformats.org/drawingml/2006/main">
+            <a:pPr algn="l">
+              <a:defRPr sz="1200" b="0">
+                <a:solidFill>
+                  <a:srgbClr val="57534E"/>
+                </a:solidFill>
+              </a:defRPr>
+            </a:pPr>
+            <a:r>
+              <a:rPr sz="1200" b="0">
+                <a:solidFill>
+                  <a:srgbClr val="57534E"/>
+                </a:solidFill>
+              </a:rPr>
+              <a:t>收到后，按他的知识库长成清单、面板或 agent。</a:t>
             </a:r>
           </a:p>
         </p:txBody>
@@ -4143,7 +4516,7 @@
     </p:spTree>
     <p:extLst>
       <p:ext uri="{BB962C8B-B14F-4D97-AF65-F5344CB8AC3E}">
-        <p14:creationId xmlns:p14="http://schemas.microsoft.com/office/powerpoint/2010/main" val="1669761123"/>
+        <p14:creationId xmlns:p14="http://schemas.microsoft.com/office/powerpoint/2010/main" val="647498743"/>
       </p:ext>
     </p:extLst>
   </p:cSld>
@@ -4174,7 +4547,7 @@
           <p:cNvPr id="1" name="">
             <a:extLst xmlns:a="http://schemas.openxmlformats.org/drawingml/2006/main">
               <a:ext uri="{FF2B5EF4-FFF2-40B4-BE49-F238E27FC236}">
-                <a16:creationId xmlns:a16="http://schemas.microsoft.com/office/drawing/2014/main" id="{16B2C08B-B042-4836-9AF9-DA9B76DA1043}"/>
+                <a16:creationId xmlns:a16="http://schemas.microsoft.com/office/drawing/2014/main" id="{EFC7C144-6E55-48F1-BE49-51F431BB5E8E}"/>
               </a:ext>
             </a:extLst>
           </p:cNvPr>
@@ -4207,7 +4580,7 @@
           <p:cNvPr id="2" name="">
             <a:extLst xmlns:a="http://schemas.openxmlformats.org/drawingml/2006/main">
               <a:ext uri="{FF2B5EF4-FFF2-40B4-BE49-F238E27FC236}">
-                <a16:creationId xmlns:a16="http://schemas.microsoft.com/office/drawing/2014/main" id="{1A1FFC79-1DB1-4D5E-84F3-EFD4E6AA62CB}"/>
+                <a16:creationId xmlns:a16="http://schemas.microsoft.com/office/drawing/2014/main" id="{A947B2FE-7726-47B8-BA24-A8611B65AFD6}"/>
               </a:ext>
             </a:extLst>
           </p:cNvPr>
@@ -4240,7 +4613,7 @@
           <p:cNvPr id="3" name="">
             <a:extLst xmlns:a="http://schemas.openxmlformats.org/drawingml/2006/main">
               <a:ext uri="{FF2B5EF4-FFF2-40B4-BE49-F238E27FC236}">
-                <a16:creationId xmlns:a16="http://schemas.microsoft.com/office/drawing/2014/main" id="{CADDF8CF-0FC6-4D0C-8981-AC3E9980C8F9}"/>
+                <a16:creationId xmlns:a16="http://schemas.microsoft.com/office/drawing/2014/main" id="{84C7ED90-7254-4328-89ED-40FF03B1F158}"/>
               </a:ext>
             </a:extLst>
           </p:cNvPr>
@@ -4273,7 +4646,7 @@
           <p:cNvPr id="4" name="">
             <a:extLst xmlns:a="http://schemas.openxmlformats.org/drawingml/2006/main">
               <a:ext uri="{FF2B5EF4-FFF2-40B4-BE49-F238E27FC236}">
-                <a16:creationId xmlns:a16="http://schemas.microsoft.com/office/drawing/2014/main" id="{F99F61C6-7B4E-4CFC-B850-B0307FFE29DC}"/>
+                <a16:creationId xmlns:a16="http://schemas.microsoft.com/office/drawing/2014/main" id="{03277DC7-289B-4D7A-B7AE-B29004E30A2D}"/>
               </a:ext>
             </a:extLst>
           </p:cNvPr>
@@ -4323,7 +4696,7 @@
           <p:cNvPr id="5" name="">
             <a:extLst xmlns:a="http://schemas.openxmlformats.org/drawingml/2006/main">
               <a:ext uri="{FF2B5EF4-FFF2-40B4-BE49-F238E27FC236}">
-                <a16:creationId xmlns:a16="http://schemas.microsoft.com/office/drawing/2014/main" id="{25134C01-4D5D-4BAD-87F5-6B979FB94663}"/>
+                <a16:creationId xmlns:a16="http://schemas.microsoft.com/office/drawing/2014/main" id="{D51A123A-53FF-4371-AF25-B2C587128789}"/>
               </a:ext>
             </a:extLst>
           </p:cNvPr>
@@ -4373,7 +4746,7 @@
           <p:cNvPr id="6" name="">
             <a:extLst xmlns:a="http://schemas.openxmlformats.org/drawingml/2006/main">
               <a:ext uri="{FF2B5EF4-FFF2-40B4-BE49-F238E27FC236}">
-                <a16:creationId xmlns:a16="http://schemas.microsoft.com/office/drawing/2014/main" id="{61793BD0-2149-4F7D-91CA-F9B2B89C13DD}"/>
+                <a16:creationId xmlns:a16="http://schemas.microsoft.com/office/drawing/2014/main" id="{A898E2F7-9FE5-4B52-BBB6-DA50C57644F1}"/>
               </a:ext>
             </a:extLst>
           </p:cNvPr>
@@ -4413,7 +4786,7 @@
                   <a:srgbClr val="171717"/>
                 </a:solidFill>
               </a:rPr>
-              <a:t>拿 doc2md 来看，年轮其实是看得见的</a:t>
+              <a:t>doc2md 这个杂活，正好能看到它怎么长出来</a:t>
             </a:r>
           </a:p>
         </p:txBody>
@@ -4423,7 +4796,7 @@
           <p:cNvPr id="7" name="">
             <a:extLst xmlns:a="http://schemas.openxmlformats.org/drawingml/2006/main">
               <a:ext uri="{FF2B5EF4-FFF2-40B4-BE49-F238E27FC236}">
-                <a16:creationId xmlns:a16="http://schemas.microsoft.com/office/drawing/2014/main" id="{3694CB04-F69F-4A9D-B4A8-5C73EC3A242D}"/>
+                <a16:creationId xmlns:a16="http://schemas.microsoft.com/office/drawing/2014/main" id="{79D5FD69-B0D7-44CE-ACC5-94AF9117268E}"/>
               </a:ext>
             </a:extLst>
           </p:cNvPr>
@@ -4463,7 +4836,7 @@
                   <a:srgbClr val="57534E"/>
                 </a:solidFill>
               </a:rPr>
-              <a:t>不是抽象“迭代”，而是代码里真实长出来的分支、repair、fallback 和 shared step。</a:t>
+              <a:t>任务现场 -&gt; 手搓修法 -&gt; 代码年轮。蒸馏器想保住的，是后面两件事。</a:t>
             </a:r>
           </a:p>
         </p:txBody>
@@ -4473,214 +4846,23 @@
           <p:cNvPr id="8" name="">
             <a:extLst xmlns:a="http://schemas.openxmlformats.org/drawingml/2006/main">
               <a:ext uri="{FF2B5EF4-FFF2-40B4-BE49-F238E27FC236}">
-                <a16:creationId xmlns:a16="http://schemas.microsoft.com/office/drawing/2014/main" id="{2E8C942D-E9D5-4F24-9893-615491C4EFF3}"/>
-              </a:ext>
-            </a:extLst>
-          </p:cNvPr>
-          <p:cNvSpPr>
-            <a:spLocks xmlns:a="http://schemas.openxmlformats.org/drawingml/2006/main" noGrp="1"/>
-          </p:cNvSpPr>
-          <p:nvPr/>
-        </p:nvSpPr>
-        <p:spPr>
-          <a:xfrm xmlns:a="http://schemas.openxmlformats.org/drawingml/2006/main">
-            <a:off x="685800" y="1619250"/>
-            <a:ext cx="10820400" cy="800100"/>
+                <a16:creationId xmlns:a16="http://schemas.microsoft.com/office/drawing/2014/main" id="{AA1FB9D0-12F1-40DF-8352-76AB2854A315}"/>
+              </a:ext>
+            </a:extLst>
+          </p:cNvPr>
+          <p:cNvSpPr>
+            <a:spLocks xmlns:a="http://schemas.openxmlformats.org/drawingml/2006/main" noGrp="1"/>
+          </p:cNvSpPr>
+          <p:nvPr/>
+        </p:nvSpPr>
+        <p:spPr>
+          <a:xfrm xmlns:a="http://schemas.openxmlformats.org/drawingml/2006/main">
+            <a:off x="685800" y="1790700"/>
+            <a:ext cx="3028950" cy="1562100"/>
           </a:xfrm>
           <a:prstGeom xmlns:a="http://schemas.openxmlformats.org/drawingml/2006/main" prst="roundRect">
             <a:avLst>
-              <a:gd name="adj" fmla="val 28571"/>
-            </a:avLst>
-          </a:prstGeom>
-          <a:solidFill xmlns:a="http://schemas.openxmlformats.org/drawingml/2006/main">
-            <a:srgbClr val="24211D"/>
-          </a:solidFill>
-          <a:ln xmlns:a="http://schemas.openxmlformats.org/drawingml/2006/main" w="0">
-            <a:solidFill>
-              <a:srgbClr val="24211D"/>
-            </a:solidFill>
-            <a:prstDash val="solid"/>
-          </a:ln>
-        </p:spPr>
-        <p:style>
-          <a:lnRef xmlns:a="http://schemas.openxmlformats.org/drawingml/2006/main" idx="0"/>
-          <a:fillRef xmlns:a="http://schemas.openxmlformats.org/drawingml/2006/main" idx="0"/>
-          <a:effectRef xmlns:a="http://schemas.openxmlformats.org/drawingml/2006/main" idx="6"/>
-          <a:fontRef xmlns:a="http://schemas.openxmlformats.org/drawingml/2006/main" idx="major"/>
-        </p:style>
-      </p:sp>
-      <p:sp>
-        <p:nvSpPr>
-          <p:cNvPr id="9" name="">
-            <a:extLst xmlns:a="http://schemas.openxmlformats.org/drawingml/2006/main">
-              <a:ext uri="{FF2B5EF4-FFF2-40B4-BE49-F238E27FC236}">
-                <a16:creationId xmlns:a16="http://schemas.microsoft.com/office/drawing/2014/main" id="{0F0FD32C-C63D-4F5B-92B7-CD399B51FA83}"/>
-              </a:ext>
-            </a:extLst>
-          </p:cNvPr>
-          <p:cNvSpPr>
-            <a:spLocks xmlns:a="http://schemas.openxmlformats.org/drawingml/2006/main" noGrp="1"/>
-          </p:cNvSpPr>
-          <p:nvPr/>
-        </p:nvSpPr>
-        <p:spPr>
-          <a:xfrm xmlns:a="http://schemas.openxmlformats.org/drawingml/2006/main">
-            <a:off x="990600" y="1771650"/>
-            <a:ext cx="2667000" cy="247650"/>
-          </a:xfrm>
-          <a:prstGeom xmlns:a="http://schemas.openxmlformats.org/drawingml/2006/main" prst="rect">
-            <a:avLst/>
-          </a:prstGeom>
-          <a:noFill xmlns:a="http://schemas.openxmlformats.org/drawingml/2006/main"/>
-          <a:ln xmlns:a="http://schemas.openxmlformats.org/drawingml/2006/main" w="0">
-            <a:noFill/>
-            <a:prstDash val="solid"/>
-          </a:ln>
-        </p:spPr>
-        <p:txBody>
-          <a:bodyPr xmlns:a="http://schemas.openxmlformats.org/drawingml/2006/main"/>
-          <a:lstStyle xmlns:a="http://schemas.openxmlformats.org/drawingml/2006/main"/>
-          <a:p xmlns:a="http://schemas.openxmlformats.org/drawingml/2006/main">
-            <a:pPr algn="l">
-              <a:defRPr sz="1725" b="1">
-                <a:solidFill>
-                  <a:srgbClr val="FFFFFF"/>
-                </a:solidFill>
-              </a:defRPr>
-            </a:pPr>
-            <a:r>
-              <a:rPr sz="1725" b="1">
-                <a:solidFill>
-                  <a:srgbClr val="FFFFFF"/>
-                </a:solidFill>
-              </a:rPr>
-              <a:t>doc2md = 一个目的：</a:t>
-            </a:r>
-          </a:p>
-        </p:txBody>
-      </p:sp>
-      <p:sp>
-        <p:nvSpPr>
-          <p:cNvPr id="10" name="">
-            <a:extLst xmlns:a="http://schemas.openxmlformats.org/drawingml/2006/main">
-              <a:ext uri="{FF2B5EF4-FFF2-40B4-BE49-F238E27FC236}">
-                <a16:creationId xmlns:a16="http://schemas.microsoft.com/office/drawing/2014/main" id="{00F7ED7C-6484-49D7-AE56-942730463EA3}"/>
-              </a:ext>
-            </a:extLst>
-          </p:cNvPr>
-          <p:cNvSpPr>
-            <a:spLocks xmlns:a="http://schemas.openxmlformats.org/drawingml/2006/main" noGrp="1"/>
-          </p:cNvSpPr>
-          <p:nvPr/>
-        </p:nvSpPr>
-        <p:spPr>
-          <a:xfrm xmlns:a="http://schemas.openxmlformats.org/drawingml/2006/main">
-            <a:off x="990600" y="2038350"/>
-            <a:ext cx="3429000" cy="285750"/>
-          </a:xfrm>
-          <a:prstGeom xmlns:a="http://schemas.openxmlformats.org/drawingml/2006/main" prst="rect">
-            <a:avLst/>
-          </a:prstGeom>
-          <a:noFill xmlns:a="http://schemas.openxmlformats.org/drawingml/2006/main"/>
-          <a:ln xmlns:a="http://schemas.openxmlformats.org/drawingml/2006/main" w="0">
-            <a:noFill/>
-            <a:prstDash val="solid"/>
-          </a:ln>
-        </p:spPr>
-        <p:txBody>
-          <a:bodyPr xmlns:a="http://schemas.openxmlformats.org/drawingml/2006/main"/>
-          <a:lstStyle xmlns:a="http://schemas.openxmlformats.org/drawingml/2006/main"/>
-          <a:p xmlns:a="http://schemas.openxmlformats.org/drawingml/2006/main">
-            <a:pPr algn="l">
-              <a:defRPr sz="1725" b="1">
-                <a:solidFill>
-                  <a:srgbClr val="FFFFFF"/>
-                </a:solidFill>
-              </a:defRPr>
-            </a:pPr>
-            <a:r>
-              <a:rPr sz="1725" b="1">
-                <a:solidFill>
-                  <a:srgbClr val="FFFFFF"/>
-                </a:solidFill>
-              </a:rPr>
-              <a:t>任意文档 -&gt; Markdown</a:t>
-            </a:r>
-          </a:p>
-        </p:txBody>
-      </p:sp>
-      <p:sp>
-        <p:nvSpPr>
-          <p:cNvPr id="11" name="">
-            <a:extLst xmlns:a="http://schemas.openxmlformats.org/drawingml/2006/main">
-              <a:ext uri="{FF2B5EF4-FFF2-40B4-BE49-F238E27FC236}">
-                <a16:creationId xmlns:a16="http://schemas.microsoft.com/office/drawing/2014/main" id="{1ACE42C8-AC1B-4CF7-82AD-8849B66F3009}"/>
-              </a:ext>
-            </a:extLst>
-          </p:cNvPr>
-          <p:cNvSpPr>
-            <a:spLocks xmlns:a="http://schemas.openxmlformats.org/drawingml/2006/main" noGrp="1"/>
-          </p:cNvSpPr>
-          <p:nvPr/>
-        </p:nvSpPr>
-        <p:spPr>
-          <a:xfrm xmlns:a="http://schemas.openxmlformats.org/drawingml/2006/main">
-            <a:off x="4495800" y="1962150"/>
-            <a:ext cx="5905500" cy="228600"/>
-          </a:xfrm>
-          <a:prstGeom xmlns:a="http://schemas.openxmlformats.org/drawingml/2006/main" prst="rect">
-            <a:avLst/>
-          </a:prstGeom>
-          <a:noFill xmlns:a="http://schemas.openxmlformats.org/drawingml/2006/main"/>
-          <a:ln xmlns:a="http://schemas.openxmlformats.org/drawingml/2006/main" w="0">
-            <a:noFill/>
-            <a:prstDash val="solid"/>
-          </a:ln>
-        </p:spPr>
-        <p:txBody>
-          <a:bodyPr xmlns:a="http://schemas.openxmlformats.org/drawingml/2006/main"/>
-          <a:lstStyle xmlns:a="http://schemas.openxmlformats.org/drawingml/2006/main"/>
-          <a:p xmlns:a="http://schemas.openxmlformats.org/drawingml/2006/main">
-            <a:pPr algn="l">
-              <a:defRPr sz="1200" b="0">
-                <a:solidFill>
-                  <a:srgbClr val="E7E5E4"/>
-                </a:solidFill>
-              </a:defRPr>
-            </a:pPr>
-            <a:r>
-              <a:rPr sz="1200" b="0">
-                <a:solidFill>
-                  <a:srgbClr val="E7E5E4"/>
-                </a:solidFill>
-              </a:rPr>
-              <a:t>所以 pdf / docx / xlsx / pptx 不该拆成五个小工具，而是同一目的下不断长出来的几圈年轮。</a:t>
-            </a:r>
-          </a:p>
-        </p:txBody>
-      </p:sp>
-      <p:sp>
-        <p:nvSpPr>
-          <p:cNvPr id="12" name="">
-            <a:extLst xmlns:a="http://schemas.openxmlformats.org/drawingml/2006/main">
-              <a:ext uri="{FF2B5EF4-FFF2-40B4-BE49-F238E27FC236}">
-                <a16:creationId xmlns:a16="http://schemas.microsoft.com/office/drawing/2014/main" id="{F99B0EDB-216D-49AA-9605-71A6D13096A1}"/>
-              </a:ext>
-            </a:extLst>
-          </p:cNvPr>
-          <p:cNvSpPr>
-            <a:spLocks xmlns:a="http://schemas.openxmlformats.org/drawingml/2006/main" noGrp="1"/>
-          </p:cNvSpPr>
-          <p:nvPr/>
-        </p:nvSpPr>
-        <p:spPr>
-          <a:xfrm xmlns:a="http://schemas.openxmlformats.org/drawingml/2006/main">
-            <a:off x="685800" y="2724150"/>
-            <a:ext cx="2362200" cy="1866900"/>
-          </a:xfrm>
-          <a:prstGeom xmlns:a="http://schemas.openxmlformats.org/drawingml/2006/main" prst="roundRect">
-            <a:avLst>
-              <a:gd name="adj" fmla="val 12245"/>
+              <a:gd name="adj" fmla="val 14634"/>
             </a:avLst>
           </a:prstGeom>
           <a:solidFill xmlns:a="http://schemas.openxmlformats.org/drawingml/2006/main">
@@ -4702,22 +4884,22 @@
       </p:sp>
       <p:sp>
         <p:nvSpPr>
-          <p:cNvPr id="13" name="">
-            <a:extLst xmlns:a="http://schemas.openxmlformats.org/drawingml/2006/main">
-              <a:ext uri="{FF2B5EF4-FFF2-40B4-BE49-F238E27FC236}">
-                <a16:creationId xmlns:a16="http://schemas.microsoft.com/office/drawing/2014/main" id="{ECA5D1D0-015B-472C-A1EC-7646C91D5EF9}"/>
-              </a:ext>
-            </a:extLst>
-          </p:cNvPr>
-          <p:cNvSpPr>
-            <a:spLocks xmlns:a="http://schemas.openxmlformats.org/drawingml/2006/main" noGrp="1"/>
-          </p:cNvSpPr>
-          <p:nvPr/>
-        </p:nvSpPr>
-        <p:spPr>
-          <a:xfrm xmlns:a="http://schemas.openxmlformats.org/drawingml/2006/main">
-            <a:off x="876300" y="2914650"/>
-            <a:ext cx="723900" cy="323850"/>
+          <p:cNvPr id="9" name="">
+            <a:extLst xmlns:a="http://schemas.openxmlformats.org/drawingml/2006/main">
+              <a:ext uri="{FF2B5EF4-FFF2-40B4-BE49-F238E27FC236}">
+                <a16:creationId xmlns:a16="http://schemas.microsoft.com/office/drawing/2014/main" id="{E51FF4A3-8D8B-4A7B-85F2-2272B8255603}"/>
+              </a:ext>
+            </a:extLst>
+          </p:cNvPr>
+          <p:cNvSpPr>
+            <a:spLocks xmlns:a="http://schemas.openxmlformats.org/drawingml/2006/main" noGrp="1"/>
+          </p:cNvSpPr>
+          <p:nvPr/>
+        </p:nvSpPr>
+        <p:spPr>
+          <a:xfrm xmlns:a="http://schemas.openxmlformats.org/drawingml/2006/main">
+            <a:off x="914400" y="1981200"/>
+            <a:ext cx="781050" cy="323850"/>
           </a:xfrm>
           <a:prstGeom xmlns:a="http://schemas.openxmlformats.org/drawingml/2006/main" prst="roundRect">
             <a:avLst>
@@ -4725,11 +4907,11 @@
             </a:avLst>
           </a:prstGeom>
           <a:solidFill xmlns:a="http://schemas.openxmlformats.org/drawingml/2006/main">
-            <a:srgbClr val="FFFDF8"/>
+            <a:srgbClr val="DDEFEA"/>
           </a:solidFill>
           <a:ln xmlns:a="http://schemas.openxmlformats.org/drawingml/2006/main" w="0">
             <a:solidFill>
-              <a:srgbClr val="FFFDF8"/>
+              <a:srgbClr val="DDEFEA"/>
             </a:solidFill>
             <a:prstDash val="solid"/>
           </a:ln>
@@ -4737,50 +4919,250 @@
       </p:sp>
       <p:sp>
         <p:nvSpPr>
+          <p:cNvPr id="10" name="">
+            <a:extLst xmlns:a="http://schemas.openxmlformats.org/drawingml/2006/main">
+              <a:ext uri="{FF2B5EF4-FFF2-40B4-BE49-F238E27FC236}">
+                <a16:creationId xmlns:a16="http://schemas.microsoft.com/office/drawing/2014/main" id="{328CC516-950E-46B3-A0DD-997859BCC2AC}"/>
+              </a:ext>
+            </a:extLst>
+          </p:cNvPr>
+          <p:cNvSpPr>
+            <a:spLocks xmlns:a="http://schemas.openxmlformats.org/drawingml/2006/main" noGrp="1"/>
+          </p:cNvSpPr>
+          <p:nvPr/>
+        </p:nvSpPr>
+        <p:spPr>
+          <a:xfrm xmlns:a="http://schemas.openxmlformats.org/drawingml/2006/main">
+            <a:off x="1047750" y="2057400"/>
+            <a:ext cx="514350" cy="171450"/>
+          </a:xfrm>
+          <a:prstGeom xmlns:a="http://schemas.openxmlformats.org/drawingml/2006/main" prst="rect">
+            <a:avLst/>
+          </a:prstGeom>
+          <a:noFill xmlns:a="http://schemas.openxmlformats.org/drawingml/2006/main"/>
+          <a:ln xmlns:a="http://schemas.openxmlformats.org/drawingml/2006/main" w="0">
+            <a:noFill/>
+            <a:prstDash val="solid"/>
+          </a:ln>
+        </p:spPr>
+        <p:txBody>
+          <a:bodyPr xmlns:a="http://schemas.openxmlformats.org/drawingml/2006/main"/>
+          <a:lstStyle xmlns:a="http://schemas.openxmlformats.org/drawingml/2006/main"/>
+          <a:p xmlns:a="http://schemas.openxmlformats.org/drawingml/2006/main">
+            <a:pPr algn="l">
+              <a:defRPr sz="900" b="1">
+                <a:solidFill>
+                  <a:srgbClr val="0F766E"/>
+                </a:solidFill>
+              </a:defRPr>
+            </a:pPr>
+            <a:r>
+              <a:rPr sz="900" b="1">
+                <a:solidFill>
+                  <a:srgbClr val="0F766E"/>
+                </a:solidFill>
+              </a:rPr>
+              <a:t>任务现场</a:t>
+            </a:r>
+          </a:p>
+        </p:txBody>
+      </p:sp>
+      <p:sp>
+        <p:nvSpPr>
+          <p:cNvPr id="11" name="">
+            <a:extLst xmlns:a="http://schemas.openxmlformats.org/drawingml/2006/main">
+              <a:ext uri="{FF2B5EF4-FFF2-40B4-BE49-F238E27FC236}">
+                <a16:creationId xmlns:a16="http://schemas.microsoft.com/office/drawing/2014/main" id="{1FAA0D45-C485-44A4-82AC-C45A2953E792}"/>
+              </a:ext>
+            </a:extLst>
+          </p:cNvPr>
+          <p:cNvSpPr>
+            <a:spLocks xmlns:a="http://schemas.openxmlformats.org/drawingml/2006/main" noGrp="1"/>
+          </p:cNvSpPr>
+          <p:nvPr/>
+        </p:nvSpPr>
+        <p:spPr>
+          <a:xfrm xmlns:a="http://schemas.openxmlformats.org/drawingml/2006/main">
+            <a:off x="914400" y="2362200"/>
+            <a:ext cx="1905000" cy="285750"/>
+          </a:xfrm>
+          <a:prstGeom xmlns:a="http://schemas.openxmlformats.org/drawingml/2006/main" prst="rect">
+            <a:avLst/>
+          </a:prstGeom>
+          <a:noFill xmlns:a="http://schemas.openxmlformats.org/drawingml/2006/main"/>
+          <a:ln xmlns:a="http://schemas.openxmlformats.org/drawingml/2006/main" w="0">
+            <a:noFill/>
+            <a:prstDash val="solid"/>
+          </a:ln>
+        </p:spPr>
+        <p:txBody>
+          <a:bodyPr xmlns:a="http://schemas.openxmlformats.org/drawingml/2006/main"/>
+          <a:lstStyle xmlns:a="http://schemas.openxmlformats.org/drawingml/2006/main"/>
+          <a:p xmlns:a="http://schemas.openxmlformats.org/drawingml/2006/main">
+            <a:pPr algn="l">
+              <a:defRPr sz="1875" b="1">
+                <a:solidFill>
+                  <a:srgbClr val="171717"/>
+                </a:solidFill>
+              </a:defRPr>
+            </a:pPr>
+            <a:r>
+              <a:rPr sz="1875" b="1">
+                <a:solidFill>
+                  <a:srgbClr val="171717"/>
+                </a:solidFill>
+              </a:rPr>
+              <a:t>新人接手资料包</a:t>
+            </a:r>
+          </a:p>
+        </p:txBody>
+      </p:sp>
+      <p:sp>
+        <p:nvSpPr>
+          <p:cNvPr id="12" name="">
+            <a:extLst xmlns:a="http://schemas.openxmlformats.org/drawingml/2006/main">
+              <a:ext uri="{FF2B5EF4-FFF2-40B4-BE49-F238E27FC236}">
+                <a16:creationId xmlns:a16="http://schemas.microsoft.com/office/drawing/2014/main" id="{03E6F87D-0FAE-4AEE-95A2-4A2B602FACDA}"/>
+              </a:ext>
+            </a:extLst>
+          </p:cNvPr>
+          <p:cNvSpPr>
+            <a:spLocks xmlns:a="http://schemas.openxmlformats.org/drawingml/2006/main" noGrp="1"/>
+          </p:cNvSpPr>
+          <p:nvPr/>
+        </p:nvSpPr>
+        <p:spPr>
+          <a:xfrm xmlns:a="http://schemas.openxmlformats.org/drawingml/2006/main">
+            <a:off x="914400" y="2876550"/>
+            <a:ext cx="190500" cy="190500"/>
+          </a:xfrm>
+          <a:prstGeom xmlns:a="http://schemas.openxmlformats.org/drawingml/2006/main" prst="rect">
+            <a:avLst/>
+          </a:prstGeom>
+          <a:noFill xmlns:a="http://schemas.openxmlformats.org/drawingml/2006/main"/>
+          <a:ln xmlns:a="http://schemas.openxmlformats.org/drawingml/2006/main" w="0">
+            <a:noFill/>
+            <a:prstDash val="solid"/>
+          </a:ln>
+        </p:spPr>
+        <p:txBody>
+          <a:bodyPr xmlns:a="http://schemas.openxmlformats.org/drawingml/2006/main"/>
+          <a:lstStyle xmlns:a="http://schemas.openxmlformats.org/drawingml/2006/main"/>
+          <a:p xmlns:a="http://schemas.openxmlformats.org/drawingml/2006/main">
+            <a:pPr algn="l">
+              <a:defRPr sz="1125" b="1">
+                <a:solidFill>
+                  <a:srgbClr val="171717"/>
+                </a:solidFill>
+              </a:defRPr>
+            </a:pPr>
+            <a:r>
+              <a:rPr sz="1125" b="1">
+                <a:solidFill>
+                  <a:srgbClr val="171717"/>
+                </a:solidFill>
+              </a:rPr>
+              <a:t>•</a:t>
+            </a:r>
+          </a:p>
+        </p:txBody>
+      </p:sp>
+      <p:sp>
+        <p:nvSpPr>
+          <p:cNvPr id="13" name="">
+            <a:extLst xmlns:a="http://schemas.openxmlformats.org/drawingml/2006/main">
+              <a:ext uri="{FF2B5EF4-FFF2-40B4-BE49-F238E27FC236}">
+                <a16:creationId xmlns:a16="http://schemas.microsoft.com/office/drawing/2014/main" id="{5ED248FF-FFAB-4474-A3A3-F5CCBB71893D}"/>
+              </a:ext>
+            </a:extLst>
+          </p:cNvPr>
+          <p:cNvSpPr>
+            <a:spLocks xmlns:a="http://schemas.openxmlformats.org/drawingml/2006/main" noGrp="1"/>
+          </p:cNvSpPr>
+          <p:nvPr/>
+        </p:nvSpPr>
+        <p:spPr>
+          <a:xfrm xmlns:a="http://schemas.openxmlformats.org/drawingml/2006/main">
+            <a:off x="1123950" y="2876550"/>
+            <a:ext cx="2038350" cy="285750"/>
+          </a:xfrm>
+          <a:prstGeom xmlns:a="http://schemas.openxmlformats.org/drawingml/2006/main" prst="rect">
+            <a:avLst/>
+          </a:prstGeom>
+          <a:noFill xmlns:a="http://schemas.openxmlformats.org/drawingml/2006/main"/>
+          <a:ln xmlns:a="http://schemas.openxmlformats.org/drawingml/2006/main" w="0">
+            <a:noFill/>
+            <a:prstDash val="solid"/>
+          </a:ln>
+        </p:spPr>
+        <p:txBody>
+          <a:bodyPr xmlns:a="http://schemas.openxmlformats.org/drawingml/2006/main"/>
+          <a:lstStyle xmlns:a="http://schemas.openxmlformats.org/drawingml/2006/main"/>
+          <a:p xmlns:a="http://schemas.openxmlformats.org/drawingml/2006/main">
+            <a:pPr algn="l">
+              <a:defRPr sz="1125" b="0">
+                <a:solidFill>
+                  <a:srgbClr val="171717"/>
+                </a:solidFill>
+              </a:defRPr>
+            </a:pPr>
+            <a:r>
+              <a:rPr sz="1125" b="0">
+                <a:solidFill>
+                  <a:srgbClr val="171717"/>
+                </a:solidFill>
+              </a:rPr>
+              <a:t>pdf、docx、xlsx 混在一起</a:t>
+            </a:r>
+          </a:p>
+        </p:txBody>
+      </p:sp>
+      <p:sp>
+        <p:nvSpPr>
           <p:cNvPr id="14" name="">
             <a:extLst xmlns:a="http://schemas.openxmlformats.org/drawingml/2006/main">
               <a:ext uri="{FF2B5EF4-FFF2-40B4-BE49-F238E27FC236}">
-                <a16:creationId xmlns:a16="http://schemas.microsoft.com/office/drawing/2014/main" id="{DE8511DF-ECEC-4C4A-A1A2-7B8A534CC4F6}"/>
-              </a:ext>
-            </a:extLst>
-          </p:cNvPr>
-          <p:cNvSpPr>
-            <a:spLocks xmlns:a="http://schemas.openxmlformats.org/drawingml/2006/main" noGrp="1"/>
-          </p:cNvSpPr>
-          <p:nvPr/>
-        </p:nvSpPr>
-        <p:spPr>
-          <a:xfrm xmlns:a="http://schemas.openxmlformats.org/drawingml/2006/main">
-            <a:off x="1009650" y="2990850"/>
-            <a:ext cx="457200" cy="171450"/>
-          </a:xfrm>
-          <a:prstGeom xmlns:a="http://schemas.openxmlformats.org/drawingml/2006/main" prst="rect">
-            <a:avLst/>
-          </a:prstGeom>
-          <a:noFill xmlns:a="http://schemas.openxmlformats.org/drawingml/2006/main"/>
-          <a:ln xmlns:a="http://schemas.openxmlformats.org/drawingml/2006/main" w="0">
-            <a:noFill/>
-            <a:prstDash val="solid"/>
-          </a:ln>
-        </p:spPr>
-        <p:txBody>
-          <a:bodyPr xmlns:a="http://schemas.openxmlformats.org/drawingml/2006/main"/>
-          <a:lstStyle xmlns:a="http://schemas.openxmlformats.org/drawingml/2006/main"/>
-          <a:p xmlns:a="http://schemas.openxmlformats.org/drawingml/2006/main">
-            <a:pPr algn="l">
-              <a:defRPr sz="900" b="1">
-                <a:solidFill>
-                  <a:srgbClr val="57534E"/>
-                </a:solidFill>
-              </a:defRPr>
-            </a:pPr>
-            <a:r>
-              <a:rPr sz="900" b="1">
-                <a:solidFill>
-                  <a:srgbClr val="57534E"/>
-                </a:solidFill>
-              </a:rPr>
-              <a:t>第 1 圈</a:t>
+                <a16:creationId xmlns:a16="http://schemas.microsoft.com/office/drawing/2014/main" id="{0FCA239F-29C2-4CED-BD65-4CB7B5C038AE}"/>
+              </a:ext>
+            </a:extLst>
+          </p:cNvPr>
+          <p:cNvSpPr>
+            <a:spLocks xmlns:a="http://schemas.openxmlformats.org/drawingml/2006/main" noGrp="1"/>
+          </p:cNvSpPr>
+          <p:nvPr/>
+        </p:nvSpPr>
+        <p:spPr>
+          <a:xfrm xmlns:a="http://schemas.openxmlformats.org/drawingml/2006/main">
+            <a:off x="914400" y="3162300"/>
+            <a:ext cx="190500" cy="190500"/>
+          </a:xfrm>
+          <a:prstGeom xmlns:a="http://schemas.openxmlformats.org/drawingml/2006/main" prst="rect">
+            <a:avLst/>
+          </a:prstGeom>
+          <a:noFill xmlns:a="http://schemas.openxmlformats.org/drawingml/2006/main"/>
+          <a:ln xmlns:a="http://schemas.openxmlformats.org/drawingml/2006/main" w="0">
+            <a:noFill/>
+            <a:prstDash val="solid"/>
+          </a:ln>
+        </p:spPr>
+        <p:txBody>
+          <a:bodyPr xmlns:a="http://schemas.openxmlformats.org/drawingml/2006/main"/>
+          <a:lstStyle xmlns:a="http://schemas.openxmlformats.org/drawingml/2006/main"/>
+          <a:p xmlns:a="http://schemas.openxmlformats.org/drawingml/2006/main">
+            <a:pPr algn="l">
+              <a:defRPr sz="1125" b="1">
+                <a:solidFill>
+                  <a:srgbClr val="171717"/>
+                </a:solidFill>
+              </a:defRPr>
+            </a:pPr>
+            <a:r>
+              <a:rPr sz="1125" b="1">
+                <a:solidFill>
+                  <a:srgbClr val="171717"/>
+                </a:solidFill>
+              </a:rPr>
+              <a:t>•</a:t>
             </a:r>
           </a:p>
         </p:txBody>
@@ -4790,47 +5172,47 @@
           <p:cNvPr id="15" name="">
             <a:extLst xmlns:a="http://schemas.openxmlformats.org/drawingml/2006/main">
               <a:ext uri="{FF2B5EF4-FFF2-40B4-BE49-F238E27FC236}">
-                <a16:creationId xmlns:a16="http://schemas.microsoft.com/office/drawing/2014/main" id="{D63F2734-43D9-404C-B7FD-3FF0E3194ADE}"/>
-              </a:ext>
-            </a:extLst>
-          </p:cNvPr>
-          <p:cNvSpPr>
-            <a:spLocks xmlns:a="http://schemas.openxmlformats.org/drawingml/2006/main" noGrp="1"/>
-          </p:cNvSpPr>
-          <p:nvPr/>
-        </p:nvSpPr>
-        <p:spPr>
-          <a:xfrm xmlns:a="http://schemas.openxmlformats.org/drawingml/2006/main">
-            <a:off x="876300" y="3333750"/>
-            <a:ext cx="1714500" cy="323850"/>
-          </a:xfrm>
-          <a:prstGeom xmlns:a="http://schemas.openxmlformats.org/drawingml/2006/main" prst="rect">
-            <a:avLst/>
-          </a:prstGeom>
-          <a:noFill xmlns:a="http://schemas.openxmlformats.org/drawingml/2006/main"/>
-          <a:ln xmlns:a="http://schemas.openxmlformats.org/drawingml/2006/main" w="0">
-            <a:noFill/>
-            <a:prstDash val="solid"/>
-          </a:ln>
-        </p:spPr>
-        <p:txBody>
-          <a:bodyPr xmlns:a="http://schemas.openxmlformats.org/drawingml/2006/main"/>
-          <a:lstStyle xmlns:a="http://schemas.openxmlformats.org/drawingml/2006/main"/>
-          <a:p xmlns:a="http://schemas.openxmlformats.org/drawingml/2006/main">
-            <a:pPr algn="l">
-              <a:defRPr sz="1950" b="1">
-                <a:solidFill>
-                  <a:srgbClr val="171717"/>
-                </a:solidFill>
-              </a:defRPr>
-            </a:pPr>
-            <a:r>
-              <a:rPr sz="1950" b="1">
-                <a:solidFill>
-                  <a:srgbClr val="171717"/>
-                </a:solidFill>
-              </a:rPr>
-              <a:t>先长分支</a:t>
+                <a16:creationId xmlns:a16="http://schemas.microsoft.com/office/drawing/2014/main" id="{FB6678B9-0C40-4B90-AC6B-C0CECFA19B93}"/>
+              </a:ext>
+            </a:extLst>
+          </p:cNvPr>
+          <p:cNvSpPr>
+            <a:spLocks xmlns:a="http://schemas.openxmlformats.org/drawingml/2006/main" noGrp="1"/>
+          </p:cNvSpPr>
+          <p:nvPr/>
+        </p:nvSpPr>
+        <p:spPr>
+          <a:xfrm xmlns:a="http://schemas.openxmlformats.org/drawingml/2006/main">
+            <a:off x="1123950" y="3162300"/>
+            <a:ext cx="2038350" cy="285750"/>
+          </a:xfrm>
+          <a:prstGeom xmlns:a="http://schemas.openxmlformats.org/drawingml/2006/main" prst="rect">
+            <a:avLst/>
+          </a:prstGeom>
+          <a:noFill xmlns:a="http://schemas.openxmlformats.org/drawingml/2006/main"/>
+          <a:ln xmlns:a="http://schemas.openxmlformats.org/drawingml/2006/main" w="0">
+            <a:noFill/>
+            <a:prstDash val="solid"/>
+          </a:ln>
+        </p:spPr>
+        <p:txBody>
+          <a:bodyPr xmlns:a="http://schemas.openxmlformats.org/drawingml/2006/main"/>
+          <a:lstStyle xmlns:a="http://schemas.openxmlformats.org/drawingml/2006/main"/>
+          <a:p xmlns:a="http://schemas.openxmlformats.org/drawingml/2006/main">
+            <a:pPr algn="l">
+              <a:defRPr sz="1125" b="0">
+                <a:solidFill>
+                  <a:srgbClr val="171717"/>
+                </a:solidFill>
+              </a:defRPr>
+            </a:pPr>
+            <a:r>
+              <a:rPr sz="1125" b="0">
+                <a:solidFill>
+                  <a:srgbClr val="171717"/>
+                </a:solidFill>
+              </a:rPr>
+              <a:t>图片散在子目录里</a:t>
             </a:r>
           </a:p>
         </p:txBody>
@@ -4840,140 +5222,23 @@
           <p:cNvPr id="16" name="">
             <a:extLst xmlns:a="http://schemas.openxmlformats.org/drawingml/2006/main">
               <a:ext uri="{FF2B5EF4-FFF2-40B4-BE49-F238E27FC236}">
-                <a16:creationId xmlns:a16="http://schemas.microsoft.com/office/drawing/2014/main" id="{177BBB5D-6698-45CD-9AFD-F58A5CCA6DBF}"/>
-              </a:ext>
-            </a:extLst>
-          </p:cNvPr>
-          <p:cNvSpPr>
-            <a:spLocks xmlns:a="http://schemas.openxmlformats.org/drawingml/2006/main" noGrp="1"/>
-          </p:cNvSpPr>
-          <p:nvPr/>
-        </p:nvSpPr>
-        <p:spPr>
-          <a:xfrm xmlns:a="http://schemas.openxmlformats.org/drawingml/2006/main">
-            <a:off x="876300" y="3790950"/>
-            <a:ext cx="1943100" cy="552450"/>
-          </a:xfrm>
-          <a:prstGeom xmlns:a="http://schemas.openxmlformats.org/drawingml/2006/main" prst="rect">
-            <a:avLst/>
-          </a:prstGeom>
-          <a:noFill xmlns:a="http://schemas.openxmlformats.org/drawingml/2006/main"/>
-          <a:ln xmlns:a="http://schemas.openxmlformats.org/drawingml/2006/main" w="0">
-            <a:noFill/>
-            <a:prstDash val="solid"/>
-          </a:ln>
-        </p:spPr>
-        <p:txBody>
-          <a:bodyPr xmlns:a="http://schemas.openxmlformats.org/drawingml/2006/main"/>
-          <a:lstStyle xmlns:a="http://schemas.openxmlformats.org/drawingml/2006/main"/>
-          <a:p xmlns:a="http://schemas.openxmlformats.org/drawingml/2006/main">
-            <a:pPr algn="l">
-              <a:defRPr sz="1275" b="0">
-                <a:solidFill>
-                  <a:srgbClr val="57534E"/>
-                </a:solidFill>
-              </a:defRPr>
-            </a:pPr>
-            <a:r>
-              <a:rPr sz="1275" b="0">
-                <a:solidFill>
-                  <a:srgbClr val="57534E"/>
-                </a:solidFill>
-              </a:rPr>
-              <a:t>suffix 分流</a:t>
-            </a:r>
-          </a:p>
-          <a:p xmlns:a="http://schemas.openxmlformats.org/drawingml/2006/main">
-            <a:pPr algn="l">
-              <a:defRPr sz="1275" b="0">
-                <a:solidFill>
-                  <a:srgbClr val="57534E"/>
-                </a:solidFill>
-              </a:defRPr>
-            </a:pPr>
-            <a:r>
-              <a:rPr sz="1275" b="0">
-                <a:solidFill>
-                  <a:srgbClr val="57534E"/>
-                </a:solidFill>
-              </a:rPr>
-              <a:t>pdf / docx / xlsx / pptx</a:t>
-            </a:r>
-          </a:p>
-        </p:txBody>
-      </p:sp>
-      <p:sp>
-        <p:nvSpPr>
-          <p:cNvPr id="17" name="">
-            <a:extLst xmlns:a="http://schemas.openxmlformats.org/drawingml/2006/main">
-              <a:ext uri="{FF2B5EF4-FFF2-40B4-BE49-F238E27FC236}">
-                <a16:creationId xmlns:a16="http://schemas.microsoft.com/office/drawing/2014/main" id="{86F20A32-E2AE-4FF0-B611-867A908514F2}"/>
-              </a:ext>
-            </a:extLst>
-          </p:cNvPr>
-          <p:cNvSpPr>
-            <a:spLocks xmlns:a="http://schemas.openxmlformats.org/drawingml/2006/main" noGrp="1"/>
-          </p:cNvSpPr>
-          <p:nvPr/>
-        </p:nvSpPr>
-        <p:spPr>
-          <a:xfrm xmlns:a="http://schemas.openxmlformats.org/drawingml/2006/main">
-            <a:off x="3086100" y="3524250"/>
-            <a:ext cx="266700" cy="228600"/>
-          </a:xfrm>
-          <a:prstGeom xmlns:a="http://schemas.openxmlformats.org/drawingml/2006/main" prst="rect">
-            <a:avLst/>
-          </a:prstGeom>
-          <a:noFill xmlns:a="http://schemas.openxmlformats.org/drawingml/2006/main"/>
-          <a:ln xmlns:a="http://schemas.openxmlformats.org/drawingml/2006/main" w="0">
-            <a:noFill/>
-            <a:prstDash val="solid"/>
-          </a:ln>
-        </p:spPr>
-        <p:txBody>
-          <a:bodyPr xmlns:a="http://schemas.openxmlformats.org/drawingml/2006/main"/>
-          <a:lstStyle xmlns:a="http://schemas.openxmlformats.org/drawingml/2006/main"/>
-          <a:p xmlns:a="http://schemas.openxmlformats.org/drawingml/2006/main">
-            <a:pPr algn="ctr">
-              <a:defRPr sz="2100" b="1">
-                <a:solidFill>
-                  <a:srgbClr val="C96A1B"/>
-                </a:solidFill>
-              </a:defRPr>
-            </a:pPr>
-            <a:r>
-              <a:rPr sz="2100" b="1">
-                <a:solidFill>
-                  <a:srgbClr val="C96A1B"/>
-                </a:solidFill>
-              </a:rPr>
-              <a:t>→</a:t>
-            </a:r>
-          </a:p>
-        </p:txBody>
-      </p:sp>
-      <p:sp>
-        <p:nvSpPr>
-          <p:cNvPr id="18" name="">
-            <a:extLst xmlns:a="http://schemas.openxmlformats.org/drawingml/2006/main">
-              <a:ext uri="{FF2B5EF4-FFF2-40B4-BE49-F238E27FC236}">
-                <a16:creationId xmlns:a16="http://schemas.microsoft.com/office/drawing/2014/main" id="{32FC5423-4255-49A8-A86F-E798C74B0E09}"/>
-              </a:ext>
-            </a:extLst>
-          </p:cNvPr>
-          <p:cNvSpPr>
-            <a:spLocks xmlns:a="http://schemas.openxmlformats.org/drawingml/2006/main" noGrp="1"/>
-          </p:cNvSpPr>
-          <p:nvPr/>
-        </p:nvSpPr>
-        <p:spPr>
-          <a:xfrm xmlns:a="http://schemas.openxmlformats.org/drawingml/2006/main">
-            <a:off x="3429000" y="2724150"/>
-            <a:ext cx="2362200" cy="1866900"/>
+                <a16:creationId xmlns:a16="http://schemas.microsoft.com/office/drawing/2014/main" id="{D07EB852-96E1-407A-9F92-4D78C4A2C1EA}"/>
+              </a:ext>
+            </a:extLst>
+          </p:cNvPr>
+          <p:cNvSpPr>
+            <a:spLocks xmlns:a="http://schemas.openxmlformats.org/drawingml/2006/main" noGrp="1"/>
+          </p:cNvSpPr>
+          <p:nvPr/>
+        </p:nvSpPr>
+        <p:spPr>
+          <a:xfrm xmlns:a="http://schemas.openxmlformats.org/drawingml/2006/main">
+            <a:off x="685800" y="3486150"/>
+            <a:ext cx="3028950" cy="1390650"/>
           </a:xfrm>
           <a:prstGeom xmlns:a="http://schemas.openxmlformats.org/drawingml/2006/main" prst="roundRect">
             <a:avLst>
-              <a:gd name="adj" fmla="val 12245"/>
+              <a:gd name="adj" fmla="val 16438"/>
             </a:avLst>
           </a:prstGeom>
           <a:solidFill xmlns:a="http://schemas.openxmlformats.org/drawingml/2006/main">
@@ -4995,22 +5260,22 @@
       </p:sp>
       <p:sp>
         <p:nvSpPr>
-          <p:cNvPr id="19" name="">
-            <a:extLst xmlns:a="http://schemas.openxmlformats.org/drawingml/2006/main">
-              <a:ext uri="{FF2B5EF4-FFF2-40B4-BE49-F238E27FC236}">
-                <a16:creationId xmlns:a16="http://schemas.microsoft.com/office/drawing/2014/main" id="{C8CC7563-F75B-4B60-9172-78263AC2133F}"/>
-              </a:ext>
-            </a:extLst>
-          </p:cNvPr>
-          <p:cNvSpPr>
-            <a:spLocks xmlns:a="http://schemas.openxmlformats.org/drawingml/2006/main" noGrp="1"/>
-          </p:cNvSpPr>
-          <p:nvPr/>
-        </p:nvSpPr>
-        <p:spPr>
-          <a:xfrm xmlns:a="http://schemas.openxmlformats.org/drawingml/2006/main">
-            <a:off x="3619500" y="2914650"/>
-            <a:ext cx="723900" cy="323850"/>
+          <p:cNvPr id="17" name="">
+            <a:extLst xmlns:a="http://schemas.openxmlformats.org/drawingml/2006/main">
+              <a:ext uri="{FF2B5EF4-FFF2-40B4-BE49-F238E27FC236}">
+                <a16:creationId xmlns:a16="http://schemas.microsoft.com/office/drawing/2014/main" id="{24128B37-9C53-44D5-8D0A-68D6FDD6FAF2}"/>
+              </a:ext>
+            </a:extLst>
+          </p:cNvPr>
+          <p:cNvSpPr>
+            <a:spLocks xmlns:a="http://schemas.openxmlformats.org/drawingml/2006/main" noGrp="1"/>
+          </p:cNvSpPr>
+          <p:nvPr/>
+        </p:nvSpPr>
+        <p:spPr>
+          <a:xfrm xmlns:a="http://schemas.openxmlformats.org/drawingml/2006/main">
+            <a:off x="914400" y="3695700"/>
+            <a:ext cx="781050" cy="323850"/>
           </a:xfrm>
           <a:prstGeom xmlns:a="http://schemas.openxmlformats.org/drawingml/2006/main" prst="roundRect">
             <a:avLst>
@@ -5030,217 +5295,300 @@
       </p:sp>
       <p:sp>
         <p:nvSpPr>
+          <p:cNvPr id="18" name="">
+            <a:extLst xmlns:a="http://schemas.openxmlformats.org/drawingml/2006/main">
+              <a:ext uri="{FF2B5EF4-FFF2-40B4-BE49-F238E27FC236}">
+                <a16:creationId xmlns:a16="http://schemas.microsoft.com/office/drawing/2014/main" id="{17196788-5703-4372-B1CD-7437CF813D1E}"/>
+              </a:ext>
+            </a:extLst>
+          </p:cNvPr>
+          <p:cNvSpPr>
+            <a:spLocks xmlns:a="http://schemas.openxmlformats.org/drawingml/2006/main" noGrp="1"/>
+          </p:cNvSpPr>
+          <p:nvPr/>
+        </p:nvSpPr>
+        <p:spPr>
+          <a:xfrm xmlns:a="http://schemas.openxmlformats.org/drawingml/2006/main">
+            <a:off x="1047750" y="3771900"/>
+            <a:ext cx="514350" cy="171450"/>
+          </a:xfrm>
+          <a:prstGeom xmlns:a="http://schemas.openxmlformats.org/drawingml/2006/main" prst="rect">
+            <a:avLst/>
+          </a:prstGeom>
+          <a:noFill xmlns:a="http://schemas.openxmlformats.org/drawingml/2006/main"/>
+          <a:ln xmlns:a="http://schemas.openxmlformats.org/drawingml/2006/main" w="0">
+            <a:noFill/>
+            <a:prstDash val="solid"/>
+          </a:ln>
+        </p:spPr>
+        <p:txBody>
+          <a:bodyPr xmlns:a="http://schemas.openxmlformats.org/drawingml/2006/main"/>
+          <a:lstStyle xmlns:a="http://schemas.openxmlformats.org/drawingml/2006/main"/>
+          <a:p xmlns:a="http://schemas.openxmlformats.org/drawingml/2006/main">
+            <a:pPr algn="l">
+              <a:defRPr sz="900" b="1">
+                <a:solidFill>
+                  <a:srgbClr val="0F766E"/>
+                </a:solidFill>
+              </a:defRPr>
+            </a:pPr>
+            <a:r>
+              <a:rPr sz="900" b="1">
+                <a:solidFill>
+                  <a:srgbClr val="0F766E"/>
+                </a:solidFill>
+              </a:rPr>
+              <a:t>于是手搓</a:t>
+            </a:r>
+          </a:p>
+        </p:txBody>
+      </p:sp>
+      <p:sp>
+        <p:nvSpPr>
+          <p:cNvPr id="19" name="">
+            <a:extLst xmlns:a="http://schemas.openxmlformats.org/drawingml/2006/main">
+              <a:ext uri="{FF2B5EF4-FFF2-40B4-BE49-F238E27FC236}">
+                <a16:creationId xmlns:a16="http://schemas.microsoft.com/office/drawing/2014/main" id="{7E09CC7D-6C23-4507-90C0-47D9BA1DF01F}"/>
+              </a:ext>
+            </a:extLst>
+          </p:cNvPr>
+          <p:cNvSpPr>
+            <a:spLocks xmlns:a="http://schemas.openxmlformats.org/drawingml/2006/main" noGrp="1"/>
+          </p:cNvSpPr>
+          <p:nvPr/>
+        </p:nvSpPr>
+        <p:spPr>
+          <a:xfrm xmlns:a="http://schemas.openxmlformats.org/drawingml/2006/main">
+            <a:off x="914400" y="4171950"/>
+            <a:ext cx="190500" cy="190500"/>
+          </a:xfrm>
+          <a:prstGeom xmlns:a="http://schemas.openxmlformats.org/drawingml/2006/main" prst="rect">
+            <a:avLst/>
+          </a:prstGeom>
+          <a:noFill xmlns:a="http://schemas.openxmlformats.org/drawingml/2006/main"/>
+          <a:ln xmlns:a="http://schemas.openxmlformats.org/drawingml/2006/main" w="0">
+            <a:noFill/>
+            <a:prstDash val="solid"/>
+          </a:ln>
+        </p:spPr>
+        <p:txBody>
+          <a:bodyPr xmlns:a="http://schemas.openxmlformats.org/drawingml/2006/main"/>
+          <a:lstStyle xmlns:a="http://schemas.openxmlformats.org/drawingml/2006/main"/>
+          <a:p xmlns:a="http://schemas.openxmlformats.org/drawingml/2006/main">
+            <a:pPr algn="l">
+              <a:defRPr sz="1125" b="1">
+                <a:solidFill>
+                  <a:srgbClr val="171717"/>
+                </a:solidFill>
+              </a:defRPr>
+            </a:pPr>
+            <a:r>
+              <a:rPr sz="1125" b="1">
+                <a:solidFill>
+                  <a:srgbClr val="171717"/>
+                </a:solidFill>
+              </a:rPr>
+              <a:t>•</a:t>
+            </a:r>
+          </a:p>
+        </p:txBody>
+      </p:sp>
+      <p:sp>
+        <p:nvSpPr>
           <p:cNvPr id="20" name="">
             <a:extLst xmlns:a="http://schemas.openxmlformats.org/drawingml/2006/main">
               <a:ext uri="{FF2B5EF4-FFF2-40B4-BE49-F238E27FC236}">
-                <a16:creationId xmlns:a16="http://schemas.microsoft.com/office/drawing/2014/main" id="{76D63F26-CC14-47B5-895D-D6DF58F8AF3D}"/>
-              </a:ext>
-            </a:extLst>
-          </p:cNvPr>
-          <p:cNvSpPr>
-            <a:spLocks xmlns:a="http://schemas.openxmlformats.org/drawingml/2006/main" noGrp="1"/>
-          </p:cNvSpPr>
-          <p:nvPr/>
-        </p:nvSpPr>
-        <p:spPr>
-          <a:xfrm xmlns:a="http://schemas.openxmlformats.org/drawingml/2006/main">
-            <a:off x="3752850" y="2990850"/>
-            <a:ext cx="457200" cy="171450"/>
-          </a:xfrm>
-          <a:prstGeom xmlns:a="http://schemas.openxmlformats.org/drawingml/2006/main" prst="rect">
-            <a:avLst/>
-          </a:prstGeom>
-          <a:noFill xmlns:a="http://schemas.openxmlformats.org/drawingml/2006/main"/>
-          <a:ln xmlns:a="http://schemas.openxmlformats.org/drawingml/2006/main" w="0">
-            <a:noFill/>
-            <a:prstDash val="solid"/>
-          </a:ln>
-        </p:spPr>
-        <p:txBody>
-          <a:bodyPr xmlns:a="http://schemas.openxmlformats.org/drawingml/2006/main"/>
-          <a:lstStyle xmlns:a="http://schemas.openxmlformats.org/drawingml/2006/main"/>
-          <a:p xmlns:a="http://schemas.openxmlformats.org/drawingml/2006/main">
-            <a:pPr algn="l">
-              <a:defRPr sz="900" b="1">
+                <a16:creationId xmlns:a16="http://schemas.microsoft.com/office/drawing/2014/main" id="{EA82CA81-CC21-43D8-A81D-61F7F3F1ACA0}"/>
+              </a:ext>
+            </a:extLst>
+          </p:cNvPr>
+          <p:cNvSpPr>
+            <a:spLocks xmlns:a="http://schemas.openxmlformats.org/drawingml/2006/main" noGrp="1"/>
+          </p:cNvSpPr>
+          <p:nvPr/>
+        </p:nvSpPr>
+        <p:spPr>
+          <a:xfrm xmlns:a="http://schemas.openxmlformats.org/drawingml/2006/main">
+            <a:off x="1123950" y="4171950"/>
+            <a:ext cx="2038350" cy="323850"/>
+          </a:xfrm>
+          <a:prstGeom xmlns:a="http://schemas.openxmlformats.org/drawingml/2006/main" prst="rect">
+            <a:avLst/>
+          </a:prstGeom>
+          <a:noFill xmlns:a="http://schemas.openxmlformats.org/drawingml/2006/main"/>
+          <a:ln xmlns:a="http://schemas.openxmlformats.org/drawingml/2006/main" w="0">
+            <a:noFill/>
+            <a:prstDash val="solid"/>
+          </a:ln>
+        </p:spPr>
+        <p:txBody>
+          <a:bodyPr xmlns:a="http://schemas.openxmlformats.org/drawingml/2006/main"/>
+          <a:lstStyle xmlns:a="http://schemas.openxmlformats.org/drawingml/2006/main"/>
+          <a:p xmlns:a="http://schemas.openxmlformats.org/drawingml/2006/main">
+            <a:pPr algn="l">
+              <a:defRPr sz="1125" b="0">
+                <a:solidFill>
+                  <a:srgbClr val="171717"/>
+                </a:solidFill>
+              </a:defRPr>
+            </a:pPr>
+            <a:r>
+              <a:rPr sz="1125" b="0">
+                <a:solidFill>
+                  <a:srgbClr val="171717"/>
+                </a:solidFill>
+              </a:rPr>
+              <a:t>先扫目录，补 pdf / docx 分支</a:t>
+            </a:r>
+          </a:p>
+        </p:txBody>
+      </p:sp>
+      <p:sp>
+        <p:nvSpPr>
+          <p:cNvPr id="21" name="">
+            <a:extLst xmlns:a="http://schemas.openxmlformats.org/drawingml/2006/main">
+              <a:ext uri="{FF2B5EF4-FFF2-40B4-BE49-F238E27FC236}">
+                <a16:creationId xmlns:a16="http://schemas.microsoft.com/office/drawing/2014/main" id="{B75F85A1-D232-4632-983E-634D33FAC333}"/>
+              </a:ext>
+            </a:extLst>
+          </p:cNvPr>
+          <p:cNvSpPr>
+            <a:spLocks xmlns:a="http://schemas.openxmlformats.org/drawingml/2006/main" noGrp="1"/>
+          </p:cNvSpPr>
+          <p:nvPr/>
+        </p:nvSpPr>
+        <p:spPr>
+          <a:xfrm xmlns:a="http://schemas.openxmlformats.org/drawingml/2006/main">
+            <a:off x="914400" y="4495800"/>
+            <a:ext cx="190500" cy="190500"/>
+          </a:xfrm>
+          <a:prstGeom xmlns:a="http://schemas.openxmlformats.org/drawingml/2006/main" prst="rect">
+            <a:avLst/>
+          </a:prstGeom>
+          <a:noFill xmlns:a="http://schemas.openxmlformats.org/drawingml/2006/main"/>
+          <a:ln xmlns:a="http://schemas.openxmlformats.org/drawingml/2006/main" w="0">
+            <a:noFill/>
+            <a:prstDash val="solid"/>
+          </a:ln>
+        </p:spPr>
+        <p:txBody>
+          <a:bodyPr xmlns:a="http://schemas.openxmlformats.org/drawingml/2006/main"/>
+          <a:lstStyle xmlns:a="http://schemas.openxmlformats.org/drawingml/2006/main"/>
+          <a:p xmlns:a="http://schemas.openxmlformats.org/drawingml/2006/main">
+            <a:pPr algn="l">
+              <a:defRPr sz="1125" b="1">
+                <a:solidFill>
+                  <a:srgbClr val="171717"/>
+                </a:solidFill>
+              </a:defRPr>
+            </a:pPr>
+            <a:r>
+              <a:rPr sz="1125" b="1">
+                <a:solidFill>
+                  <a:srgbClr val="171717"/>
+                </a:solidFill>
+              </a:rPr>
+              <a:t>•</a:t>
+            </a:r>
+          </a:p>
+        </p:txBody>
+      </p:sp>
+      <p:sp>
+        <p:nvSpPr>
+          <p:cNvPr id="22" name="">
+            <a:extLst xmlns:a="http://schemas.openxmlformats.org/drawingml/2006/main">
+              <a:ext uri="{FF2B5EF4-FFF2-40B4-BE49-F238E27FC236}">
+                <a16:creationId xmlns:a16="http://schemas.microsoft.com/office/drawing/2014/main" id="{3B71F6DB-B9DD-469E-9497-37BC0C969383}"/>
+              </a:ext>
+            </a:extLst>
+          </p:cNvPr>
+          <p:cNvSpPr>
+            <a:spLocks xmlns:a="http://schemas.openxmlformats.org/drawingml/2006/main" noGrp="1"/>
+          </p:cNvSpPr>
+          <p:nvPr/>
+        </p:nvSpPr>
+        <p:spPr>
+          <a:xfrm xmlns:a="http://schemas.openxmlformats.org/drawingml/2006/main">
+            <a:off x="1123950" y="4495800"/>
+            <a:ext cx="2038350" cy="323850"/>
+          </a:xfrm>
+          <a:prstGeom xmlns:a="http://schemas.openxmlformats.org/drawingml/2006/main" prst="rect">
+            <a:avLst/>
+          </a:prstGeom>
+          <a:noFill xmlns:a="http://schemas.openxmlformats.org/drawingml/2006/main"/>
+          <a:ln xmlns:a="http://schemas.openxmlformats.org/drawingml/2006/main" w="0">
+            <a:noFill/>
+            <a:prstDash val="solid"/>
+          </a:ln>
+        </p:spPr>
+        <p:txBody>
+          <a:bodyPr xmlns:a="http://schemas.openxmlformats.org/drawingml/2006/main"/>
+          <a:lstStyle xmlns:a="http://schemas.openxmlformats.org/drawingml/2006/main"/>
+          <a:p xmlns:a="http://schemas.openxmlformats.org/drawingml/2006/main">
+            <a:pPr algn="l">
+              <a:defRPr sz="1125" b="0">
+                <a:solidFill>
+                  <a:srgbClr val="171717"/>
+                </a:solidFill>
+              </a:defRPr>
+            </a:pPr>
+            <a:r>
+              <a:rPr sz="1125" b="0">
+                <a:solidFill>
+                  <a:srgbClr val="171717"/>
+                </a:solidFill>
+              </a:rPr>
+              <a:t>路径、图片坏了就 repair，不行再 fallback</a:t>
+            </a:r>
+          </a:p>
+        </p:txBody>
+      </p:sp>
+      <p:sp>
+        <p:nvSpPr>
+          <p:cNvPr id="23" name="">
+            <a:extLst xmlns:a="http://schemas.openxmlformats.org/drawingml/2006/main">
+              <a:ext uri="{FF2B5EF4-FFF2-40B4-BE49-F238E27FC236}">
+                <a16:creationId xmlns:a16="http://schemas.microsoft.com/office/drawing/2014/main" id="{6CFCBB34-4A8D-47F6-AD9C-EE35F8132231}"/>
+              </a:ext>
+            </a:extLst>
+          </p:cNvPr>
+          <p:cNvSpPr>
+            <a:spLocks xmlns:a="http://schemas.openxmlformats.org/drawingml/2006/main" noGrp="1"/>
+          </p:cNvSpPr>
+          <p:nvPr/>
+        </p:nvSpPr>
+        <p:spPr>
+          <a:xfrm xmlns:a="http://schemas.openxmlformats.org/drawingml/2006/main">
+            <a:off x="914400" y="4686300"/>
+            <a:ext cx="2133600" cy="171450"/>
+          </a:xfrm>
+          <a:prstGeom xmlns:a="http://schemas.openxmlformats.org/drawingml/2006/main" prst="rect">
+            <a:avLst/>
+          </a:prstGeom>
+          <a:noFill xmlns:a="http://schemas.openxmlformats.org/drawingml/2006/main"/>
+          <a:ln xmlns:a="http://schemas.openxmlformats.org/drawingml/2006/main" w="0">
+            <a:noFill/>
+            <a:prstDash val="solid"/>
+          </a:ln>
+        </p:spPr>
+        <p:txBody>
+          <a:bodyPr xmlns:a="http://schemas.openxmlformats.org/drawingml/2006/main"/>
+          <a:lstStyle xmlns:a="http://schemas.openxmlformats.org/drawingml/2006/main"/>
+          <a:p xmlns:a="http://schemas.openxmlformats.org/drawingml/2006/main">
+            <a:pPr algn="l">
+              <a:defRPr sz="1050" b="0">
                 <a:solidFill>
                   <a:srgbClr val="57534E"/>
                 </a:solidFill>
               </a:defRPr>
             </a:pPr>
             <a:r>
-              <a:rPr sz="900" b="1">
+              <a:rPr sz="1050" b="0">
                 <a:solidFill>
                   <a:srgbClr val="57534E"/>
                 </a:solidFill>
               </a:rPr>
-              <a:t>第 2 圈</a:t>
-            </a:r>
-          </a:p>
-        </p:txBody>
-      </p:sp>
-      <p:sp>
-        <p:nvSpPr>
-          <p:cNvPr id="21" name="">
-            <a:extLst xmlns:a="http://schemas.openxmlformats.org/drawingml/2006/main">
-              <a:ext uri="{FF2B5EF4-FFF2-40B4-BE49-F238E27FC236}">
-                <a16:creationId xmlns:a16="http://schemas.microsoft.com/office/drawing/2014/main" id="{D6C1725A-AE83-4205-9EB3-4D0E29F3D225}"/>
-              </a:ext>
-            </a:extLst>
-          </p:cNvPr>
-          <p:cNvSpPr>
-            <a:spLocks xmlns:a="http://schemas.openxmlformats.org/drawingml/2006/main" noGrp="1"/>
-          </p:cNvSpPr>
-          <p:nvPr/>
-        </p:nvSpPr>
-        <p:spPr>
-          <a:xfrm xmlns:a="http://schemas.openxmlformats.org/drawingml/2006/main">
-            <a:off x="3619500" y="3333750"/>
-            <a:ext cx="1714500" cy="323850"/>
-          </a:xfrm>
-          <a:prstGeom xmlns:a="http://schemas.openxmlformats.org/drawingml/2006/main" prst="rect">
-            <a:avLst/>
-          </a:prstGeom>
-          <a:noFill xmlns:a="http://schemas.openxmlformats.org/drawingml/2006/main"/>
-          <a:ln xmlns:a="http://schemas.openxmlformats.org/drawingml/2006/main" w="0">
-            <a:noFill/>
-            <a:prstDash val="solid"/>
-          </a:ln>
-        </p:spPr>
-        <p:txBody>
-          <a:bodyPr xmlns:a="http://schemas.openxmlformats.org/drawingml/2006/main"/>
-          <a:lstStyle xmlns:a="http://schemas.openxmlformats.org/drawingml/2006/main"/>
-          <a:p xmlns:a="http://schemas.openxmlformats.org/drawingml/2006/main">
-            <a:pPr algn="l">
-              <a:defRPr sz="1950" b="1">
-                <a:solidFill>
-                  <a:srgbClr val="171717"/>
-                </a:solidFill>
-              </a:defRPr>
-            </a:pPr>
-            <a:r>
-              <a:rPr sz="1950" b="1">
-                <a:solidFill>
-                  <a:srgbClr val="171717"/>
-                </a:solidFill>
-              </a:rPr>
-              <a:t>补坏样本</a:t>
-            </a:r>
-          </a:p>
-        </p:txBody>
-      </p:sp>
-      <p:sp>
-        <p:nvSpPr>
-          <p:cNvPr id="22" name="">
-            <a:extLst xmlns:a="http://schemas.openxmlformats.org/drawingml/2006/main">
-              <a:ext uri="{FF2B5EF4-FFF2-40B4-BE49-F238E27FC236}">
-                <a16:creationId xmlns:a16="http://schemas.microsoft.com/office/drawing/2014/main" id="{720FEED1-D33F-4EE2-8F57-76604AA70F69}"/>
-              </a:ext>
-            </a:extLst>
-          </p:cNvPr>
-          <p:cNvSpPr>
-            <a:spLocks xmlns:a="http://schemas.openxmlformats.org/drawingml/2006/main" noGrp="1"/>
-          </p:cNvSpPr>
-          <p:nvPr/>
-        </p:nvSpPr>
-        <p:spPr>
-          <a:xfrm xmlns:a="http://schemas.openxmlformats.org/drawingml/2006/main">
-            <a:off x="3619500" y="3790950"/>
-            <a:ext cx="1943100" cy="552450"/>
-          </a:xfrm>
-          <a:prstGeom xmlns:a="http://schemas.openxmlformats.org/drawingml/2006/main" prst="rect">
-            <a:avLst/>
-          </a:prstGeom>
-          <a:noFill xmlns:a="http://schemas.openxmlformats.org/drawingml/2006/main"/>
-          <a:ln xmlns:a="http://schemas.openxmlformats.org/drawingml/2006/main" w="0">
-            <a:noFill/>
-            <a:prstDash val="solid"/>
-          </a:ln>
-        </p:spPr>
-        <p:txBody>
-          <a:bodyPr xmlns:a="http://schemas.openxmlformats.org/drawingml/2006/main"/>
-          <a:lstStyle xmlns:a="http://schemas.openxmlformats.org/drawingml/2006/main"/>
-          <a:p xmlns:a="http://schemas.openxmlformats.org/drawingml/2006/main">
-            <a:pPr algn="l">
-              <a:defRPr sz="1275" b="0">
-                <a:solidFill>
-                  <a:srgbClr val="57534E"/>
-                </a:solidFill>
-              </a:defRPr>
-            </a:pPr>
-            <a:r>
-              <a:rPr sz="1275" b="0">
-                <a:solidFill>
-                  <a:srgbClr val="57534E"/>
-                </a:solidFill>
-              </a:rPr>
-              <a:t>扫描 PDF -&gt; scanned</a:t>
-            </a:r>
-          </a:p>
-          <a:p xmlns:a="http://schemas.openxmlformats.org/drawingml/2006/main">
-            <a:pPr algn="l">
-              <a:defRPr sz="1275" b="0">
-                <a:solidFill>
-                  <a:srgbClr val="57534E"/>
-                </a:solidFill>
-              </a:defRPr>
-            </a:pPr>
-            <a:r>
-              <a:rPr sz="1275" b="0">
-                <a:solidFill>
-                  <a:srgbClr val="57534E"/>
-                </a:solidFill>
-              </a:rPr>
-              <a:t>坏 docx -&gt; relationship repair</a:t>
-            </a:r>
-          </a:p>
-        </p:txBody>
-      </p:sp>
-      <p:sp>
-        <p:nvSpPr>
-          <p:cNvPr id="23" name="">
-            <a:extLst xmlns:a="http://schemas.openxmlformats.org/drawingml/2006/main">
-              <a:ext uri="{FF2B5EF4-FFF2-40B4-BE49-F238E27FC236}">
-                <a16:creationId xmlns:a16="http://schemas.microsoft.com/office/drawing/2014/main" id="{2C9584E4-06DC-4493-B9B9-0BDC19757F93}"/>
-              </a:ext>
-            </a:extLst>
-          </p:cNvPr>
-          <p:cNvSpPr>
-            <a:spLocks xmlns:a="http://schemas.openxmlformats.org/drawingml/2006/main" noGrp="1"/>
-          </p:cNvSpPr>
-          <p:nvPr/>
-        </p:nvSpPr>
-        <p:spPr>
-          <a:xfrm xmlns:a="http://schemas.openxmlformats.org/drawingml/2006/main">
-            <a:off x="5829300" y="3524250"/>
-            <a:ext cx="266700" cy="228600"/>
-          </a:xfrm>
-          <a:prstGeom xmlns:a="http://schemas.openxmlformats.org/drawingml/2006/main" prst="rect">
-            <a:avLst/>
-          </a:prstGeom>
-          <a:noFill xmlns:a="http://schemas.openxmlformats.org/drawingml/2006/main"/>
-          <a:ln xmlns:a="http://schemas.openxmlformats.org/drawingml/2006/main" w="0">
-            <a:noFill/>
-            <a:prstDash val="solid"/>
-          </a:ln>
-        </p:spPr>
-        <p:txBody>
-          <a:bodyPr xmlns:a="http://schemas.openxmlformats.org/drawingml/2006/main"/>
-          <a:lstStyle xmlns:a="http://schemas.openxmlformats.org/drawingml/2006/main"/>
-          <a:p xmlns:a="http://schemas.openxmlformats.org/drawingml/2006/main">
-            <a:pPr algn="ctr">
-              <a:defRPr sz="2100" b="1">
-                <a:solidFill>
-                  <a:srgbClr val="C96A1B"/>
-                </a:solidFill>
-              </a:defRPr>
-            </a:pPr>
-            <a:r>
-              <a:rPr sz="2100" b="1">
-                <a:solidFill>
-                  <a:srgbClr val="C96A1B"/>
-                </a:solidFill>
-              </a:rPr>
-              <a:t>→</a:t>
+              <a:t>一周后：脚本还在，但只有自己看得懂。</a:t>
             </a:r>
           </a:p>
         </p:txBody>
@@ -5250,31 +5598,31 @@
           <p:cNvPr id="24" name="">
             <a:extLst xmlns:a="http://schemas.openxmlformats.org/drawingml/2006/main">
               <a:ext uri="{FF2B5EF4-FFF2-40B4-BE49-F238E27FC236}">
-                <a16:creationId xmlns:a16="http://schemas.microsoft.com/office/drawing/2014/main" id="{DA8CFE81-2691-4FAF-B618-6F3B6C21369C}"/>
-              </a:ext>
-            </a:extLst>
-          </p:cNvPr>
-          <p:cNvSpPr>
-            <a:spLocks xmlns:a="http://schemas.openxmlformats.org/drawingml/2006/main" noGrp="1"/>
-          </p:cNvSpPr>
-          <p:nvPr/>
-        </p:nvSpPr>
-        <p:spPr>
-          <a:xfrm xmlns:a="http://schemas.openxmlformats.org/drawingml/2006/main">
-            <a:off x="6172200" y="2724150"/>
-            <a:ext cx="2362200" cy="1866900"/>
+                <a16:creationId xmlns:a16="http://schemas.microsoft.com/office/drawing/2014/main" id="{CDBED31D-4288-4295-8EE3-3D4DE12849F2}"/>
+              </a:ext>
+            </a:extLst>
+          </p:cNvPr>
+          <p:cNvSpPr>
+            <a:spLocks xmlns:a="http://schemas.openxmlformats.org/drawingml/2006/main" noGrp="1"/>
+          </p:cNvSpPr>
+          <p:nvPr/>
+        </p:nvSpPr>
+        <p:spPr>
+          <a:xfrm xmlns:a="http://schemas.openxmlformats.org/drawingml/2006/main">
+            <a:off x="4076700" y="1790700"/>
+            <a:ext cx="7162800" cy="685800"/>
           </a:xfrm>
           <a:prstGeom xmlns:a="http://schemas.openxmlformats.org/drawingml/2006/main" prst="roundRect">
             <a:avLst>
-              <a:gd name="adj" fmla="val 12245"/>
+              <a:gd name="adj" fmla="val 33333"/>
             </a:avLst>
           </a:prstGeom>
           <a:solidFill xmlns:a="http://schemas.openxmlformats.org/drawingml/2006/main">
-            <a:srgbClr val="F2DDC9"/>
+            <a:srgbClr val="24211D"/>
           </a:solidFill>
           <a:ln xmlns:a="http://schemas.openxmlformats.org/drawingml/2006/main" w="0">
             <a:solidFill>
-              <a:srgbClr val="F2DDC9"/>
+              <a:srgbClr val="24211D"/>
             </a:solidFill>
             <a:prstDash val="solid"/>
           </a:ln>
@@ -5282,7 +5630,7 @@
         <p:style>
           <a:lnRef xmlns:a="http://schemas.openxmlformats.org/drawingml/2006/main" idx="0"/>
           <a:fillRef xmlns:a="http://schemas.openxmlformats.org/drawingml/2006/main" idx="0"/>
-          <a:effectRef xmlns:a="http://schemas.openxmlformats.org/drawingml/2006/main" idx="4"/>
+          <a:effectRef xmlns:a="http://schemas.openxmlformats.org/drawingml/2006/main" idx="6"/>
           <a:fontRef xmlns:a="http://schemas.openxmlformats.org/drawingml/2006/main" idx="major"/>
         </p:style>
       </p:sp>
@@ -5291,659 +5639,123 @@
           <p:cNvPr id="25" name="">
             <a:extLst xmlns:a="http://schemas.openxmlformats.org/drawingml/2006/main">
               <a:ext uri="{FF2B5EF4-FFF2-40B4-BE49-F238E27FC236}">
-                <a16:creationId xmlns:a16="http://schemas.microsoft.com/office/drawing/2014/main" id="{0E887105-D4F7-41ED-8421-305B2F6ABA0E}"/>
-              </a:ext>
-            </a:extLst>
-          </p:cNvPr>
-          <p:cNvSpPr>
-            <a:spLocks xmlns:a="http://schemas.openxmlformats.org/drawingml/2006/main" noGrp="1"/>
-          </p:cNvSpPr>
-          <p:nvPr/>
-        </p:nvSpPr>
-        <p:spPr>
-          <a:xfrm xmlns:a="http://schemas.openxmlformats.org/drawingml/2006/main">
-            <a:off x="6362700" y="2914650"/>
-            <a:ext cx="723900" cy="323850"/>
+                <a16:creationId xmlns:a16="http://schemas.microsoft.com/office/drawing/2014/main" id="{C823FD5C-C6DE-442F-8437-088090B6660B}"/>
+              </a:ext>
+            </a:extLst>
+          </p:cNvPr>
+          <p:cNvSpPr>
+            <a:spLocks xmlns:a="http://schemas.openxmlformats.org/drawingml/2006/main" noGrp="1"/>
+          </p:cNvSpPr>
+          <p:nvPr/>
+        </p:nvSpPr>
+        <p:spPr>
+          <a:xfrm xmlns:a="http://schemas.openxmlformats.org/drawingml/2006/main">
+            <a:off x="4343400" y="1981200"/>
+            <a:ext cx="3714750" cy="228600"/>
+          </a:xfrm>
+          <a:prstGeom xmlns:a="http://schemas.openxmlformats.org/drawingml/2006/main" prst="rect">
+            <a:avLst/>
+          </a:prstGeom>
+          <a:noFill xmlns:a="http://schemas.openxmlformats.org/drawingml/2006/main"/>
+          <a:ln xmlns:a="http://schemas.openxmlformats.org/drawingml/2006/main" w="0">
+            <a:noFill/>
+            <a:prstDash val="solid"/>
+          </a:ln>
+        </p:spPr>
+        <p:txBody>
+          <a:bodyPr xmlns:a="http://schemas.openxmlformats.org/drawingml/2006/main"/>
+          <a:lstStyle xmlns:a="http://schemas.openxmlformats.org/drawingml/2006/main"/>
+          <a:p xmlns:a="http://schemas.openxmlformats.org/drawingml/2006/main">
+            <a:pPr algn="l">
+              <a:defRPr sz="1800" b="1">
+                <a:solidFill>
+                  <a:srgbClr val="FFFFFF"/>
+                </a:solidFill>
+              </a:defRPr>
+            </a:pPr>
+            <a:r>
+              <a:rPr sz="1800" b="1">
+                <a:solidFill>
+                  <a:srgbClr val="FFFFFF"/>
+                </a:solidFill>
+              </a:rPr>
+              <a:t>但 `doc2md` 后来没有停在脚本阶段</a:t>
+            </a:r>
+          </a:p>
+        </p:txBody>
+      </p:sp>
+      <p:sp>
+        <p:nvSpPr>
+          <p:cNvPr id="26" name="">
+            <a:extLst xmlns:a="http://schemas.openxmlformats.org/drawingml/2006/main">
+              <a:ext uri="{FF2B5EF4-FFF2-40B4-BE49-F238E27FC236}">
+                <a16:creationId xmlns:a16="http://schemas.microsoft.com/office/drawing/2014/main" id="{8222AC2D-74EB-4EED-ABB5-63B0D93D9140}"/>
+              </a:ext>
+            </a:extLst>
+          </p:cNvPr>
+          <p:cNvSpPr>
+            <a:spLocks xmlns:a="http://schemas.openxmlformats.org/drawingml/2006/main" noGrp="1"/>
+          </p:cNvSpPr>
+          <p:nvPr/>
+        </p:nvSpPr>
+        <p:spPr>
+          <a:xfrm xmlns:a="http://schemas.openxmlformats.org/drawingml/2006/main">
+            <a:off x="8324850" y="2019300"/>
+            <a:ext cx="2495550" cy="171450"/>
+          </a:xfrm>
+          <a:prstGeom xmlns:a="http://schemas.openxmlformats.org/drawingml/2006/main" prst="rect">
+            <a:avLst/>
+          </a:prstGeom>
+          <a:noFill xmlns:a="http://schemas.openxmlformats.org/drawingml/2006/main"/>
+          <a:ln xmlns:a="http://schemas.openxmlformats.org/drawingml/2006/main" w="0">
+            <a:noFill/>
+            <a:prstDash val="solid"/>
+          </a:ln>
+        </p:spPr>
+        <p:txBody>
+          <a:bodyPr xmlns:a="http://schemas.openxmlformats.org/drawingml/2006/main"/>
+          <a:lstStyle xmlns:a="http://schemas.openxmlformats.org/drawingml/2006/main"/>
+          <a:p xmlns:a="http://schemas.openxmlformats.org/drawingml/2006/main">
+            <a:pPr algn="r">
+              <a:defRPr sz="1200" b="0">
+                <a:solidFill>
+                  <a:srgbClr val="D6D3D1"/>
+                </a:solidFill>
+              </a:defRPr>
+            </a:pPr>
+            <a:r>
+              <a:rPr sz="1200" b="0">
+                <a:solidFill>
+                  <a:srgbClr val="D6D3D1"/>
+                </a:solidFill>
+              </a:rPr>
+              <a:t>它开始长出看得见的几圈年轮</a:t>
+            </a:r>
+          </a:p>
+        </p:txBody>
+      </p:sp>
+      <p:sp>
+        <p:nvSpPr>
+          <p:cNvPr id="27" name="">
+            <a:extLst xmlns:a="http://schemas.openxmlformats.org/drawingml/2006/main">
+              <a:ext uri="{FF2B5EF4-FFF2-40B4-BE49-F238E27FC236}">
+                <a16:creationId xmlns:a16="http://schemas.microsoft.com/office/drawing/2014/main" id="{5B20B9D3-5B37-4564-BFF1-DCBC6504C19A}"/>
+              </a:ext>
+            </a:extLst>
+          </p:cNvPr>
+          <p:cNvSpPr>
+            <a:spLocks xmlns:a="http://schemas.openxmlformats.org/drawingml/2006/main" noGrp="1"/>
+          </p:cNvSpPr>
+          <p:nvPr/>
+        </p:nvSpPr>
+        <p:spPr>
+          <a:xfrm xmlns:a="http://schemas.openxmlformats.org/drawingml/2006/main">
+            <a:off x="4076700" y="2647950"/>
+            <a:ext cx="3467100" cy="1219200"/>
           </a:xfrm>
           <a:prstGeom xmlns:a="http://schemas.openxmlformats.org/drawingml/2006/main" prst="roundRect">
             <a:avLst>
-              <a:gd name="adj" fmla="val 50000"/>
-            </a:avLst>
-          </a:prstGeom>
-          <a:solidFill xmlns:a="http://schemas.openxmlformats.org/drawingml/2006/main">
-            <a:srgbClr val="FFFDF8"/>
-          </a:solidFill>
-          <a:ln xmlns:a="http://schemas.openxmlformats.org/drawingml/2006/main" w="0">
-            <a:solidFill>
-              <a:srgbClr val="FFFDF8"/>
-            </a:solidFill>
-            <a:prstDash val="solid"/>
-          </a:ln>
-        </p:spPr>
-      </p:sp>
-      <p:sp>
-        <p:nvSpPr>
-          <p:cNvPr id="26" name="">
-            <a:extLst xmlns:a="http://schemas.openxmlformats.org/drawingml/2006/main">
-              <a:ext uri="{FF2B5EF4-FFF2-40B4-BE49-F238E27FC236}">
-                <a16:creationId xmlns:a16="http://schemas.microsoft.com/office/drawing/2014/main" id="{7282E7B0-1EEE-4210-99EB-2A78745EEBE5}"/>
-              </a:ext>
-            </a:extLst>
-          </p:cNvPr>
-          <p:cNvSpPr>
-            <a:spLocks xmlns:a="http://schemas.openxmlformats.org/drawingml/2006/main" noGrp="1"/>
-          </p:cNvSpPr>
-          <p:nvPr/>
-        </p:nvSpPr>
-        <p:spPr>
-          <a:xfrm xmlns:a="http://schemas.openxmlformats.org/drawingml/2006/main">
-            <a:off x="6496050" y="2990850"/>
-            <a:ext cx="457200" cy="171450"/>
-          </a:xfrm>
-          <a:prstGeom xmlns:a="http://schemas.openxmlformats.org/drawingml/2006/main" prst="rect">
-            <a:avLst/>
-          </a:prstGeom>
-          <a:noFill xmlns:a="http://schemas.openxmlformats.org/drawingml/2006/main"/>
-          <a:ln xmlns:a="http://schemas.openxmlformats.org/drawingml/2006/main" w="0">
-            <a:noFill/>
-            <a:prstDash val="solid"/>
-          </a:ln>
-        </p:spPr>
-        <p:txBody>
-          <a:bodyPr xmlns:a="http://schemas.openxmlformats.org/drawingml/2006/main"/>
-          <a:lstStyle xmlns:a="http://schemas.openxmlformats.org/drawingml/2006/main"/>
-          <a:p xmlns:a="http://schemas.openxmlformats.org/drawingml/2006/main">
-            <a:pPr algn="l">
-              <a:defRPr sz="900" b="1">
-                <a:solidFill>
-                  <a:srgbClr val="57534E"/>
-                </a:solidFill>
-              </a:defRPr>
-            </a:pPr>
-            <a:r>
-              <a:rPr sz="900" b="1">
-                <a:solidFill>
-                  <a:srgbClr val="57534E"/>
-                </a:solidFill>
-              </a:rPr>
-              <a:t>第 3 圈</a:t>
-            </a:r>
-          </a:p>
-        </p:txBody>
-      </p:sp>
-      <p:sp>
-        <p:nvSpPr>
-          <p:cNvPr id="27" name="">
-            <a:extLst xmlns:a="http://schemas.openxmlformats.org/drawingml/2006/main">
-              <a:ext uri="{FF2B5EF4-FFF2-40B4-BE49-F238E27FC236}">
-                <a16:creationId xmlns:a16="http://schemas.microsoft.com/office/drawing/2014/main" id="{3FFB372A-F24F-44A4-8437-0B8B7CB45F69}"/>
-              </a:ext>
-            </a:extLst>
-          </p:cNvPr>
-          <p:cNvSpPr>
-            <a:spLocks xmlns:a="http://schemas.openxmlformats.org/drawingml/2006/main" noGrp="1"/>
-          </p:cNvSpPr>
-          <p:nvPr/>
-        </p:nvSpPr>
-        <p:spPr>
-          <a:xfrm xmlns:a="http://schemas.openxmlformats.org/drawingml/2006/main">
-            <a:off x="6362700" y="3333750"/>
-            <a:ext cx="1714500" cy="323850"/>
-          </a:xfrm>
-          <a:prstGeom xmlns:a="http://schemas.openxmlformats.org/drawingml/2006/main" prst="rect">
-            <a:avLst/>
-          </a:prstGeom>
-          <a:noFill xmlns:a="http://schemas.openxmlformats.org/drawingml/2006/main"/>
-          <a:ln xmlns:a="http://schemas.openxmlformats.org/drawingml/2006/main" w="0">
-            <a:noFill/>
-            <a:prstDash val="solid"/>
-          </a:ln>
-        </p:spPr>
-        <p:txBody>
-          <a:bodyPr xmlns:a="http://schemas.openxmlformats.org/drawingml/2006/main"/>
-          <a:lstStyle xmlns:a="http://schemas.openxmlformats.org/drawingml/2006/main"/>
-          <a:p xmlns:a="http://schemas.openxmlformats.org/drawingml/2006/main">
-            <a:pPr algn="l">
-              <a:defRPr sz="1950" b="1">
-                <a:solidFill>
-                  <a:srgbClr val="171717"/>
-                </a:solidFill>
-              </a:defRPr>
-            </a:pPr>
-            <a:r>
-              <a:rPr sz="1950" b="1">
-                <a:solidFill>
-                  <a:srgbClr val="171717"/>
-                </a:solidFill>
-              </a:rPr>
-              <a:t>挂通用兜底</a:t>
-            </a:r>
-          </a:p>
-        </p:txBody>
-      </p:sp>
-      <p:sp>
-        <p:nvSpPr>
-          <p:cNvPr id="28" name="">
-            <a:extLst xmlns:a="http://schemas.openxmlformats.org/drawingml/2006/main">
-              <a:ext uri="{FF2B5EF4-FFF2-40B4-BE49-F238E27FC236}">
-                <a16:creationId xmlns:a16="http://schemas.microsoft.com/office/drawing/2014/main" id="{FAB36C2E-B446-495D-9CA1-C9CB2DED84E5}"/>
-              </a:ext>
-            </a:extLst>
-          </p:cNvPr>
-          <p:cNvSpPr>
-            <a:spLocks xmlns:a="http://schemas.openxmlformats.org/drawingml/2006/main" noGrp="1"/>
-          </p:cNvSpPr>
-          <p:nvPr/>
-        </p:nvSpPr>
-        <p:spPr>
-          <a:xfrm xmlns:a="http://schemas.openxmlformats.org/drawingml/2006/main">
-            <a:off x="6362700" y="3790950"/>
-            <a:ext cx="1943100" cy="552450"/>
-          </a:xfrm>
-          <a:prstGeom xmlns:a="http://schemas.openxmlformats.org/drawingml/2006/main" prst="rect">
-            <a:avLst/>
-          </a:prstGeom>
-          <a:noFill xmlns:a="http://schemas.openxmlformats.org/drawingml/2006/main"/>
-          <a:ln xmlns:a="http://schemas.openxmlformats.org/drawingml/2006/main" w="0">
-            <a:noFill/>
-            <a:prstDash val="solid"/>
-          </a:ln>
-        </p:spPr>
-        <p:txBody>
-          <a:bodyPr xmlns:a="http://schemas.openxmlformats.org/drawingml/2006/main"/>
-          <a:lstStyle xmlns:a="http://schemas.openxmlformats.org/drawingml/2006/main"/>
-          <a:p xmlns:a="http://schemas.openxmlformats.org/drawingml/2006/main">
-            <a:pPr algn="l">
-              <a:defRPr sz="1275" b="0">
-                <a:solidFill>
-                  <a:srgbClr val="57534E"/>
-                </a:solidFill>
-              </a:defRPr>
-            </a:pPr>
-            <a:r>
-              <a:rPr sz="1275" b="0">
-                <a:solidFill>
-                  <a:srgbClr val="57534E"/>
-                </a:solidFill>
-              </a:rPr>
-              <a:t>兜不住的格式</a:t>
-            </a:r>
-          </a:p>
-          <a:p xmlns:a="http://schemas.openxmlformats.org/drawingml/2006/main">
-            <a:pPr algn="l">
-              <a:defRPr sz="1275" b="0">
-                <a:solidFill>
-                  <a:srgbClr val="57534E"/>
-                </a:solidFill>
-              </a:defRPr>
-            </a:pPr>
-            <a:r>
-              <a:rPr sz="1275" b="0">
-                <a:solidFill>
-                  <a:srgbClr val="57534E"/>
-                </a:solidFill>
-              </a:rPr>
-              <a:t>走 generic / markitdown</a:t>
-            </a:r>
-          </a:p>
-        </p:txBody>
-      </p:sp>
-      <p:sp>
-        <p:nvSpPr>
-          <p:cNvPr id="29" name="">
-            <a:extLst xmlns:a="http://schemas.openxmlformats.org/drawingml/2006/main">
-              <a:ext uri="{FF2B5EF4-FFF2-40B4-BE49-F238E27FC236}">
-                <a16:creationId xmlns:a16="http://schemas.microsoft.com/office/drawing/2014/main" id="{E2AF3106-6E22-4BB2-A8D7-4E0D31C365C1}"/>
-              </a:ext>
-            </a:extLst>
-          </p:cNvPr>
-          <p:cNvSpPr>
-            <a:spLocks xmlns:a="http://schemas.openxmlformats.org/drawingml/2006/main" noGrp="1"/>
-          </p:cNvSpPr>
-          <p:nvPr/>
-        </p:nvSpPr>
-        <p:spPr>
-          <a:xfrm xmlns:a="http://schemas.openxmlformats.org/drawingml/2006/main">
-            <a:off x="8572500" y="3524250"/>
-            <a:ext cx="266700" cy="228600"/>
-          </a:xfrm>
-          <a:prstGeom xmlns:a="http://schemas.openxmlformats.org/drawingml/2006/main" prst="rect">
-            <a:avLst/>
-          </a:prstGeom>
-          <a:noFill xmlns:a="http://schemas.openxmlformats.org/drawingml/2006/main"/>
-          <a:ln xmlns:a="http://schemas.openxmlformats.org/drawingml/2006/main" w="0">
-            <a:noFill/>
-            <a:prstDash val="solid"/>
-          </a:ln>
-        </p:spPr>
-        <p:txBody>
-          <a:bodyPr xmlns:a="http://schemas.openxmlformats.org/drawingml/2006/main"/>
-          <a:lstStyle xmlns:a="http://schemas.openxmlformats.org/drawingml/2006/main"/>
-          <a:p xmlns:a="http://schemas.openxmlformats.org/drawingml/2006/main">
-            <a:pPr algn="ctr">
-              <a:defRPr sz="2100" b="1">
-                <a:solidFill>
-                  <a:srgbClr val="C96A1B"/>
-                </a:solidFill>
-              </a:defRPr>
-            </a:pPr>
-            <a:r>
-              <a:rPr sz="2100" b="1">
-                <a:solidFill>
-                  <a:srgbClr val="C96A1B"/>
-                </a:solidFill>
-              </a:rPr>
-              <a:t>→</a:t>
-            </a:r>
-          </a:p>
-        </p:txBody>
-      </p:sp>
-      <p:sp>
-        <p:nvSpPr>
-          <p:cNvPr id="30" name="">
-            <a:extLst xmlns:a="http://schemas.openxmlformats.org/drawingml/2006/main">
-              <a:ext uri="{FF2B5EF4-FFF2-40B4-BE49-F238E27FC236}">
-                <a16:creationId xmlns:a16="http://schemas.microsoft.com/office/drawing/2014/main" id="{007A982B-EB20-4C72-9FE4-B07423809523}"/>
-              </a:ext>
-            </a:extLst>
-          </p:cNvPr>
-          <p:cNvSpPr>
-            <a:spLocks xmlns:a="http://schemas.openxmlformats.org/drawingml/2006/main" noGrp="1"/>
-          </p:cNvSpPr>
-          <p:nvPr/>
-        </p:nvSpPr>
-        <p:spPr>
-          <a:xfrm xmlns:a="http://schemas.openxmlformats.org/drawingml/2006/main">
-            <a:off x="8915400" y="2724150"/>
-            <a:ext cx="2362200" cy="1866900"/>
-          </a:xfrm>
-          <a:prstGeom xmlns:a="http://schemas.openxmlformats.org/drawingml/2006/main" prst="roundRect">
-            <a:avLst>
-              <a:gd name="adj" fmla="val 12245"/>
-            </a:avLst>
-          </a:prstGeom>
-          <a:solidFill xmlns:a="http://schemas.openxmlformats.org/drawingml/2006/main">
-            <a:srgbClr val="EDE4D7"/>
-          </a:solidFill>
-          <a:ln xmlns:a="http://schemas.openxmlformats.org/drawingml/2006/main" w="0">
-            <a:solidFill>
-              <a:srgbClr val="EDE4D7"/>
-            </a:solidFill>
-            <a:prstDash val="solid"/>
-          </a:ln>
-        </p:spPr>
-        <p:style>
-          <a:lnRef xmlns:a="http://schemas.openxmlformats.org/drawingml/2006/main" idx="0"/>
-          <a:fillRef xmlns:a="http://schemas.openxmlformats.org/drawingml/2006/main" idx="0"/>
-          <a:effectRef xmlns:a="http://schemas.openxmlformats.org/drawingml/2006/main" idx="4"/>
-          <a:fontRef xmlns:a="http://schemas.openxmlformats.org/drawingml/2006/main" idx="major"/>
-        </p:style>
-      </p:sp>
-      <p:sp>
-        <p:nvSpPr>
-          <p:cNvPr id="31" name="">
-            <a:extLst xmlns:a="http://schemas.openxmlformats.org/drawingml/2006/main">
-              <a:ext uri="{FF2B5EF4-FFF2-40B4-BE49-F238E27FC236}">
-                <a16:creationId xmlns:a16="http://schemas.microsoft.com/office/drawing/2014/main" id="{4504473A-C9BF-4E57-A3EA-201EF80E7C68}"/>
-              </a:ext>
-            </a:extLst>
-          </p:cNvPr>
-          <p:cNvSpPr>
-            <a:spLocks xmlns:a="http://schemas.openxmlformats.org/drawingml/2006/main" noGrp="1"/>
-          </p:cNvSpPr>
-          <p:nvPr/>
-        </p:nvSpPr>
-        <p:spPr>
-          <a:xfrm xmlns:a="http://schemas.openxmlformats.org/drawingml/2006/main">
-            <a:off x="9105900" y="2914650"/>
-            <a:ext cx="723900" cy="323850"/>
-          </a:xfrm>
-          <a:prstGeom xmlns:a="http://schemas.openxmlformats.org/drawingml/2006/main" prst="roundRect">
-            <a:avLst>
-              <a:gd name="adj" fmla="val 50000"/>
-            </a:avLst>
-          </a:prstGeom>
-          <a:solidFill xmlns:a="http://schemas.openxmlformats.org/drawingml/2006/main">
-            <a:srgbClr val="FFFDF8"/>
-          </a:solidFill>
-          <a:ln xmlns:a="http://schemas.openxmlformats.org/drawingml/2006/main" w="0">
-            <a:solidFill>
-              <a:srgbClr val="FFFDF8"/>
-            </a:solidFill>
-            <a:prstDash val="solid"/>
-          </a:ln>
-        </p:spPr>
-      </p:sp>
-      <p:sp>
-        <p:nvSpPr>
-          <p:cNvPr id="32" name="">
-            <a:extLst xmlns:a="http://schemas.openxmlformats.org/drawingml/2006/main">
-              <a:ext uri="{FF2B5EF4-FFF2-40B4-BE49-F238E27FC236}">
-                <a16:creationId xmlns:a16="http://schemas.microsoft.com/office/drawing/2014/main" id="{A1644681-6BE1-41DE-A38D-D78C897198C4}"/>
-              </a:ext>
-            </a:extLst>
-          </p:cNvPr>
-          <p:cNvSpPr>
-            <a:spLocks xmlns:a="http://schemas.openxmlformats.org/drawingml/2006/main" noGrp="1"/>
-          </p:cNvSpPr>
-          <p:nvPr/>
-        </p:nvSpPr>
-        <p:spPr>
-          <a:xfrm xmlns:a="http://schemas.openxmlformats.org/drawingml/2006/main">
-            <a:off x="9239250" y="2990850"/>
-            <a:ext cx="457200" cy="171450"/>
-          </a:xfrm>
-          <a:prstGeom xmlns:a="http://schemas.openxmlformats.org/drawingml/2006/main" prst="rect">
-            <a:avLst/>
-          </a:prstGeom>
-          <a:noFill xmlns:a="http://schemas.openxmlformats.org/drawingml/2006/main"/>
-          <a:ln xmlns:a="http://schemas.openxmlformats.org/drawingml/2006/main" w="0">
-            <a:noFill/>
-            <a:prstDash val="solid"/>
-          </a:ln>
-        </p:spPr>
-        <p:txBody>
-          <a:bodyPr xmlns:a="http://schemas.openxmlformats.org/drawingml/2006/main"/>
-          <a:lstStyle xmlns:a="http://schemas.openxmlformats.org/drawingml/2006/main"/>
-          <a:p xmlns:a="http://schemas.openxmlformats.org/drawingml/2006/main">
-            <a:pPr algn="l">
-              <a:defRPr sz="900" b="1">
-                <a:solidFill>
-                  <a:srgbClr val="57534E"/>
-                </a:solidFill>
-              </a:defRPr>
-            </a:pPr>
-            <a:r>
-              <a:rPr sz="900" b="1">
-                <a:solidFill>
-                  <a:srgbClr val="57534E"/>
-                </a:solidFill>
-              </a:rPr>
-              <a:t>第 4 圈</a:t>
-            </a:r>
-          </a:p>
-        </p:txBody>
-      </p:sp>
-      <p:sp>
-        <p:nvSpPr>
-          <p:cNvPr id="33" name="">
-            <a:extLst xmlns:a="http://schemas.openxmlformats.org/drawingml/2006/main">
-              <a:ext uri="{FF2B5EF4-FFF2-40B4-BE49-F238E27FC236}">
-                <a16:creationId xmlns:a16="http://schemas.microsoft.com/office/drawing/2014/main" id="{AE0AC0D9-E023-45C3-98B6-97ADA1F3A2A4}"/>
-              </a:ext>
-            </a:extLst>
-          </p:cNvPr>
-          <p:cNvSpPr>
-            <a:spLocks xmlns:a="http://schemas.openxmlformats.org/drawingml/2006/main" noGrp="1"/>
-          </p:cNvSpPr>
-          <p:nvPr/>
-        </p:nvSpPr>
-        <p:spPr>
-          <a:xfrm xmlns:a="http://schemas.openxmlformats.org/drawingml/2006/main">
-            <a:off x="9105900" y="3333750"/>
-            <a:ext cx="1714500" cy="323850"/>
-          </a:xfrm>
-          <a:prstGeom xmlns:a="http://schemas.openxmlformats.org/drawingml/2006/main" prst="rect">
-            <a:avLst/>
-          </a:prstGeom>
-          <a:noFill xmlns:a="http://schemas.openxmlformats.org/drawingml/2006/main"/>
-          <a:ln xmlns:a="http://schemas.openxmlformats.org/drawingml/2006/main" w="0">
-            <a:noFill/>
-            <a:prstDash val="solid"/>
-          </a:ln>
-        </p:spPr>
-        <p:txBody>
-          <a:bodyPr xmlns:a="http://schemas.openxmlformats.org/drawingml/2006/main"/>
-          <a:lstStyle xmlns:a="http://schemas.openxmlformats.org/drawingml/2006/main"/>
-          <a:p xmlns:a="http://schemas.openxmlformats.org/drawingml/2006/main">
-            <a:pPr algn="l">
-              <a:defRPr sz="1950" b="1">
-                <a:solidFill>
-                  <a:srgbClr val="171717"/>
-                </a:solidFill>
-              </a:defRPr>
-            </a:pPr>
-            <a:r>
-              <a:rPr sz="1950" b="1">
-                <a:solidFill>
-                  <a:srgbClr val="171717"/>
-                </a:solidFill>
-              </a:rPr>
-              <a:t>提共享后处理</a:t>
-            </a:r>
-          </a:p>
-        </p:txBody>
-      </p:sp>
-      <p:sp>
-        <p:nvSpPr>
-          <p:cNvPr id="34" name="">
-            <a:extLst xmlns:a="http://schemas.openxmlformats.org/drawingml/2006/main">
-              <a:ext uri="{FF2B5EF4-FFF2-40B4-BE49-F238E27FC236}">
-                <a16:creationId xmlns:a16="http://schemas.microsoft.com/office/drawing/2014/main" id="{3BBFA59C-2BE0-4824-96E2-083724FDBB2A}"/>
-              </a:ext>
-            </a:extLst>
-          </p:cNvPr>
-          <p:cNvSpPr>
-            <a:spLocks xmlns:a="http://schemas.openxmlformats.org/drawingml/2006/main" noGrp="1"/>
-          </p:cNvSpPr>
-          <p:nvPr/>
-        </p:nvSpPr>
-        <p:spPr>
-          <a:xfrm xmlns:a="http://schemas.openxmlformats.org/drawingml/2006/main">
-            <a:off x="9105900" y="3790950"/>
-            <a:ext cx="1943100" cy="552450"/>
-          </a:xfrm>
-          <a:prstGeom xmlns:a="http://schemas.openxmlformats.org/drawingml/2006/main" prst="rect">
-            <a:avLst/>
-          </a:prstGeom>
-          <a:noFill xmlns:a="http://schemas.openxmlformats.org/drawingml/2006/main"/>
-          <a:ln xmlns:a="http://schemas.openxmlformats.org/drawingml/2006/main" w="0">
-            <a:noFill/>
-            <a:prstDash val="solid"/>
-          </a:ln>
-        </p:spPr>
-        <p:txBody>
-          <a:bodyPr xmlns:a="http://schemas.openxmlformats.org/drawingml/2006/main"/>
-          <a:lstStyle xmlns:a="http://schemas.openxmlformats.org/drawingml/2006/main"/>
-          <a:p xmlns:a="http://schemas.openxmlformats.org/drawingml/2006/main">
-            <a:pPr algn="l">
-              <a:defRPr sz="1275" b="0">
-                <a:solidFill>
-                  <a:srgbClr val="57534E"/>
-                </a:solidFill>
-              </a:defRPr>
-            </a:pPr>
-            <a:r>
-              <a:rPr sz="1275" b="0">
-                <a:solidFill>
-                  <a:srgbClr val="57534E"/>
-                </a:solidFill>
-              </a:rPr>
-              <a:t>最后收敛出</a:t>
-            </a:r>
-          </a:p>
-          <a:p xmlns:a="http://schemas.openxmlformats.org/drawingml/2006/main">
-            <a:pPr algn="l">
-              <a:defRPr sz="1275" b="0">
-                <a:solidFill>
-                  <a:srgbClr val="57534E"/>
-                </a:solidFill>
-              </a:defRPr>
-            </a:pPr>
-            <a:r>
-              <a:rPr sz="1275" b="0">
-                <a:solidFill>
-                  <a:srgbClr val="57534E"/>
-                </a:solidFill>
-              </a:rPr>
-              <a:t>sanitize_text / table_to_list</a:t>
-            </a:r>
-          </a:p>
-        </p:txBody>
-      </p:sp>
-      <p:sp>
-        <p:nvSpPr>
-          <p:cNvPr id="35" name="">
-            <a:extLst xmlns:a="http://schemas.openxmlformats.org/drawingml/2006/main">
-              <a:ext uri="{FF2B5EF4-FFF2-40B4-BE49-F238E27FC236}">
-                <a16:creationId xmlns:a16="http://schemas.microsoft.com/office/drawing/2014/main" id="{E2158878-AEA8-4744-82C8-D0F6B77C1EF6}"/>
-              </a:ext>
-            </a:extLst>
-          </p:cNvPr>
-          <p:cNvSpPr>
-            <a:spLocks xmlns:a="http://schemas.openxmlformats.org/drawingml/2006/main" noGrp="1"/>
-          </p:cNvSpPr>
-          <p:nvPr/>
-        </p:nvSpPr>
-        <p:spPr>
-          <a:xfrm xmlns:a="http://schemas.openxmlformats.org/drawingml/2006/main">
-            <a:off x="685800" y="4914900"/>
-            <a:ext cx="10820400" cy="1066800"/>
-          </a:xfrm>
-          <a:prstGeom xmlns:a="http://schemas.openxmlformats.org/drawingml/2006/main" prst="roundRect">
-            <a:avLst>
-              <a:gd name="adj" fmla="val 21429"/>
-            </a:avLst>
-          </a:prstGeom>
-          <a:solidFill xmlns:a="http://schemas.openxmlformats.org/drawingml/2006/main">
-            <a:srgbClr val="24211D"/>
-          </a:solidFill>
-          <a:ln xmlns:a="http://schemas.openxmlformats.org/drawingml/2006/main" w="0">
-            <a:solidFill>
-              <a:srgbClr val="24211D"/>
-            </a:solidFill>
-            <a:prstDash val="solid"/>
-          </a:ln>
-        </p:spPr>
-        <p:style>
-          <a:lnRef xmlns:a="http://schemas.openxmlformats.org/drawingml/2006/main" idx="0"/>
-          <a:fillRef xmlns:a="http://schemas.openxmlformats.org/drawingml/2006/main" idx="0"/>
-          <a:effectRef xmlns:a="http://schemas.openxmlformats.org/drawingml/2006/main" idx="4"/>
-          <a:fontRef xmlns:a="http://schemas.openxmlformats.org/drawingml/2006/main" idx="major"/>
-        </p:style>
-      </p:sp>
-      <p:sp>
-        <p:nvSpPr>
-          <p:cNvPr id="36" name="">
-            <a:extLst xmlns:a="http://schemas.openxmlformats.org/drawingml/2006/main">
-              <a:ext uri="{FF2B5EF4-FFF2-40B4-BE49-F238E27FC236}">
-                <a16:creationId xmlns:a16="http://schemas.microsoft.com/office/drawing/2014/main" id="{90EE69CC-7694-4161-8A2E-A4DC21E4DCC9}"/>
-              </a:ext>
-            </a:extLst>
-          </p:cNvPr>
-          <p:cNvSpPr>
-            <a:spLocks xmlns:a="http://schemas.openxmlformats.org/drawingml/2006/main" noGrp="1"/>
-          </p:cNvSpPr>
-          <p:nvPr/>
-        </p:nvSpPr>
-        <p:spPr>
-          <a:xfrm xmlns:a="http://schemas.openxmlformats.org/drawingml/2006/main">
-            <a:off x="952500" y="5105400"/>
-            <a:ext cx="4953000" cy="476250"/>
-          </a:xfrm>
-          <a:prstGeom xmlns:a="http://schemas.openxmlformats.org/drawingml/2006/main" prst="rect">
-            <a:avLst/>
-          </a:prstGeom>
-          <a:noFill xmlns:a="http://schemas.openxmlformats.org/drawingml/2006/main"/>
-          <a:ln xmlns:a="http://schemas.openxmlformats.org/drawingml/2006/main" w="0">
-            <a:noFill/>
-            <a:prstDash val="solid"/>
-          </a:ln>
-        </p:spPr>
-        <p:txBody>
-          <a:bodyPr xmlns:a="http://schemas.openxmlformats.org/drawingml/2006/main"/>
-          <a:lstStyle xmlns:a="http://schemas.openxmlformats.org/drawingml/2006/main"/>
-          <a:p xmlns:a="http://schemas.openxmlformats.org/drawingml/2006/main">
-            <a:pPr algn="l">
-              <a:defRPr sz="1350" b="1">
-                <a:solidFill>
-                  <a:srgbClr val="FFFFFF"/>
-                </a:solidFill>
-              </a:defRPr>
-            </a:pPr>
-            <a:r>
-              <a:rPr sz="1350" b="1">
-                <a:solidFill>
-                  <a:srgbClr val="FFFFFF"/>
-                </a:solidFill>
-              </a:rPr>
-              <a:t>这就是“年轮”在代码里的样子：新增分支、补伤疤、挂 fallback、再把通用处理提成 shared。</a:t>
-            </a:r>
-          </a:p>
-        </p:txBody>
-      </p:sp>
-      <p:sp>
-        <p:nvSpPr>
-          <p:cNvPr id="37" name="">
-            <a:extLst xmlns:a="http://schemas.openxmlformats.org/drawingml/2006/main">
-              <a:ext uri="{FF2B5EF4-FFF2-40B4-BE49-F238E27FC236}">
-                <a16:creationId xmlns:a16="http://schemas.microsoft.com/office/drawing/2014/main" id="{92C90E32-E291-48DF-954E-4164CC6C7B13}"/>
-              </a:ext>
-            </a:extLst>
-          </p:cNvPr>
-          <p:cNvSpPr>
-            <a:spLocks xmlns:a="http://schemas.openxmlformats.org/drawingml/2006/main" noGrp="1"/>
-          </p:cNvSpPr>
-          <p:nvPr/>
-        </p:nvSpPr>
-        <p:spPr>
-          <a:xfrm xmlns:a="http://schemas.openxmlformats.org/drawingml/2006/main">
-            <a:off x="952500" y="5610225"/>
-            <a:ext cx="3619500" cy="171450"/>
-          </a:xfrm>
-          <a:prstGeom xmlns:a="http://schemas.openxmlformats.org/drawingml/2006/main" prst="rect">
-            <a:avLst/>
-          </a:prstGeom>
-          <a:noFill xmlns:a="http://schemas.openxmlformats.org/drawingml/2006/main"/>
-          <a:ln xmlns:a="http://schemas.openxmlformats.org/drawingml/2006/main" w="0">
-            <a:noFill/>
-            <a:prstDash val="solid"/>
-          </a:ln>
-        </p:spPr>
-        <p:txBody>
-          <a:bodyPr xmlns:a="http://schemas.openxmlformats.org/drawingml/2006/main"/>
-          <a:lstStyle xmlns:a="http://schemas.openxmlformats.org/drawingml/2006/main"/>
-          <a:p xmlns:a="http://schemas.openxmlformats.org/drawingml/2006/main">
-            <a:pPr algn="l">
-              <a:defRPr sz="1125" b="0">
-                <a:solidFill>
-                  <a:srgbClr val="D6D3D1"/>
-                </a:solidFill>
-              </a:defRPr>
-            </a:pPr>
-            <a:r>
-              <a:rPr sz="1125" b="0">
-                <a:solidFill>
-                  <a:srgbClr val="D6D3D1"/>
-                </a:solidFill>
-              </a:rPr>
-              <a:t>然后在设计 md 里，再把这些变化记成 iteration_log。</a:t>
-            </a:r>
-          </a:p>
-        </p:txBody>
-      </p:sp>
-      <p:sp>
-        <p:nvSpPr>
-          <p:cNvPr id="38" name="">
-            <a:extLst xmlns:a="http://schemas.openxmlformats.org/drawingml/2006/main">
-              <a:ext uri="{FF2B5EF4-FFF2-40B4-BE49-F238E27FC236}">
-                <a16:creationId xmlns:a16="http://schemas.microsoft.com/office/drawing/2014/main" id="{97A577CD-DE1A-4B12-B759-AFD76959285D}"/>
-              </a:ext>
-            </a:extLst>
-          </p:cNvPr>
-          <p:cNvSpPr>
-            <a:spLocks xmlns:a="http://schemas.openxmlformats.org/drawingml/2006/main" noGrp="1"/>
-          </p:cNvSpPr>
-          <p:nvPr/>
-        </p:nvSpPr>
-        <p:spPr>
-          <a:xfrm xmlns:a="http://schemas.openxmlformats.org/drawingml/2006/main">
-            <a:off x="6591300" y="5105400"/>
-            <a:ext cx="4095750" cy="685800"/>
-          </a:xfrm>
-          <a:prstGeom xmlns:a="http://schemas.openxmlformats.org/drawingml/2006/main" prst="roundRect">
-            <a:avLst>
-              <a:gd name="adj" fmla="val 22222"/>
+              <a:gd name="adj" fmla="val 18750"/>
             </a:avLst>
           </a:prstGeom>
           <a:solidFill xmlns:a="http://schemas.openxmlformats.org/drawingml/2006/main">
@@ -5956,103 +5768,691 @@
             <a:prstDash val="solid"/>
           </a:ln>
         </p:spPr>
+        <p:style>
+          <a:lnRef xmlns:a="http://schemas.openxmlformats.org/drawingml/2006/main" idx="0"/>
+          <a:fillRef xmlns:a="http://schemas.openxmlformats.org/drawingml/2006/main" idx="0"/>
+          <a:effectRef xmlns:a="http://schemas.openxmlformats.org/drawingml/2006/main" idx="4"/>
+          <a:fontRef xmlns:a="http://schemas.openxmlformats.org/drawingml/2006/main" idx="major"/>
+        </p:style>
+      </p:sp>
+      <p:sp>
+        <p:nvSpPr>
+          <p:cNvPr id="28" name="">
+            <a:extLst xmlns:a="http://schemas.openxmlformats.org/drawingml/2006/main">
+              <a:ext uri="{FF2B5EF4-FFF2-40B4-BE49-F238E27FC236}">
+                <a16:creationId xmlns:a16="http://schemas.microsoft.com/office/drawing/2014/main" id="{369FFB42-6DB1-4D4F-BD10-B0562303BD98}"/>
+              </a:ext>
+            </a:extLst>
+          </p:cNvPr>
+          <p:cNvSpPr>
+            <a:spLocks xmlns:a="http://schemas.openxmlformats.org/drawingml/2006/main" noGrp="1"/>
+          </p:cNvSpPr>
+          <p:nvPr/>
+        </p:nvSpPr>
+        <p:spPr>
+          <a:xfrm xmlns:a="http://schemas.openxmlformats.org/drawingml/2006/main">
+            <a:off x="4305300" y="2876550"/>
+            <a:ext cx="2095500" cy="285750"/>
+          </a:xfrm>
+          <a:prstGeom xmlns:a="http://schemas.openxmlformats.org/drawingml/2006/main" prst="rect">
+            <a:avLst/>
+          </a:prstGeom>
+          <a:noFill xmlns:a="http://schemas.openxmlformats.org/drawingml/2006/main"/>
+          <a:ln xmlns:a="http://schemas.openxmlformats.org/drawingml/2006/main" w="0">
+            <a:noFill/>
+            <a:prstDash val="solid"/>
+          </a:ln>
+        </p:spPr>
+        <p:txBody>
+          <a:bodyPr xmlns:a="http://schemas.openxmlformats.org/drawingml/2006/main"/>
+          <a:lstStyle xmlns:a="http://schemas.openxmlformats.org/drawingml/2006/main"/>
+          <a:p xmlns:a="http://schemas.openxmlformats.org/drawingml/2006/main">
+            <a:pPr algn="l">
+              <a:defRPr sz="1950" b="1">
+                <a:solidFill>
+                  <a:srgbClr val="171717"/>
+                </a:solidFill>
+              </a:defRPr>
+            </a:pPr>
+            <a:r>
+              <a:rPr sz="1950" b="1">
+                <a:solidFill>
+                  <a:srgbClr val="171717"/>
+                </a:solidFill>
+              </a:rPr>
+              <a:t>先长分支</a:t>
+            </a:r>
+          </a:p>
+        </p:txBody>
+      </p:sp>
+      <p:sp>
+        <p:nvSpPr>
+          <p:cNvPr id="29" name="">
+            <a:extLst xmlns:a="http://schemas.openxmlformats.org/drawingml/2006/main">
+              <a:ext uri="{FF2B5EF4-FFF2-40B4-BE49-F238E27FC236}">
+                <a16:creationId xmlns:a16="http://schemas.microsoft.com/office/drawing/2014/main" id="{40632CA6-3DA5-456B-BA61-1B059EF36D00}"/>
+              </a:ext>
+            </a:extLst>
+          </p:cNvPr>
+          <p:cNvSpPr>
+            <a:spLocks xmlns:a="http://schemas.openxmlformats.org/drawingml/2006/main" noGrp="1"/>
+          </p:cNvSpPr>
+          <p:nvPr/>
+        </p:nvSpPr>
+        <p:spPr>
+          <a:xfrm xmlns:a="http://schemas.openxmlformats.org/drawingml/2006/main">
+            <a:off x="4305300" y="3314700"/>
+            <a:ext cx="2857500" cy="381000"/>
+          </a:xfrm>
+          <a:prstGeom xmlns:a="http://schemas.openxmlformats.org/drawingml/2006/main" prst="rect">
+            <a:avLst/>
+          </a:prstGeom>
+          <a:noFill xmlns:a="http://schemas.openxmlformats.org/drawingml/2006/main"/>
+          <a:ln xmlns:a="http://schemas.openxmlformats.org/drawingml/2006/main" w="0">
+            <a:noFill/>
+            <a:prstDash val="solid"/>
+          </a:ln>
+        </p:spPr>
+        <p:txBody>
+          <a:bodyPr xmlns:a="http://schemas.openxmlformats.org/drawingml/2006/main"/>
+          <a:lstStyle xmlns:a="http://schemas.openxmlformats.org/drawingml/2006/main"/>
+          <a:p xmlns:a="http://schemas.openxmlformats.org/drawingml/2006/main">
+            <a:pPr algn="l">
+              <a:defRPr sz="1200" b="0">
+                <a:solidFill>
+                  <a:srgbClr val="57534E"/>
+                </a:solidFill>
+              </a:defRPr>
+            </a:pPr>
+            <a:r>
+              <a:rPr sz="1200" b="0">
+                <a:solidFill>
+                  <a:srgbClr val="57534E"/>
+                </a:solidFill>
+              </a:rPr>
+              <a:t>suffix 分流</a:t>
+            </a:r>
+          </a:p>
+          <a:p xmlns:a="http://schemas.openxmlformats.org/drawingml/2006/main">
+            <a:pPr algn="l">
+              <a:defRPr sz="1200" b="0">
+                <a:solidFill>
+                  <a:srgbClr val="57534E"/>
+                </a:solidFill>
+              </a:defRPr>
+            </a:pPr>
+            <a:r>
+              <a:rPr sz="1200" b="0">
+                <a:solidFill>
+                  <a:srgbClr val="57534E"/>
+                </a:solidFill>
+              </a:rPr>
+              <a:t>pdf / docx / xlsx / pptx</a:t>
+            </a:r>
+          </a:p>
+        </p:txBody>
+      </p:sp>
+      <p:sp>
+        <p:nvSpPr>
+          <p:cNvPr id="30" name="">
+            <a:extLst xmlns:a="http://schemas.openxmlformats.org/drawingml/2006/main">
+              <a:ext uri="{FF2B5EF4-FFF2-40B4-BE49-F238E27FC236}">
+                <a16:creationId xmlns:a16="http://schemas.microsoft.com/office/drawing/2014/main" id="{CEA7EBEA-4471-4CB2-962B-9EE0BA431D80}"/>
+              </a:ext>
+            </a:extLst>
+          </p:cNvPr>
+          <p:cNvSpPr>
+            <a:spLocks xmlns:a="http://schemas.openxmlformats.org/drawingml/2006/main" noGrp="1"/>
+          </p:cNvSpPr>
+          <p:nvPr/>
+        </p:nvSpPr>
+        <p:spPr>
+          <a:xfrm xmlns:a="http://schemas.openxmlformats.org/drawingml/2006/main">
+            <a:off x="7772400" y="2647950"/>
+            <a:ext cx="3467100" cy="1219200"/>
+          </a:xfrm>
+          <a:prstGeom xmlns:a="http://schemas.openxmlformats.org/drawingml/2006/main" prst="roundRect">
+            <a:avLst>
+              <a:gd name="adj" fmla="val 18750"/>
+            </a:avLst>
+          </a:prstGeom>
+          <a:solidFill xmlns:a="http://schemas.openxmlformats.org/drawingml/2006/main">
+            <a:srgbClr val="DDEFEA"/>
+          </a:solidFill>
+          <a:ln xmlns:a="http://schemas.openxmlformats.org/drawingml/2006/main" w="0">
+            <a:solidFill>
+              <a:srgbClr val="DDEFEA"/>
+            </a:solidFill>
+            <a:prstDash val="solid"/>
+          </a:ln>
+        </p:spPr>
+        <p:style>
+          <a:lnRef xmlns:a="http://schemas.openxmlformats.org/drawingml/2006/main" idx="0"/>
+          <a:fillRef xmlns:a="http://schemas.openxmlformats.org/drawingml/2006/main" idx="0"/>
+          <a:effectRef xmlns:a="http://schemas.openxmlformats.org/drawingml/2006/main" idx="4"/>
+          <a:fontRef xmlns:a="http://schemas.openxmlformats.org/drawingml/2006/main" idx="major"/>
+        </p:style>
+      </p:sp>
+      <p:sp>
+        <p:nvSpPr>
+          <p:cNvPr id="31" name="">
+            <a:extLst xmlns:a="http://schemas.openxmlformats.org/drawingml/2006/main">
+              <a:ext uri="{FF2B5EF4-FFF2-40B4-BE49-F238E27FC236}">
+                <a16:creationId xmlns:a16="http://schemas.microsoft.com/office/drawing/2014/main" id="{05ECD83E-770E-4B19-AFFA-03ED5C1C492C}"/>
+              </a:ext>
+            </a:extLst>
+          </p:cNvPr>
+          <p:cNvSpPr>
+            <a:spLocks xmlns:a="http://schemas.openxmlformats.org/drawingml/2006/main" noGrp="1"/>
+          </p:cNvSpPr>
+          <p:nvPr/>
+        </p:nvSpPr>
+        <p:spPr>
+          <a:xfrm xmlns:a="http://schemas.openxmlformats.org/drawingml/2006/main">
+            <a:off x="8001000" y="2876550"/>
+            <a:ext cx="2095500" cy="285750"/>
+          </a:xfrm>
+          <a:prstGeom xmlns:a="http://schemas.openxmlformats.org/drawingml/2006/main" prst="rect">
+            <a:avLst/>
+          </a:prstGeom>
+          <a:noFill xmlns:a="http://schemas.openxmlformats.org/drawingml/2006/main"/>
+          <a:ln xmlns:a="http://schemas.openxmlformats.org/drawingml/2006/main" w="0">
+            <a:noFill/>
+            <a:prstDash val="solid"/>
+          </a:ln>
+        </p:spPr>
+        <p:txBody>
+          <a:bodyPr xmlns:a="http://schemas.openxmlformats.org/drawingml/2006/main"/>
+          <a:lstStyle xmlns:a="http://schemas.openxmlformats.org/drawingml/2006/main"/>
+          <a:p xmlns:a="http://schemas.openxmlformats.org/drawingml/2006/main">
+            <a:pPr algn="l">
+              <a:defRPr sz="1950" b="1">
+                <a:solidFill>
+                  <a:srgbClr val="171717"/>
+                </a:solidFill>
+              </a:defRPr>
+            </a:pPr>
+            <a:r>
+              <a:rPr sz="1950" b="1">
+                <a:solidFill>
+                  <a:srgbClr val="171717"/>
+                </a:solidFill>
+              </a:rPr>
+              <a:t>补坏样本</a:t>
+            </a:r>
+          </a:p>
+        </p:txBody>
+      </p:sp>
+      <p:sp>
+        <p:nvSpPr>
+          <p:cNvPr id="32" name="">
+            <a:extLst xmlns:a="http://schemas.openxmlformats.org/drawingml/2006/main">
+              <a:ext uri="{FF2B5EF4-FFF2-40B4-BE49-F238E27FC236}">
+                <a16:creationId xmlns:a16="http://schemas.microsoft.com/office/drawing/2014/main" id="{4F413B28-C512-47D0-A087-E2DD2793269E}"/>
+              </a:ext>
+            </a:extLst>
+          </p:cNvPr>
+          <p:cNvSpPr>
+            <a:spLocks xmlns:a="http://schemas.openxmlformats.org/drawingml/2006/main" noGrp="1"/>
+          </p:cNvSpPr>
+          <p:nvPr/>
+        </p:nvSpPr>
+        <p:spPr>
+          <a:xfrm xmlns:a="http://schemas.openxmlformats.org/drawingml/2006/main">
+            <a:off x="8001000" y="3314700"/>
+            <a:ext cx="2857500" cy="381000"/>
+          </a:xfrm>
+          <a:prstGeom xmlns:a="http://schemas.openxmlformats.org/drawingml/2006/main" prst="rect">
+            <a:avLst/>
+          </a:prstGeom>
+          <a:noFill xmlns:a="http://schemas.openxmlformats.org/drawingml/2006/main"/>
+          <a:ln xmlns:a="http://schemas.openxmlformats.org/drawingml/2006/main" w="0">
+            <a:noFill/>
+            <a:prstDash val="solid"/>
+          </a:ln>
+        </p:spPr>
+        <p:txBody>
+          <a:bodyPr xmlns:a="http://schemas.openxmlformats.org/drawingml/2006/main"/>
+          <a:lstStyle xmlns:a="http://schemas.openxmlformats.org/drawingml/2006/main"/>
+          <a:p xmlns:a="http://schemas.openxmlformats.org/drawingml/2006/main">
+            <a:pPr algn="l">
+              <a:defRPr sz="1200" b="0">
+                <a:solidFill>
+                  <a:srgbClr val="57534E"/>
+                </a:solidFill>
+              </a:defRPr>
+            </a:pPr>
+            <a:r>
+              <a:rPr sz="1200" b="0">
+                <a:solidFill>
+                  <a:srgbClr val="57534E"/>
+                </a:solidFill>
+              </a:rPr>
+              <a:t>扫描 PDF -&gt; _is_scanned</a:t>
+            </a:r>
+          </a:p>
+          <a:p xmlns:a="http://schemas.openxmlformats.org/drawingml/2006/main">
+            <a:pPr algn="l">
+              <a:defRPr sz="1200" b="0">
+                <a:solidFill>
+                  <a:srgbClr val="57534E"/>
+                </a:solidFill>
+              </a:defRPr>
+            </a:pPr>
+            <a:r>
+              <a:rPr sz="1200" b="0">
+                <a:solidFill>
+                  <a:srgbClr val="57534E"/>
+                </a:solidFill>
+              </a:rPr>
+              <a:t>坏 docx -&gt; _repair_docx_relationships</a:t>
+            </a:r>
+          </a:p>
+        </p:txBody>
+      </p:sp>
+      <p:sp>
+        <p:nvSpPr>
+          <p:cNvPr id="33" name="">
+            <a:extLst xmlns:a="http://schemas.openxmlformats.org/drawingml/2006/main">
+              <a:ext uri="{FF2B5EF4-FFF2-40B4-BE49-F238E27FC236}">
+                <a16:creationId xmlns:a16="http://schemas.microsoft.com/office/drawing/2014/main" id="{C7420F08-9B76-45D2-ADA2-F10F08889B66}"/>
+              </a:ext>
+            </a:extLst>
+          </p:cNvPr>
+          <p:cNvSpPr>
+            <a:spLocks xmlns:a="http://schemas.openxmlformats.org/drawingml/2006/main" noGrp="1"/>
+          </p:cNvSpPr>
+          <p:nvPr/>
+        </p:nvSpPr>
+        <p:spPr>
+          <a:xfrm xmlns:a="http://schemas.openxmlformats.org/drawingml/2006/main">
+            <a:off x="4076700" y="4095750"/>
+            <a:ext cx="3467100" cy="1219200"/>
+          </a:xfrm>
+          <a:prstGeom xmlns:a="http://schemas.openxmlformats.org/drawingml/2006/main" prst="roundRect">
+            <a:avLst>
+              <a:gd name="adj" fmla="val 18750"/>
+            </a:avLst>
+          </a:prstGeom>
+          <a:solidFill xmlns:a="http://schemas.openxmlformats.org/drawingml/2006/main">
+            <a:srgbClr val="F2DDC9"/>
+          </a:solidFill>
+          <a:ln xmlns:a="http://schemas.openxmlformats.org/drawingml/2006/main" w="0">
+            <a:solidFill>
+              <a:srgbClr val="F2DDC9"/>
+            </a:solidFill>
+            <a:prstDash val="solid"/>
+          </a:ln>
+        </p:spPr>
+        <p:style>
+          <a:lnRef xmlns:a="http://schemas.openxmlformats.org/drawingml/2006/main" idx="0"/>
+          <a:fillRef xmlns:a="http://schemas.openxmlformats.org/drawingml/2006/main" idx="0"/>
+          <a:effectRef xmlns:a="http://schemas.openxmlformats.org/drawingml/2006/main" idx="4"/>
+          <a:fontRef xmlns:a="http://schemas.openxmlformats.org/drawingml/2006/main" idx="major"/>
+        </p:style>
+      </p:sp>
+      <p:sp>
+        <p:nvSpPr>
+          <p:cNvPr id="34" name="">
+            <a:extLst xmlns:a="http://schemas.openxmlformats.org/drawingml/2006/main">
+              <a:ext uri="{FF2B5EF4-FFF2-40B4-BE49-F238E27FC236}">
+                <a16:creationId xmlns:a16="http://schemas.microsoft.com/office/drawing/2014/main" id="{B3113099-F9D9-4824-852A-1A80226DC341}"/>
+              </a:ext>
+            </a:extLst>
+          </p:cNvPr>
+          <p:cNvSpPr>
+            <a:spLocks xmlns:a="http://schemas.openxmlformats.org/drawingml/2006/main" noGrp="1"/>
+          </p:cNvSpPr>
+          <p:nvPr/>
+        </p:nvSpPr>
+        <p:spPr>
+          <a:xfrm xmlns:a="http://schemas.openxmlformats.org/drawingml/2006/main">
+            <a:off x="4305300" y="4324350"/>
+            <a:ext cx="2095500" cy="285750"/>
+          </a:xfrm>
+          <a:prstGeom xmlns:a="http://schemas.openxmlformats.org/drawingml/2006/main" prst="rect">
+            <a:avLst/>
+          </a:prstGeom>
+          <a:noFill xmlns:a="http://schemas.openxmlformats.org/drawingml/2006/main"/>
+          <a:ln xmlns:a="http://schemas.openxmlformats.org/drawingml/2006/main" w="0">
+            <a:noFill/>
+            <a:prstDash val="solid"/>
+          </a:ln>
+        </p:spPr>
+        <p:txBody>
+          <a:bodyPr xmlns:a="http://schemas.openxmlformats.org/drawingml/2006/main"/>
+          <a:lstStyle xmlns:a="http://schemas.openxmlformats.org/drawingml/2006/main"/>
+          <a:p xmlns:a="http://schemas.openxmlformats.org/drawingml/2006/main">
+            <a:pPr algn="l">
+              <a:defRPr sz="1950" b="1">
+                <a:solidFill>
+                  <a:srgbClr val="171717"/>
+                </a:solidFill>
+              </a:defRPr>
+            </a:pPr>
+            <a:r>
+              <a:rPr sz="1950" b="1">
+                <a:solidFill>
+                  <a:srgbClr val="171717"/>
+                </a:solidFill>
+              </a:rPr>
+              <a:t>挂通用兜底</a:t>
+            </a:r>
+          </a:p>
+        </p:txBody>
+      </p:sp>
+      <p:sp>
+        <p:nvSpPr>
+          <p:cNvPr id="35" name="">
+            <a:extLst xmlns:a="http://schemas.openxmlformats.org/drawingml/2006/main">
+              <a:ext uri="{FF2B5EF4-FFF2-40B4-BE49-F238E27FC236}">
+                <a16:creationId xmlns:a16="http://schemas.microsoft.com/office/drawing/2014/main" id="{964201FC-4D12-43BD-A685-8D7DA6AD02C5}"/>
+              </a:ext>
+            </a:extLst>
+          </p:cNvPr>
+          <p:cNvSpPr>
+            <a:spLocks xmlns:a="http://schemas.openxmlformats.org/drawingml/2006/main" noGrp="1"/>
+          </p:cNvSpPr>
+          <p:nvPr/>
+        </p:nvSpPr>
+        <p:spPr>
+          <a:xfrm xmlns:a="http://schemas.openxmlformats.org/drawingml/2006/main">
+            <a:off x="4305300" y="4762500"/>
+            <a:ext cx="2857500" cy="381000"/>
+          </a:xfrm>
+          <a:prstGeom xmlns:a="http://schemas.openxmlformats.org/drawingml/2006/main" prst="rect">
+            <a:avLst/>
+          </a:prstGeom>
+          <a:noFill xmlns:a="http://schemas.openxmlformats.org/drawingml/2006/main"/>
+          <a:ln xmlns:a="http://schemas.openxmlformats.org/drawingml/2006/main" w="0">
+            <a:noFill/>
+            <a:prstDash val="solid"/>
+          </a:ln>
+        </p:spPr>
+        <p:txBody>
+          <a:bodyPr xmlns:a="http://schemas.openxmlformats.org/drawingml/2006/main"/>
+          <a:lstStyle xmlns:a="http://schemas.openxmlformats.org/drawingml/2006/main"/>
+          <a:p xmlns:a="http://schemas.openxmlformats.org/drawingml/2006/main">
+            <a:pPr algn="l">
+              <a:defRPr sz="1200" b="0">
+                <a:solidFill>
+                  <a:srgbClr val="57534E"/>
+                </a:solidFill>
+              </a:defRPr>
+            </a:pPr>
+            <a:r>
+              <a:rPr sz="1200" b="0">
+                <a:solidFill>
+                  <a:srgbClr val="57534E"/>
+                </a:solidFill>
+              </a:rPr>
+              <a:t>兜不住的格式</a:t>
+            </a:r>
+          </a:p>
+          <a:p xmlns:a="http://schemas.openxmlformats.org/drawingml/2006/main">
+            <a:pPr algn="l">
+              <a:defRPr sz="1200" b="0">
+                <a:solidFill>
+                  <a:srgbClr val="57534E"/>
+                </a:solidFill>
+              </a:defRPr>
+            </a:pPr>
+            <a:r>
+              <a:rPr sz="1200" b="0">
+                <a:solidFill>
+                  <a:srgbClr val="57534E"/>
+                </a:solidFill>
+              </a:rPr>
+              <a:t>走 generic / markitdown</a:t>
+            </a:r>
+          </a:p>
+        </p:txBody>
+      </p:sp>
+      <p:sp>
+        <p:nvSpPr>
+          <p:cNvPr id="36" name="">
+            <a:extLst xmlns:a="http://schemas.openxmlformats.org/drawingml/2006/main">
+              <a:ext uri="{FF2B5EF4-FFF2-40B4-BE49-F238E27FC236}">
+                <a16:creationId xmlns:a16="http://schemas.microsoft.com/office/drawing/2014/main" id="{EFEB1D28-CC65-44E5-8737-00F6FAF9D39E}"/>
+              </a:ext>
+            </a:extLst>
+          </p:cNvPr>
+          <p:cNvSpPr>
+            <a:spLocks xmlns:a="http://schemas.openxmlformats.org/drawingml/2006/main" noGrp="1"/>
+          </p:cNvSpPr>
+          <p:nvPr/>
+        </p:nvSpPr>
+        <p:spPr>
+          <a:xfrm xmlns:a="http://schemas.openxmlformats.org/drawingml/2006/main">
+            <a:off x="7772400" y="4095750"/>
+            <a:ext cx="3467100" cy="1219200"/>
+          </a:xfrm>
+          <a:prstGeom xmlns:a="http://schemas.openxmlformats.org/drawingml/2006/main" prst="roundRect">
+            <a:avLst>
+              <a:gd name="adj" fmla="val 18750"/>
+            </a:avLst>
+          </a:prstGeom>
+          <a:solidFill xmlns:a="http://schemas.openxmlformats.org/drawingml/2006/main">
+            <a:srgbClr val="EDE4D7"/>
+          </a:solidFill>
+          <a:ln xmlns:a="http://schemas.openxmlformats.org/drawingml/2006/main" w="0">
+            <a:solidFill>
+              <a:srgbClr val="EDE4D7"/>
+            </a:solidFill>
+            <a:prstDash val="solid"/>
+          </a:ln>
+        </p:spPr>
+        <p:style>
+          <a:lnRef xmlns:a="http://schemas.openxmlformats.org/drawingml/2006/main" idx="0"/>
+          <a:fillRef xmlns:a="http://schemas.openxmlformats.org/drawingml/2006/main" idx="0"/>
+          <a:effectRef xmlns:a="http://schemas.openxmlformats.org/drawingml/2006/main" idx="4"/>
+          <a:fontRef xmlns:a="http://schemas.openxmlformats.org/drawingml/2006/main" idx="major"/>
+        </p:style>
+      </p:sp>
+      <p:sp>
+        <p:nvSpPr>
+          <p:cNvPr id="37" name="">
+            <a:extLst xmlns:a="http://schemas.openxmlformats.org/drawingml/2006/main">
+              <a:ext uri="{FF2B5EF4-FFF2-40B4-BE49-F238E27FC236}">
+                <a16:creationId xmlns:a16="http://schemas.microsoft.com/office/drawing/2014/main" id="{54796418-9AA0-4DB1-91E3-68FDF7C0C7F0}"/>
+              </a:ext>
+            </a:extLst>
+          </p:cNvPr>
+          <p:cNvSpPr>
+            <a:spLocks xmlns:a="http://schemas.openxmlformats.org/drawingml/2006/main" noGrp="1"/>
+          </p:cNvSpPr>
+          <p:nvPr/>
+        </p:nvSpPr>
+        <p:spPr>
+          <a:xfrm xmlns:a="http://schemas.openxmlformats.org/drawingml/2006/main">
+            <a:off x="8001000" y="4324350"/>
+            <a:ext cx="2095500" cy="285750"/>
+          </a:xfrm>
+          <a:prstGeom xmlns:a="http://schemas.openxmlformats.org/drawingml/2006/main" prst="rect">
+            <a:avLst/>
+          </a:prstGeom>
+          <a:noFill xmlns:a="http://schemas.openxmlformats.org/drawingml/2006/main"/>
+          <a:ln xmlns:a="http://schemas.openxmlformats.org/drawingml/2006/main" w="0">
+            <a:noFill/>
+            <a:prstDash val="solid"/>
+          </a:ln>
+        </p:spPr>
+        <p:txBody>
+          <a:bodyPr xmlns:a="http://schemas.openxmlformats.org/drawingml/2006/main"/>
+          <a:lstStyle xmlns:a="http://schemas.openxmlformats.org/drawingml/2006/main"/>
+          <a:p xmlns:a="http://schemas.openxmlformats.org/drawingml/2006/main">
+            <a:pPr algn="l">
+              <a:defRPr sz="1950" b="1">
+                <a:solidFill>
+                  <a:srgbClr val="171717"/>
+                </a:solidFill>
+              </a:defRPr>
+            </a:pPr>
+            <a:r>
+              <a:rPr sz="1950" b="1">
+                <a:solidFill>
+                  <a:srgbClr val="171717"/>
+                </a:solidFill>
+              </a:rPr>
+              <a:t>提共享后处理</a:t>
+            </a:r>
+          </a:p>
+        </p:txBody>
+      </p:sp>
+      <p:sp>
+        <p:nvSpPr>
+          <p:cNvPr id="38" name="">
+            <a:extLst xmlns:a="http://schemas.openxmlformats.org/drawingml/2006/main">
+              <a:ext uri="{FF2B5EF4-FFF2-40B4-BE49-F238E27FC236}">
+                <a16:creationId xmlns:a16="http://schemas.microsoft.com/office/drawing/2014/main" id="{1E2E19A3-2AE3-4BC1-B6AB-E2D1D2EEFBF1}"/>
+              </a:ext>
+            </a:extLst>
+          </p:cNvPr>
+          <p:cNvSpPr>
+            <a:spLocks xmlns:a="http://schemas.openxmlformats.org/drawingml/2006/main" noGrp="1"/>
+          </p:cNvSpPr>
+          <p:nvPr/>
+        </p:nvSpPr>
+        <p:spPr>
+          <a:xfrm xmlns:a="http://schemas.openxmlformats.org/drawingml/2006/main">
+            <a:off x="8001000" y="4762500"/>
+            <a:ext cx="2857500" cy="381000"/>
+          </a:xfrm>
+          <a:prstGeom xmlns:a="http://schemas.openxmlformats.org/drawingml/2006/main" prst="rect">
+            <a:avLst/>
+          </a:prstGeom>
+          <a:noFill xmlns:a="http://schemas.openxmlformats.org/drawingml/2006/main"/>
+          <a:ln xmlns:a="http://schemas.openxmlformats.org/drawingml/2006/main" w="0">
+            <a:noFill/>
+            <a:prstDash val="solid"/>
+          </a:ln>
+        </p:spPr>
+        <p:txBody>
+          <a:bodyPr xmlns:a="http://schemas.openxmlformats.org/drawingml/2006/main"/>
+          <a:lstStyle xmlns:a="http://schemas.openxmlformats.org/drawingml/2006/main"/>
+          <a:p xmlns:a="http://schemas.openxmlformats.org/drawingml/2006/main">
+            <a:pPr algn="l">
+              <a:defRPr sz="1200" b="0">
+                <a:solidFill>
+                  <a:srgbClr val="57534E"/>
+                </a:solidFill>
+              </a:defRPr>
+            </a:pPr>
+            <a:r>
+              <a:rPr sz="1200" b="0">
+                <a:solidFill>
+                  <a:srgbClr val="57534E"/>
+                </a:solidFill>
+              </a:rPr>
+              <a:t>最后收敛出</a:t>
+            </a:r>
+          </a:p>
+          <a:p xmlns:a="http://schemas.openxmlformats.org/drawingml/2006/main">
+            <a:pPr algn="l">
+              <a:defRPr sz="1200" b="0">
+                <a:solidFill>
+                  <a:srgbClr val="57534E"/>
+                </a:solidFill>
+              </a:defRPr>
+            </a:pPr>
+            <a:r>
+              <a:rPr sz="1200" b="0">
+                <a:solidFill>
+                  <a:srgbClr val="57534E"/>
+                </a:solidFill>
+              </a:rPr>
+              <a:t>sanitize_text / table_to_list</a:t>
+            </a:r>
+          </a:p>
+        </p:txBody>
       </p:sp>
       <p:sp>
         <p:nvSpPr>
           <p:cNvPr id="39" name="">
             <a:extLst xmlns:a="http://schemas.openxmlformats.org/drawingml/2006/main">
               <a:ext uri="{FF2B5EF4-FFF2-40B4-BE49-F238E27FC236}">
-                <a16:creationId xmlns:a16="http://schemas.microsoft.com/office/drawing/2014/main" id="{8F399C07-630F-4A17-846E-F8B3E068DDD9}"/>
-              </a:ext>
-            </a:extLst>
-          </p:cNvPr>
-          <p:cNvSpPr>
-            <a:spLocks xmlns:a="http://schemas.openxmlformats.org/drawingml/2006/main" noGrp="1"/>
-          </p:cNvSpPr>
-          <p:nvPr/>
-        </p:nvSpPr>
-        <p:spPr>
-          <a:xfrm xmlns:a="http://schemas.openxmlformats.org/drawingml/2006/main">
-            <a:off x="6800850" y="5257800"/>
-            <a:ext cx="3657600" cy="171450"/>
-          </a:xfrm>
-          <a:prstGeom xmlns:a="http://schemas.openxmlformats.org/drawingml/2006/main" prst="rect">
-            <a:avLst/>
-          </a:prstGeom>
-          <a:noFill xmlns:a="http://schemas.openxmlformats.org/drawingml/2006/main"/>
-          <a:ln xmlns:a="http://schemas.openxmlformats.org/drawingml/2006/main" w="0">
-            <a:noFill/>
-            <a:prstDash val="solid"/>
-          </a:ln>
-        </p:spPr>
-        <p:txBody>
-          <a:bodyPr xmlns:a="http://schemas.openxmlformats.org/drawingml/2006/main"/>
-          <a:lstStyle xmlns:a="http://schemas.openxmlformats.org/drawingml/2006/main"/>
-          <a:p xmlns:a="http://schemas.openxmlformats.org/drawingml/2006/main">
-            <a:pPr algn="l">
-              <a:defRPr sz="1050" b="1">
-                <a:solidFill>
-                  <a:srgbClr val="171717"/>
-                </a:solidFill>
-              </a:defRPr>
-            </a:pPr>
-            <a:r>
-              <a:rPr sz="1050" b="1">
-                <a:solidFill>
-                  <a:srgbClr val="171717"/>
-                </a:solidFill>
-              </a:rPr>
-              <a:t>ver: 3  branch: docx   add _repair_docx_relationships</a:t>
-            </a:r>
-          </a:p>
-        </p:txBody>
+                <a16:creationId xmlns:a16="http://schemas.microsoft.com/office/drawing/2014/main" id="{07BB4CD9-0587-453A-88C6-28E9C245E1EE}"/>
+              </a:ext>
+            </a:extLst>
+          </p:cNvPr>
+          <p:cNvSpPr>
+            <a:spLocks xmlns:a="http://schemas.openxmlformats.org/drawingml/2006/main" noGrp="1"/>
+          </p:cNvSpPr>
+          <p:nvPr/>
+        </p:nvSpPr>
+        <p:spPr>
+          <a:xfrm xmlns:a="http://schemas.openxmlformats.org/drawingml/2006/main">
+            <a:off x="4076700" y="5524500"/>
+            <a:ext cx="7162800" cy="495300"/>
+          </a:xfrm>
+          <a:prstGeom xmlns:a="http://schemas.openxmlformats.org/drawingml/2006/main" prst="roundRect">
+            <a:avLst>
+              <a:gd name="adj" fmla="val 46154"/>
+            </a:avLst>
+          </a:prstGeom>
+          <a:solidFill xmlns:a="http://schemas.openxmlformats.org/drawingml/2006/main">
+            <a:srgbClr val="24211D"/>
+          </a:solidFill>
+          <a:ln xmlns:a="http://schemas.openxmlformats.org/drawingml/2006/main" w="0">
+            <a:solidFill>
+              <a:srgbClr val="24211D"/>
+            </a:solidFill>
+            <a:prstDash val="solid"/>
+          </a:ln>
+        </p:spPr>
+        <p:style>
+          <a:lnRef xmlns:a="http://schemas.openxmlformats.org/drawingml/2006/main" idx="0"/>
+          <a:fillRef xmlns:a="http://schemas.openxmlformats.org/drawingml/2006/main" idx="0"/>
+          <a:effectRef xmlns:a="http://schemas.openxmlformats.org/drawingml/2006/main" idx="4"/>
+          <a:fontRef xmlns:a="http://schemas.openxmlformats.org/drawingml/2006/main" idx="major"/>
+        </p:style>
       </p:sp>
       <p:sp>
         <p:nvSpPr>
           <p:cNvPr id="40" name="">
             <a:extLst xmlns:a="http://schemas.openxmlformats.org/drawingml/2006/main">
               <a:ext uri="{FF2B5EF4-FFF2-40B4-BE49-F238E27FC236}">
-                <a16:creationId xmlns:a16="http://schemas.microsoft.com/office/drawing/2014/main" id="{D5D899D1-43ED-42DD-B282-5BDDD0F159D3}"/>
-              </a:ext>
-            </a:extLst>
-          </p:cNvPr>
-          <p:cNvSpPr>
-            <a:spLocks xmlns:a="http://schemas.openxmlformats.org/drawingml/2006/main" noGrp="1"/>
-          </p:cNvSpPr>
-          <p:nvPr/>
-        </p:nvSpPr>
-        <p:spPr>
-          <a:xfrm xmlns:a="http://schemas.openxmlformats.org/drawingml/2006/main">
-            <a:off x="6800850" y="5524500"/>
-            <a:ext cx="3429000" cy="171450"/>
-          </a:xfrm>
-          <a:prstGeom xmlns:a="http://schemas.openxmlformats.org/drawingml/2006/main" prst="rect">
-            <a:avLst/>
-          </a:prstGeom>
-          <a:noFill xmlns:a="http://schemas.openxmlformats.org/drawingml/2006/main"/>
-          <a:ln xmlns:a="http://schemas.openxmlformats.org/drawingml/2006/main" w="0">
-            <a:noFill/>
-            <a:prstDash val="solid"/>
-          </a:ln>
-        </p:spPr>
-        <p:txBody>
-          <a:bodyPr xmlns:a="http://schemas.openxmlformats.org/drawingml/2006/main"/>
-          <a:lstStyle xmlns:a="http://schemas.openxmlformats.org/drawingml/2006/main"/>
-          <a:p xmlns:a="http://schemas.openxmlformats.org/drawingml/2006/main">
-            <a:pPr algn="l">
-              <a:defRPr sz="1050" b="1">
-                <a:solidFill>
-                  <a:srgbClr val="171717"/>
-                </a:solidFill>
-              </a:defRPr>
-            </a:pPr>
-            <a:r>
-              <a:rPr sz="1050" b="1">
-                <a:solidFill>
-                  <a:srgbClr val="171717"/>
-                </a:solidFill>
-              </a:rPr>
-              <a:t>ver: 4  scope: shared add table_to_list</a:t>
+                <a16:creationId xmlns:a16="http://schemas.microsoft.com/office/drawing/2014/main" id="{81D224BC-B5E8-40EC-A17B-7FEC4456CCFE}"/>
+              </a:ext>
+            </a:extLst>
+          </p:cNvPr>
+          <p:cNvSpPr>
+            <a:spLocks xmlns:a="http://schemas.openxmlformats.org/drawingml/2006/main" noGrp="1"/>
+          </p:cNvSpPr>
+          <p:nvPr/>
+        </p:nvSpPr>
+        <p:spPr>
+          <a:xfrm xmlns:a="http://schemas.openxmlformats.org/drawingml/2006/main">
+            <a:off x="4343400" y="5676900"/>
+            <a:ext cx="6477000" cy="171450"/>
+          </a:xfrm>
+          <a:prstGeom xmlns:a="http://schemas.openxmlformats.org/drawingml/2006/main" prst="rect">
+            <a:avLst/>
+          </a:prstGeom>
+          <a:noFill xmlns:a="http://schemas.openxmlformats.org/drawingml/2006/main"/>
+          <a:ln xmlns:a="http://schemas.openxmlformats.org/drawingml/2006/main" w="0">
+            <a:noFill/>
+            <a:prstDash val="solid"/>
+          </a:ln>
+        </p:spPr>
+        <p:txBody>
+          <a:bodyPr xmlns:a="http://schemas.openxmlformats.org/drawingml/2006/main"/>
+          <a:lstStyle xmlns:a="http://schemas.openxmlformats.org/drawingml/2006/main"/>
+          <a:p xmlns:a="http://schemas.openxmlformats.org/drawingml/2006/main">
+            <a:pPr algn="l">
+              <a:defRPr sz="1200" b="1">
+                <a:solidFill>
+                  <a:srgbClr val="FFFFFF"/>
+                </a:solidFill>
+              </a:defRPr>
+            </a:pPr>
+            <a:r>
+              <a:rPr sz="1200" b="1">
+                <a:solidFill>
+                  <a:srgbClr val="FFFFFF"/>
+                </a:solidFill>
+              </a:rPr>
+              <a:t>代码里看分支 / repair / fallback / shared，设计 md 再把这些变化记成 iteration_log。</a:t>
             </a:r>
           </a:p>
         </p:txBody>
@@ -6060,7 +6460,7 @@
     </p:spTree>
     <p:extLst>
       <p:ext uri="{BB962C8B-B14F-4D97-AF65-F5344CB8AC3E}">
-        <p14:creationId xmlns:p14="http://schemas.microsoft.com/office/powerpoint/2010/main" val="1596288822"/>
+        <p14:creationId xmlns:p14="http://schemas.microsoft.com/office/powerpoint/2010/main" val="1988191915"/>
       </p:ext>
     </p:extLst>
   </p:cSld>
@@ -6091,7 +6491,7 @@
           <p:cNvPr id="1" name="">
             <a:extLst xmlns:a="http://schemas.openxmlformats.org/drawingml/2006/main">
               <a:ext uri="{FF2B5EF4-FFF2-40B4-BE49-F238E27FC236}">
-                <a16:creationId xmlns:a16="http://schemas.microsoft.com/office/drawing/2014/main" id="{5D8EB411-D234-44FD-9024-B62FD59C1AEE}"/>
+                <a16:creationId xmlns:a16="http://schemas.microsoft.com/office/drawing/2014/main" id="{3B4B8B82-D647-4E90-8CC7-28904A6E9229}"/>
               </a:ext>
             </a:extLst>
           </p:cNvPr>
@@ -6124,7 +6524,7 @@
           <p:cNvPr id="2" name="">
             <a:extLst xmlns:a="http://schemas.openxmlformats.org/drawingml/2006/main">
               <a:ext uri="{FF2B5EF4-FFF2-40B4-BE49-F238E27FC236}">
-                <a16:creationId xmlns:a16="http://schemas.microsoft.com/office/drawing/2014/main" id="{E21ACE54-F138-4514-9F34-441DB755DD7D}"/>
+                <a16:creationId xmlns:a16="http://schemas.microsoft.com/office/drawing/2014/main" id="{70235883-8A33-40C1-B33F-502941A1F066}"/>
               </a:ext>
             </a:extLst>
           </p:cNvPr>
@@ -6157,7 +6557,7 @@
           <p:cNvPr id="3" name="">
             <a:extLst xmlns:a="http://schemas.openxmlformats.org/drawingml/2006/main">
               <a:ext uri="{FF2B5EF4-FFF2-40B4-BE49-F238E27FC236}">
-                <a16:creationId xmlns:a16="http://schemas.microsoft.com/office/drawing/2014/main" id="{01185AD9-8991-48B4-8D9E-3EA96D4D32C9}"/>
+                <a16:creationId xmlns:a16="http://schemas.microsoft.com/office/drawing/2014/main" id="{C9C79868-69DF-440D-98B0-8534062FC68D}"/>
               </a:ext>
             </a:extLst>
           </p:cNvPr>
@@ -6190,7 +6590,7 @@
           <p:cNvPr id="4" name="">
             <a:extLst xmlns:a="http://schemas.openxmlformats.org/drawingml/2006/main">
               <a:ext uri="{FF2B5EF4-FFF2-40B4-BE49-F238E27FC236}">
-                <a16:creationId xmlns:a16="http://schemas.microsoft.com/office/drawing/2014/main" id="{67AF2FEE-8473-40E1-AFC4-B8C6745A3F0C}"/>
+                <a16:creationId xmlns:a16="http://schemas.microsoft.com/office/drawing/2014/main" id="{240FD030-286C-4BF4-B51F-ABC566C3A91C}"/>
               </a:ext>
             </a:extLst>
           </p:cNvPr>
@@ -6240,7 +6640,7 @@
           <p:cNvPr id="5" name="">
             <a:extLst xmlns:a="http://schemas.openxmlformats.org/drawingml/2006/main">
               <a:ext uri="{FF2B5EF4-FFF2-40B4-BE49-F238E27FC236}">
-                <a16:creationId xmlns:a16="http://schemas.microsoft.com/office/drawing/2014/main" id="{C97DD458-7DA5-468D-93A6-A55A61E7F9F5}"/>
+                <a16:creationId xmlns:a16="http://schemas.microsoft.com/office/drawing/2014/main" id="{D896383D-DC1F-47DA-B7FC-54302EA5E799}"/>
               </a:ext>
             </a:extLst>
           </p:cNvPr>
@@ -6290,7 +6690,7 @@
           <p:cNvPr id="6" name="">
             <a:extLst xmlns:a="http://schemas.openxmlformats.org/drawingml/2006/main">
               <a:ext uri="{FF2B5EF4-FFF2-40B4-BE49-F238E27FC236}">
-                <a16:creationId xmlns:a16="http://schemas.microsoft.com/office/drawing/2014/main" id="{912355CE-3557-4462-BBFD-9F2276496289}"/>
+                <a16:creationId xmlns:a16="http://schemas.microsoft.com/office/drawing/2014/main" id="{5B994A2E-E507-4421-A3FF-1ADD7B66DE85}"/>
               </a:ext>
             </a:extLst>
           </p:cNvPr>
@@ -6330,7 +6730,7 @@
                   <a:srgbClr val="171717"/>
                 </a:solidFill>
               </a:rPr>
-              <a:t>愿景、技术栈和预期效果</a:t>
+              <a:t>先怎么落地</a:t>
             </a:r>
           </a:p>
         </p:txBody>
@@ -6340,7 +6740,7 @@
           <p:cNvPr id="7" name="">
             <a:extLst xmlns:a="http://schemas.openxmlformats.org/drawingml/2006/main">
               <a:ext uri="{FF2B5EF4-FFF2-40B4-BE49-F238E27FC236}">
-                <a16:creationId xmlns:a16="http://schemas.microsoft.com/office/drawing/2014/main" id="{9E185521-2952-4456-82AA-80A1B63F7834}"/>
+                <a16:creationId xmlns:a16="http://schemas.microsoft.com/office/drawing/2014/main" id="{44A9C0B3-B559-4E0F-A801-FC0F20F51EC1}"/>
               </a:ext>
             </a:extLst>
           </p:cNvPr>
@@ -6380,7 +6780,7 @@
                   <a:srgbClr val="57534E"/>
                 </a:solidFill>
               </a:rPr>
-              <a:t>先帮一个人少重写，最后服务整个项目组；技术栈只要够小够诚实。</a:t>
+              <a:t>前台先不做通用 app，先把蒸馏、推送、审查和回灌这条线跑通。</a:t>
             </a:r>
           </a:p>
         </p:txBody>
@@ -6390,7 +6790,7 @@
           <p:cNvPr id="8" name="">
             <a:extLst xmlns:a="http://schemas.openxmlformats.org/drawingml/2006/main">
               <a:ext uri="{FF2B5EF4-FFF2-40B4-BE49-F238E27FC236}">
-                <a16:creationId xmlns:a16="http://schemas.microsoft.com/office/drawing/2014/main" id="{6618C6A0-C5EB-4472-8861-09CAA9458D9C}"/>
+                <a16:creationId xmlns:a16="http://schemas.microsoft.com/office/drawing/2014/main" id="{598CE8B6-CA7E-4E15-8034-0FC082D38BF4}"/>
               </a:ext>
             </a:extLst>
           </p:cNvPr>
@@ -6431,7 +6831,7 @@
           <p:cNvPr id="9" name="">
             <a:extLst xmlns:a="http://schemas.openxmlformats.org/drawingml/2006/main">
               <a:ext uri="{FF2B5EF4-FFF2-40B4-BE49-F238E27FC236}">
-                <a16:creationId xmlns:a16="http://schemas.microsoft.com/office/drawing/2014/main" id="{2BA4597B-1DC9-41AD-99F2-7496F9D2A842}"/>
+                <a16:creationId xmlns:a16="http://schemas.microsoft.com/office/drawing/2014/main" id="{96AE0269-41B2-4C7B-88FC-9B5AA52AA604}"/>
               </a:ext>
             </a:extLst>
           </p:cNvPr>
@@ -6471,7 +6871,7 @@
                   <a:srgbClr val="171717"/>
                 </a:solidFill>
               </a:rPr>
-              <a:t>愿景</a:t>
+              <a:t>推进顺序</a:t>
             </a:r>
           </a:p>
         </p:txBody>
@@ -6481,7 +6881,7 @@
           <p:cNvPr id="10" name="">
             <a:extLst xmlns:a="http://schemas.openxmlformats.org/drawingml/2006/main">
               <a:ext uri="{FF2B5EF4-FFF2-40B4-BE49-F238E27FC236}">
-                <a16:creationId xmlns:a16="http://schemas.microsoft.com/office/drawing/2014/main" id="{6CEEADB3-AA62-4A75-A88E-B69D8FDD6A9A}"/>
+                <a16:creationId xmlns:a16="http://schemas.microsoft.com/office/drawing/2014/main" id="{AD131F91-6005-4370-B59D-79C966331E98}"/>
               </a:ext>
             </a:extLst>
           </p:cNvPr>
@@ -6531,7 +6931,7 @@
           <p:cNvPr id="11" name="">
             <a:extLst xmlns:a="http://schemas.openxmlformats.org/drawingml/2006/main">
               <a:ext uri="{FF2B5EF4-FFF2-40B4-BE49-F238E27FC236}">
-                <a16:creationId xmlns:a16="http://schemas.microsoft.com/office/drawing/2014/main" id="{4873467C-47ED-4368-A8B1-CAEE8D96D739}"/>
+                <a16:creationId xmlns:a16="http://schemas.microsoft.com/office/drawing/2014/main" id="{FA447E26-D184-42CA-8B48-805EA7F3401F}"/>
               </a:ext>
             </a:extLst>
           </p:cNvPr>
@@ -6571,7 +6971,7 @@
                   <a:srgbClr val="171717"/>
                 </a:solidFill>
               </a:rPr>
-              <a:t>个人模式：先让自己少重写一类杂活</a:t>
+              <a:t>先个人：先让自己少重写一类杂活</a:t>
             </a:r>
           </a:p>
         </p:txBody>
@@ -6581,7 +6981,7 @@
           <p:cNvPr id="12" name="">
             <a:extLst xmlns:a="http://schemas.openxmlformats.org/drawingml/2006/main">
               <a:ext uri="{FF2B5EF4-FFF2-40B4-BE49-F238E27FC236}">
-                <a16:creationId xmlns:a16="http://schemas.microsoft.com/office/drawing/2014/main" id="{70034AD6-A129-4D82-972F-EC538D490181}"/>
+                <a16:creationId xmlns:a16="http://schemas.microsoft.com/office/drawing/2014/main" id="{2D685C00-0FFA-4EC1-A2B2-10C85AE17E53}"/>
               </a:ext>
             </a:extLst>
           </p:cNvPr>
@@ -6631,7 +7031,7 @@
           <p:cNvPr id="13" name="">
             <a:extLst xmlns:a="http://schemas.openxmlformats.org/drawingml/2006/main">
               <a:ext uri="{FF2B5EF4-FFF2-40B4-BE49-F238E27FC236}">
-                <a16:creationId xmlns:a16="http://schemas.microsoft.com/office/drawing/2014/main" id="{E4934337-83EA-4095-9D07-D3ECB577CC9E}"/>
+                <a16:creationId xmlns:a16="http://schemas.microsoft.com/office/drawing/2014/main" id="{17207E95-95ED-4BDB-B032-A4DAE57B81E0}"/>
               </a:ext>
             </a:extLst>
           </p:cNvPr>
@@ -6671,7 +7071,7 @@
                   <a:srgbClr val="171717"/>
                 </a:solidFill>
               </a:rPr>
-              <a:t>团队模式：promoted 开始变成团队资产</a:t>
+              <a:t>再团队：promoted 开始变成团队资产</a:t>
             </a:r>
           </a:p>
         </p:txBody>
@@ -6681,7 +7081,7 @@
           <p:cNvPr id="14" name="">
             <a:extLst xmlns:a="http://schemas.openxmlformats.org/drawingml/2006/main">
               <a:ext uri="{FF2B5EF4-FFF2-40B4-BE49-F238E27FC236}">
-                <a16:creationId xmlns:a16="http://schemas.microsoft.com/office/drawing/2014/main" id="{EEF09ADA-F344-42AB-96E0-3B63CA4C07CC}"/>
+                <a16:creationId xmlns:a16="http://schemas.microsoft.com/office/drawing/2014/main" id="{9BAA9326-D0CC-4DF7-A071-46AC7C29476C}"/>
               </a:ext>
             </a:extLst>
           </p:cNvPr>
@@ -6731,7 +7131,7 @@
           <p:cNvPr id="15" name="">
             <a:extLst xmlns:a="http://schemas.openxmlformats.org/drawingml/2006/main">
               <a:ext uri="{FF2B5EF4-FFF2-40B4-BE49-F238E27FC236}">
-                <a16:creationId xmlns:a16="http://schemas.microsoft.com/office/drawing/2014/main" id="{C760D802-94DA-425B-9FED-2705370F1638}"/>
+                <a16:creationId xmlns:a16="http://schemas.microsoft.com/office/drawing/2014/main" id="{96AAB0B0-6217-4CA8-8F91-D4F876963548}"/>
               </a:ext>
             </a:extLst>
           </p:cNvPr>
@@ -6771,7 +7171,7 @@
                   <a:srgbClr val="171717"/>
                 </a:solidFill>
               </a:rPr>
-              <a:t>项目组模式：相同目的合并，不同环境保留分支</a:t>
+              <a:t>再项目组：相同目的合并，不同环境保留分支</a:t>
             </a:r>
           </a:p>
         </p:txBody>
@@ -6781,7 +7181,7 @@
           <p:cNvPr id="16" name="">
             <a:extLst xmlns:a="http://schemas.openxmlformats.org/drawingml/2006/main">
               <a:ext uri="{FF2B5EF4-FFF2-40B4-BE49-F238E27FC236}">
-                <a16:creationId xmlns:a16="http://schemas.microsoft.com/office/drawing/2014/main" id="{58A82DEE-57DC-44D5-86D8-D077609AECE7}"/>
+                <a16:creationId xmlns:a16="http://schemas.microsoft.com/office/drawing/2014/main" id="{77CBD6AE-A06C-44F8-8840-0EFF96BB1160}"/>
               </a:ext>
             </a:extLst>
           </p:cNvPr>
@@ -6822,7 +7222,7 @@
           <p:cNvPr id="17" name="">
             <a:extLst xmlns:a="http://schemas.openxmlformats.org/drawingml/2006/main">
               <a:ext uri="{FF2B5EF4-FFF2-40B4-BE49-F238E27FC236}">
-                <a16:creationId xmlns:a16="http://schemas.microsoft.com/office/drawing/2014/main" id="{FA8C5003-6247-466D-9DC3-569C414BBEDB}"/>
+                <a16:creationId xmlns:a16="http://schemas.microsoft.com/office/drawing/2014/main" id="{9B322E44-5814-46F2-915B-3D782ECDC64C}"/>
               </a:ext>
             </a:extLst>
           </p:cNvPr>
@@ -6872,7 +7272,7 @@
           <p:cNvPr id="18" name="">
             <a:extLst xmlns:a="http://schemas.openxmlformats.org/drawingml/2006/main">
               <a:ext uri="{FF2B5EF4-FFF2-40B4-BE49-F238E27FC236}">
-                <a16:creationId xmlns:a16="http://schemas.microsoft.com/office/drawing/2014/main" id="{F6566B6D-5F3B-4481-924E-19C5C02F5ABF}"/>
+                <a16:creationId xmlns:a16="http://schemas.microsoft.com/office/drawing/2014/main" id="{D23F7EC1-53F1-42BB-B7EC-42A199BC6AE8}"/>
               </a:ext>
             </a:extLst>
           </p:cNvPr>
@@ -6922,7 +7322,7 @@
           <p:cNvPr id="19" name="">
             <a:extLst xmlns:a="http://schemas.openxmlformats.org/drawingml/2006/main">
               <a:ext uri="{FF2B5EF4-FFF2-40B4-BE49-F238E27FC236}">
-                <a16:creationId xmlns:a16="http://schemas.microsoft.com/office/drawing/2014/main" id="{B4F44E47-8A4F-4366-888E-5A1544798B8B}"/>
+                <a16:creationId xmlns:a16="http://schemas.microsoft.com/office/drawing/2014/main" id="{E2CE469F-0505-4C05-85F4-9763219D8257}"/>
               </a:ext>
             </a:extLst>
           </p:cNvPr>
@@ -6972,7 +7372,7 @@
           <p:cNvPr id="20" name="">
             <a:extLst xmlns:a="http://schemas.openxmlformats.org/drawingml/2006/main">
               <a:ext uri="{FF2B5EF4-FFF2-40B4-BE49-F238E27FC236}">
-                <a16:creationId xmlns:a16="http://schemas.microsoft.com/office/drawing/2014/main" id="{947C0F75-60BF-494F-8D58-8CC23F202E33}"/>
+                <a16:creationId xmlns:a16="http://schemas.microsoft.com/office/drawing/2014/main" id="{D2C2B22E-A5CB-472A-9044-6C0C1E9A92A4}"/>
               </a:ext>
             </a:extLst>
           </p:cNvPr>
@@ -7022,7 +7422,7 @@
           <p:cNvPr id="21" name="">
             <a:extLst xmlns:a="http://schemas.openxmlformats.org/drawingml/2006/main">
               <a:ext uri="{FF2B5EF4-FFF2-40B4-BE49-F238E27FC236}">
-                <a16:creationId xmlns:a16="http://schemas.microsoft.com/office/drawing/2014/main" id="{1CE33567-9F56-4749-A885-DC13252C361B}"/>
+                <a16:creationId xmlns:a16="http://schemas.microsoft.com/office/drawing/2014/main" id="{190AED1A-1150-44A2-9A05-1137971BC612}"/>
               </a:ext>
             </a:extLst>
           </p:cNvPr>
@@ -7072,7 +7472,7 @@
           <p:cNvPr id="22" name="">
             <a:extLst xmlns:a="http://schemas.openxmlformats.org/drawingml/2006/main">
               <a:ext uri="{FF2B5EF4-FFF2-40B4-BE49-F238E27FC236}">
-                <a16:creationId xmlns:a16="http://schemas.microsoft.com/office/drawing/2014/main" id="{81199D8E-7795-462F-A4CE-42DBC391DDA1}"/>
+                <a16:creationId xmlns:a16="http://schemas.microsoft.com/office/drawing/2014/main" id="{1BAACD11-446A-4997-8031-A2C62B79F282}"/>
               </a:ext>
             </a:extLst>
           </p:cNvPr>
@@ -7122,7 +7522,7 @@
           <p:cNvPr id="23" name="">
             <a:extLst xmlns:a="http://schemas.openxmlformats.org/drawingml/2006/main">
               <a:ext uri="{FF2B5EF4-FFF2-40B4-BE49-F238E27FC236}">
-                <a16:creationId xmlns:a16="http://schemas.microsoft.com/office/drawing/2014/main" id="{31D10A73-3D5C-4720-8AB1-3CC2A3F70A23}"/>
+                <a16:creationId xmlns:a16="http://schemas.microsoft.com/office/drawing/2014/main" id="{CB6BC068-BE3A-401C-80EF-B6F905CD5AAB}"/>
               </a:ext>
             </a:extLst>
           </p:cNvPr>
@@ -7172,7 +7572,7 @@
           <p:cNvPr id="24" name="">
             <a:extLst xmlns:a="http://schemas.openxmlformats.org/drawingml/2006/main">
               <a:ext uri="{FF2B5EF4-FFF2-40B4-BE49-F238E27FC236}">
-                <a16:creationId xmlns:a16="http://schemas.microsoft.com/office/drawing/2014/main" id="{AD1358C5-203C-4258-8C18-71CB9F2E36F2}"/>
+                <a16:creationId xmlns:a16="http://schemas.microsoft.com/office/drawing/2014/main" id="{B7E8D522-B062-4BD9-B7F9-7D16C00E70E6}"/>
               </a:ext>
             </a:extLst>
           </p:cNvPr>
@@ -7222,7 +7622,7 @@
           <p:cNvPr id="25" name="">
             <a:extLst xmlns:a="http://schemas.openxmlformats.org/drawingml/2006/main">
               <a:ext uri="{FF2B5EF4-FFF2-40B4-BE49-F238E27FC236}">
-                <a16:creationId xmlns:a16="http://schemas.microsoft.com/office/drawing/2014/main" id="{360484D1-11E8-41AD-8A4C-5C86D464E6D1}"/>
+                <a16:creationId xmlns:a16="http://schemas.microsoft.com/office/drawing/2014/main" id="{9597FBB3-C655-4E99-83A5-5D77C025A70C}"/>
               </a:ext>
             </a:extLst>
           </p:cNvPr>
@@ -7272,7 +7672,7 @@
           <p:cNvPr id="26" name="">
             <a:extLst xmlns:a="http://schemas.openxmlformats.org/drawingml/2006/main">
               <a:ext uri="{FF2B5EF4-FFF2-40B4-BE49-F238E27FC236}">
-                <a16:creationId xmlns:a16="http://schemas.microsoft.com/office/drawing/2014/main" id="{E3955DB5-249E-4E39-85EB-5AC85452590B}"/>
+                <a16:creationId xmlns:a16="http://schemas.microsoft.com/office/drawing/2014/main" id="{D641CD9A-00F6-4181-949B-BF485C463D26}"/>
               </a:ext>
             </a:extLst>
           </p:cNvPr>
@@ -7313,7 +7713,7 @@
           <p:cNvPr id="27" name="">
             <a:extLst xmlns:a="http://schemas.openxmlformats.org/drawingml/2006/main">
               <a:ext uri="{FF2B5EF4-FFF2-40B4-BE49-F238E27FC236}">
-                <a16:creationId xmlns:a16="http://schemas.microsoft.com/office/drawing/2014/main" id="{1E21D153-8D97-4B19-AF7F-3A1216D03D30}"/>
+                <a16:creationId xmlns:a16="http://schemas.microsoft.com/office/drawing/2014/main" id="{D19AB2FF-E275-4B5D-BF02-217DAD1DE922}"/>
               </a:ext>
             </a:extLst>
           </p:cNvPr>
@@ -7370,7 +7770,7 @@
         </p:xfrm>
         <a:graphic xmlns:a="http://schemas.openxmlformats.org/drawingml/2006/main">
           <a:graphicData uri="http://schemas.openxmlformats.org/drawingml/2006/chart">
-            <c:chart xmlns:r="http://schemas.openxmlformats.org/officeDocument/2006/relationships" xmlns:c="http://schemas.openxmlformats.org/drawingml/2006/chart" r:id="Rf0ebd6e2eaa44c61"/>
+            <c:chart xmlns:r="http://schemas.openxmlformats.org/officeDocument/2006/relationships" xmlns:c="http://schemas.openxmlformats.org/drawingml/2006/chart" r:id="R5edd00f591404c75"/>
           </a:graphicData>
         </a:graphic>
       </p:graphicFrame>
@@ -7379,7 +7779,7 @@
           <p:cNvPr id="29" name="">
             <a:extLst xmlns:a="http://schemas.openxmlformats.org/drawingml/2006/main">
               <a:ext uri="{FF2B5EF4-FFF2-40B4-BE49-F238E27FC236}">
-                <a16:creationId xmlns:a16="http://schemas.microsoft.com/office/drawing/2014/main" id="{89C5ED45-0689-43FF-BA72-260294B04F4E}"/>
+                <a16:creationId xmlns:a16="http://schemas.microsoft.com/office/drawing/2014/main" id="{747D04B2-0834-46C6-A5A6-834683294DEE}"/>
               </a:ext>
             </a:extLst>
           </p:cNvPr>
@@ -7427,7 +7827,7 @@
     </p:spTree>
     <p:extLst>
       <p:ext uri="{BB962C8B-B14F-4D97-AF65-F5344CB8AC3E}">
-        <p14:creationId xmlns:p14="http://schemas.microsoft.com/office/powerpoint/2010/main" val="1850856613"/>
+        <p14:creationId xmlns:p14="http://schemas.microsoft.com/office/powerpoint/2010/main" val="392188302"/>
       </p:ext>
     </p:extLst>
   </p:cSld>
